--- a/videos/deep-learning/002_transformers_part2/recreated_pptx/slide_046_recreated.pptx
+++ b/videos/deep-learning/002_transformers_part2/recreated_pptx/slide_046_recreated.pptx
@@ -2472,201 +2472,977 @@
           </a:p>
         </p:txBody>
       </p:sp>
-      <p:pic>
-        <p:nvPicPr>
-          <p:cNvPr id="54" name="Image 0" descr="/home/ahmed/Projects/ai_llm_slides/videos/deep-learning/002_transformers_part2/recreated_pptx/build/assets/s038_orangearrow.png">    </p:cNvPr>
-          <p:cNvPicPr>
-            <a:picLocks noChangeAspect="1"/>
-          </p:cNvPicPr>
-          <p:nvPr/>
-        </p:nvPicPr>
-        <p:blipFill>
-          <a:blip r:embed="rId1"/>
-          <a:stretch>
-            <a:fillRect/>
-          </a:stretch>
-        </p:blipFill>
+      <p:sp>
+        <p:nvSpPr>
+          <p:cNvPr id="54" name="Shape 52"/>
+          <p:cNvSpPr/>
+          <p:nvPr/>
+        </p:nvSpPr>
         <p:spPr>
           <a:xfrm>
             <a:off x="1814830" y="1893570"/>
             <a:ext cx="685800" cy="1921510"/>
           </a:xfrm>
-          <a:prstGeom prst="rect">
-            <a:avLst/>
-          </a:prstGeom>
-        </p:spPr>
-      </p:pic>
-      <p:pic>
-        <p:nvPicPr>
-          <p:cNvPr id="55" name="Image 1" descr="/home/ahmed/Projects/ai_llm_slides/videos/deep-learning/002_transformers_part2/recreated_pptx/build/assets/s038_orangearrow.png">    </p:cNvPr>
-          <p:cNvPicPr>
-            <a:picLocks noChangeAspect="1"/>
-          </p:cNvPicPr>
-          <p:nvPr/>
-        </p:nvPicPr>
-        <p:blipFill>
-          <a:blip r:embed="rId2"/>
-          <a:stretch>
-            <a:fillRect/>
-          </a:stretch>
-        </p:blipFill>
+          <a:custGeom>
+            <a:avLst/>
+            <a:gdLst/>
+            <a:ahLst/>
+            <a:cxnLst/>
+            <a:rect l="l" t="t" r="r" b="b"/>
+            <a:pathLst>
+              <a:path w="685800" h="1921510">
+                <a:moveTo>
+                  <a:pt x="220980" y="1897008"/>
+                </a:moveTo>
+                <a:cubicBezTo>
+                  <a:pt x="201930" y="1870141"/>
+                  <a:pt x="141393" y="1815548"/>
+                  <a:pt x="106680" y="1735807"/>
+                </a:cubicBezTo>
+                <a:cubicBezTo>
+                  <a:pt x="71967" y="1656067"/>
+                  <a:pt x="28363" y="1538068"/>
+                  <a:pt x="12700" y="1418564"/>
+                </a:cubicBezTo>
+                <a:cubicBezTo>
+                  <a:pt x="-2963" y="1299061"/>
+                  <a:pt x="12700" y="1137001"/>
+                  <a:pt x="12700" y="1018787"/>
+                </a:cubicBezTo>
+                <a:cubicBezTo>
+                  <a:pt x="12700" y="900573"/>
+                  <a:pt x="-847" y="796760"/>
+                  <a:pt x="12700" y="709282"/>
+                </a:cubicBezTo>
+                <a:cubicBezTo>
+                  <a:pt x="26247" y="621804"/>
+                  <a:pt x="64982" y="565706"/>
+                  <a:pt x="93980" y="493918"/>
+                </a:cubicBezTo>
+                <a:cubicBezTo>
+                  <a:pt x="122978" y="422130"/>
+                  <a:pt x="155787" y="332503"/>
+                  <a:pt x="186690" y="278554"/>
+                </a:cubicBezTo>
+                <a:cubicBezTo>
+                  <a:pt x="217593" y="224606"/>
+                  <a:pt x="247438" y="197309"/>
+                  <a:pt x="279400" y="170228"/>
+                </a:cubicBezTo>
+                <a:cubicBezTo>
+                  <a:pt x="311362" y="143146"/>
+                  <a:pt x="349673" y="134119"/>
+                  <a:pt x="378460" y="116064"/>
+                </a:cubicBezTo>
+                <a:cubicBezTo>
+                  <a:pt x="407247" y="98010"/>
+                  <a:pt x="417830" y="76517"/>
+                  <a:pt x="452120" y="61901"/>
+                </a:cubicBezTo>
+                <a:cubicBezTo>
+                  <a:pt x="486410" y="47285"/>
+                  <a:pt x="562187" y="33960"/>
+                  <a:pt x="584200" y="28371"/>
+                </a:cubicBezTo>
+              </a:path>
+            </a:pathLst>
+          </a:custGeom>
+          <a:ln w="16891">
+            <a:solidFill>
+              <a:srgbClr val="E36C09"/>
+            </a:solidFill>
+            <a:prstDash val="solid"/>
+          </a:ln>
+        </p:spPr>
+      </p:sp>
+      <p:sp>
+        <p:nvSpPr>
+          <p:cNvPr id="55" name="Shape 53"/>
+          <p:cNvSpPr/>
+          <p:nvPr/>
+        </p:nvSpPr>
+        <p:spPr>
+          <a:xfrm>
+            <a:off x="1814830" y="1893570"/>
+            <a:ext cx="685800" cy="1921510"/>
+          </a:xfrm>
+          <a:custGeom>
+            <a:avLst/>
+            <a:gdLst/>
+            <a:ahLst/>
+            <a:cxnLst/>
+            <a:rect l="l" t="t" r="r" b="b"/>
+            <a:pathLst>
+              <a:path w="685800" h="1921510">
+                <a:moveTo>
+                  <a:pt x="594360" y="28371"/>
+                </a:moveTo>
+                <a:lnTo>
+                  <a:pt x="543241" y="70828"/>
+                </a:lnTo>
+                <a:lnTo>
+                  <a:pt x="529832" y="14102"/>
+                </a:lnTo>
+                <a:close/>
+              </a:path>
+            </a:pathLst>
+          </a:custGeom>
+          <a:solidFill>
+            <a:srgbClr val="E36C09"/>
+          </a:solidFill>
+          <a:ln/>
+        </p:spPr>
+      </p:sp>
+      <p:sp>
+        <p:nvSpPr>
+          <p:cNvPr id="56" name="Shape 54"/>
+          <p:cNvSpPr/>
+          <p:nvPr/>
+        </p:nvSpPr>
         <p:spPr>
           <a:xfrm>
             <a:off x="2772410" y="1893570"/>
             <a:ext cx="685800" cy="1921510"/>
           </a:xfrm>
-          <a:prstGeom prst="rect">
-            <a:avLst/>
-          </a:prstGeom>
-        </p:spPr>
-      </p:pic>
-      <p:pic>
-        <p:nvPicPr>
-          <p:cNvPr id="56" name="Image 2" descr="/home/ahmed/Projects/ai_llm_slides/videos/deep-learning/002_transformers_part2/recreated_pptx/build/assets/s038_orangearrow.png">    </p:cNvPr>
-          <p:cNvPicPr>
-            <a:picLocks noChangeAspect="1"/>
-          </p:cNvPicPr>
-          <p:nvPr/>
-        </p:nvPicPr>
-        <p:blipFill>
-          <a:blip r:embed="rId3"/>
-          <a:stretch>
-            <a:fillRect/>
-          </a:stretch>
-        </p:blipFill>
+          <a:custGeom>
+            <a:avLst/>
+            <a:gdLst/>
+            <a:ahLst/>
+            <a:cxnLst/>
+            <a:rect l="l" t="t" r="r" b="b"/>
+            <a:pathLst>
+              <a:path w="685800" h="1921510">
+                <a:moveTo>
+                  <a:pt x="220980" y="1897008"/>
+                </a:moveTo>
+                <a:cubicBezTo>
+                  <a:pt x="201930" y="1870141"/>
+                  <a:pt x="141393" y="1815548"/>
+                  <a:pt x="106680" y="1735807"/>
+                </a:cubicBezTo>
+                <a:cubicBezTo>
+                  <a:pt x="71967" y="1656067"/>
+                  <a:pt x="28363" y="1538068"/>
+                  <a:pt x="12700" y="1418564"/>
+                </a:cubicBezTo>
+                <a:cubicBezTo>
+                  <a:pt x="-2963" y="1299061"/>
+                  <a:pt x="12700" y="1137001"/>
+                  <a:pt x="12700" y="1018787"/>
+                </a:cubicBezTo>
+                <a:cubicBezTo>
+                  <a:pt x="12700" y="900573"/>
+                  <a:pt x="-847" y="796760"/>
+                  <a:pt x="12700" y="709282"/>
+                </a:cubicBezTo>
+                <a:cubicBezTo>
+                  <a:pt x="26247" y="621804"/>
+                  <a:pt x="64982" y="565706"/>
+                  <a:pt x="93980" y="493918"/>
+                </a:cubicBezTo>
+                <a:cubicBezTo>
+                  <a:pt x="122978" y="422130"/>
+                  <a:pt x="155787" y="332503"/>
+                  <a:pt x="186690" y="278554"/>
+                </a:cubicBezTo>
+                <a:cubicBezTo>
+                  <a:pt x="217593" y="224606"/>
+                  <a:pt x="247438" y="197309"/>
+                  <a:pt x="279400" y="170228"/>
+                </a:cubicBezTo>
+                <a:cubicBezTo>
+                  <a:pt x="311362" y="143146"/>
+                  <a:pt x="349673" y="134119"/>
+                  <a:pt x="378460" y="116064"/>
+                </a:cubicBezTo>
+                <a:cubicBezTo>
+                  <a:pt x="407247" y="98010"/>
+                  <a:pt x="417830" y="76517"/>
+                  <a:pt x="452120" y="61901"/>
+                </a:cubicBezTo>
+                <a:cubicBezTo>
+                  <a:pt x="486410" y="47285"/>
+                  <a:pt x="562187" y="33960"/>
+                  <a:pt x="584200" y="28371"/>
+                </a:cubicBezTo>
+              </a:path>
+            </a:pathLst>
+          </a:custGeom>
+          <a:ln w="16891">
+            <a:solidFill>
+              <a:srgbClr val="E36C09"/>
+            </a:solidFill>
+            <a:prstDash val="solid"/>
+          </a:ln>
+        </p:spPr>
+      </p:sp>
+      <p:sp>
+        <p:nvSpPr>
+          <p:cNvPr id="57" name="Shape 55"/>
+          <p:cNvSpPr/>
+          <p:nvPr/>
+        </p:nvSpPr>
+        <p:spPr>
+          <a:xfrm>
+            <a:off x="2772410" y="1893570"/>
+            <a:ext cx="685800" cy="1921510"/>
+          </a:xfrm>
+          <a:custGeom>
+            <a:avLst/>
+            <a:gdLst/>
+            <a:ahLst/>
+            <a:cxnLst/>
+            <a:rect l="l" t="t" r="r" b="b"/>
+            <a:pathLst>
+              <a:path w="685800" h="1921510">
+                <a:moveTo>
+                  <a:pt x="594360" y="28371"/>
+                </a:moveTo>
+                <a:lnTo>
+                  <a:pt x="543241" y="70828"/>
+                </a:lnTo>
+                <a:lnTo>
+                  <a:pt x="529832" y="14102"/>
+                </a:lnTo>
+                <a:close/>
+              </a:path>
+            </a:pathLst>
+          </a:custGeom>
+          <a:solidFill>
+            <a:srgbClr val="E36C09"/>
+          </a:solidFill>
+          <a:ln/>
+        </p:spPr>
+      </p:sp>
+      <p:sp>
+        <p:nvSpPr>
+          <p:cNvPr id="58" name="Shape 56"/>
+          <p:cNvSpPr/>
+          <p:nvPr/>
+        </p:nvSpPr>
         <p:spPr>
           <a:xfrm>
             <a:off x="3737610" y="1893570"/>
             <a:ext cx="685800" cy="1921510"/>
           </a:xfrm>
-          <a:prstGeom prst="rect">
-            <a:avLst/>
-          </a:prstGeom>
-        </p:spPr>
-      </p:pic>
-      <p:pic>
-        <p:nvPicPr>
-          <p:cNvPr id="57" name="Image 3" descr="/home/ahmed/Projects/ai_llm_slides/videos/deep-learning/002_transformers_part2/recreated_pptx/build/assets/s038_orangearrow.png">    </p:cNvPr>
-          <p:cNvPicPr>
-            <a:picLocks noChangeAspect="1"/>
-          </p:cNvPicPr>
-          <p:nvPr/>
-        </p:nvPicPr>
-        <p:blipFill>
-          <a:blip r:embed="rId4"/>
-          <a:stretch>
-            <a:fillRect/>
-          </a:stretch>
-        </p:blipFill>
+          <a:custGeom>
+            <a:avLst/>
+            <a:gdLst/>
+            <a:ahLst/>
+            <a:cxnLst/>
+            <a:rect l="l" t="t" r="r" b="b"/>
+            <a:pathLst>
+              <a:path w="685800" h="1921510">
+                <a:moveTo>
+                  <a:pt x="220980" y="1897008"/>
+                </a:moveTo>
+                <a:cubicBezTo>
+                  <a:pt x="201930" y="1870141"/>
+                  <a:pt x="141393" y="1815548"/>
+                  <a:pt x="106680" y="1735807"/>
+                </a:cubicBezTo>
+                <a:cubicBezTo>
+                  <a:pt x="71967" y="1656067"/>
+                  <a:pt x="28363" y="1538068"/>
+                  <a:pt x="12700" y="1418564"/>
+                </a:cubicBezTo>
+                <a:cubicBezTo>
+                  <a:pt x="-2963" y="1299061"/>
+                  <a:pt x="12700" y="1137001"/>
+                  <a:pt x="12700" y="1018787"/>
+                </a:cubicBezTo>
+                <a:cubicBezTo>
+                  <a:pt x="12700" y="900573"/>
+                  <a:pt x="-847" y="796760"/>
+                  <a:pt x="12700" y="709282"/>
+                </a:cubicBezTo>
+                <a:cubicBezTo>
+                  <a:pt x="26247" y="621804"/>
+                  <a:pt x="64982" y="565706"/>
+                  <a:pt x="93980" y="493918"/>
+                </a:cubicBezTo>
+                <a:cubicBezTo>
+                  <a:pt x="122978" y="422130"/>
+                  <a:pt x="155787" y="332503"/>
+                  <a:pt x="186690" y="278554"/>
+                </a:cubicBezTo>
+                <a:cubicBezTo>
+                  <a:pt x="217593" y="224606"/>
+                  <a:pt x="247438" y="197309"/>
+                  <a:pt x="279400" y="170228"/>
+                </a:cubicBezTo>
+                <a:cubicBezTo>
+                  <a:pt x="311362" y="143146"/>
+                  <a:pt x="349673" y="134119"/>
+                  <a:pt x="378460" y="116064"/>
+                </a:cubicBezTo>
+                <a:cubicBezTo>
+                  <a:pt x="407247" y="98010"/>
+                  <a:pt x="417830" y="76517"/>
+                  <a:pt x="452120" y="61901"/>
+                </a:cubicBezTo>
+                <a:cubicBezTo>
+                  <a:pt x="486410" y="47285"/>
+                  <a:pt x="562187" y="33960"/>
+                  <a:pt x="584200" y="28371"/>
+                </a:cubicBezTo>
+              </a:path>
+            </a:pathLst>
+          </a:custGeom>
+          <a:ln w="16891">
+            <a:solidFill>
+              <a:srgbClr val="E36C09"/>
+            </a:solidFill>
+            <a:prstDash val="solid"/>
+          </a:ln>
+        </p:spPr>
+      </p:sp>
+      <p:sp>
+        <p:nvSpPr>
+          <p:cNvPr id="59" name="Shape 57"/>
+          <p:cNvSpPr/>
+          <p:nvPr/>
+        </p:nvSpPr>
+        <p:spPr>
+          <a:xfrm>
+            <a:off x="3737610" y="1893570"/>
+            <a:ext cx="685800" cy="1921510"/>
+          </a:xfrm>
+          <a:custGeom>
+            <a:avLst/>
+            <a:gdLst/>
+            <a:ahLst/>
+            <a:cxnLst/>
+            <a:rect l="l" t="t" r="r" b="b"/>
+            <a:pathLst>
+              <a:path w="685800" h="1921510">
+                <a:moveTo>
+                  <a:pt x="594360" y="28371"/>
+                </a:moveTo>
+                <a:lnTo>
+                  <a:pt x="543241" y="70828"/>
+                </a:lnTo>
+                <a:lnTo>
+                  <a:pt x="529832" y="14102"/>
+                </a:lnTo>
+                <a:close/>
+              </a:path>
+            </a:pathLst>
+          </a:custGeom>
+          <a:solidFill>
+            <a:srgbClr val="E36C09"/>
+          </a:solidFill>
+          <a:ln/>
+        </p:spPr>
+      </p:sp>
+      <p:sp>
+        <p:nvSpPr>
+          <p:cNvPr id="60" name="Shape 58"/>
+          <p:cNvSpPr/>
+          <p:nvPr/>
+        </p:nvSpPr>
         <p:spPr>
           <a:xfrm>
             <a:off x="4709160" y="1893570"/>
             <a:ext cx="685800" cy="1921510"/>
           </a:xfrm>
-          <a:prstGeom prst="rect">
-            <a:avLst/>
-          </a:prstGeom>
-        </p:spPr>
-      </p:pic>
-      <p:pic>
-        <p:nvPicPr>
-          <p:cNvPr id="58" name="Image 4" descr="/home/ahmed/Projects/ai_llm_slides/videos/deep-learning/002_transformers_part2/recreated_pptx/build/assets/s038_orangearrow.png">    </p:cNvPr>
-          <p:cNvPicPr>
-            <a:picLocks noChangeAspect="1"/>
-          </p:cNvPicPr>
-          <p:nvPr/>
-        </p:nvPicPr>
-        <p:blipFill>
-          <a:blip r:embed="rId5"/>
-          <a:stretch>
-            <a:fillRect/>
-          </a:stretch>
-        </p:blipFill>
+          <a:custGeom>
+            <a:avLst/>
+            <a:gdLst/>
+            <a:ahLst/>
+            <a:cxnLst/>
+            <a:rect l="l" t="t" r="r" b="b"/>
+            <a:pathLst>
+              <a:path w="685800" h="1921510">
+                <a:moveTo>
+                  <a:pt x="220980" y="1897008"/>
+                </a:moveTo>
+                <a:cubicBezTo>
+                  <a:pt x="201930" y="1870141"/>
+                  <a:pt x="141393" y="1815548"/>
+                  <a:pt x="106680" y="1735807"/>
+                </a:cubicBezTo>
+                <a:cubicBezTo>
+                  <a:pt x="71967" y="1656067"/>
+                  <a:pt x="28363" y="1538068"/>
+                  <a:pt x="12700" y="1418564"/>
+                </a:cubicBezTo>
+                <a:cubicBezTo>
+                  <a:pt x="-2963" y="1299061"/>
+                  <a:pt x="12700" y="1137001"/>
+                  <a:pt x="12700" y="1018787"/>
+                </a:cubicBezTo>
+                <a:cubicBezTo>
+                  <a:pt x="12700" y="900573"/>
+                  <a:pt x="-847" y="796760"/>
+                  <a:pt x="12700" y="709282"/>
+                </a:cubicBezTo>
+                <a:cubicBezTo>
+                  <a:pt x="26247" y="621804"/>
+                  <a:pt x="64982" y="565706"/>
+                  <a:pt x="93980" y="493918"/>
+                </a:cubicBezTo>
+                <a:cubicBezTo>
+                  <a:pt x="122978" y="422130"/>
+                  <a:pt x="155787" y="332503"/>
+                  <a:pt x="186690" y="278554"/>
+                </a:cubicBezTo>
+                <a:cubicBezTo>
+                  <a:pt x="217593" y="224606"/>
+                  <a:pt x="247438" y="197309"/>
+                  <a:pt x="279400" y="170228"/>
+                </a:cubicBezTo>
+                <a:cubicBezTo>
+                  <a:pt x="311362" y="143146"/>
+                  <a:pt x="349673" y="134119"/>
+                  <a:pt x="378460" y="116064"/>
+                </a:cubicBezTo>
+                <a:cubicBezTo>
+                  <a:pt x="407247" y="98010"/>
+                  <a:pt x="417830" y="76517"/>
+                  <a:pt x="452120" y="61901"/>
+                </a:cubicBezTo>
+                <a:cubicBezTo>
+                  <a:pt x="486410" y="47285"/>
+                  <a:pt x="562187" y="33960"/>
+                  <a:pt x="584200" y="28371"/>
+                </a:cubicBezTo>
+              </a:path>
+            </a:pathLst>
+          </a:custGeom>
+          <a:ln w="16891">
+            <a:solidFill>
+              <a:srgbClr val="E36C09"/>
+            </a:solidFill>
+            <a:prstDash val="solid"/>
+          </a:ln>
+        </p:spPr>
+      </p:sp>
+      <p:sp>
+        <p:nvSpPr>
+          <p:cNvPr id="61" name="Shape 59"/>
+          <p:cNvSpPr/>
+          <p:nvPr/>
+        </p:nvSpPr>
+        <p:spPr>
+          <a:xfrm>
+            <a:off x="4709160" y="1893570"/>
+            <a:ext cx="685800" cy="1921510"/>
+          </a:xfrm>
+          <a:custGeom>
+            <a:avLst/>
+            <a:gdLst/>
+            <a:ahLst/>
+            <a:cxnLst/>
+            <a:rect l="l" t="t" r="r" b="b"/>
+            <a:pathLst>
+              <a:path w="685800" h="1921510">
+                <a:moveTo>
+                  <a:pt x="594360" y="28371"/>
+                </a:moveTo>
+                <a:lnTo>
+                  <a:pt x="543241" y="70828"/>
+                </a:lnTo>
+                <a:lnTo>
+                  <a:pt x="529832" y="14102"/>
+                </a:lnTo>
+                <a:close/>
+              </a:path>
+            </a:pathLst>
+          </a:custGeom>
+          <a:solidFill>
+            <a:srgbClr val="E36C09"/>
+          </a:solidFill>
+          <a:ln/>
+        </p:spPr>
+      </p:sp>
+      <p:sp>
+        <p:nvSpPr>
+          <p:cNvPr id="62" name="Shape 60"/>
+          <p:cNvSpPr/>
+          <p:nvPr/>
+        </p:nvSpPr>
         <p:spPr>
           <a:xfrm>
             <a:off x="5687060" y="1893570"/>
             <a:ext cx="685800" cy="1921510"/>
           </a:xfrm>
-          <a:prstGeom prst="rect">
-            <a:avLst/>
-          </a:prstGeom>
-        </p:spPr>
-      </p:pic>
-      <p:pic>
-        <p:nvPicPr>
-          <p:cNvPr id="59" name="Image 5" descr="/home/ahmed/Projects/ai_llm_slides/videos/deep-learning/002_transformers_part2/recreated_pptx/build/assets/s038_orangearrow.png">    </p:cNvPr>
-          <p:cNvPicPr>
-            <a:picLocks noChangeAspect="1"/>
-          </p:cNvPicPr>
-          <p:nvPr/>
-        </p:nvPicPr>
-        <p:blipFill>
-          <a:blip r:embed="rId6"/>
-          <a:stretch>
-            <a:fillRect/>
-          </a:stretch>
-        </p:blipFill>
+          <a:custGeom>
+            <a:avLst/>
+            <a:gdLst/>
+            <a:ahLst/>
+            <a:cxnLst/>
+            <a:rect l="l" t="t" r="r" b="b"/>
+            <a:pathLst>
+              <a:path w="685800" h="1921510">
+                <a:moveTo>
+                  <a:pt x="220980" y="1897008"/>
+                </a:moveTo>
+                <a:cubicBezTo>
+                  <a:pt x="201930" y="1870141"/>
+                  <a:pt x="141393" y="1815548"/>
+                  <a:pt x="106680" y="1735807"/>
+                </a:cubicBezTo>
+                <a:cubicBezTo>
+                  <a:pt x="71967" y="1656067"/>
+                  <a:pt x="28363" y="1538068"/>
+                  <a:pt x="12700" y="1418564"/>
+                </a:cubicBezTo>
+                <a:cubicBezTo>
+                  <a:pt x="-2963" y="1299061"/>
+                  <a:pt x="12700" y="1137001"/>
+                  <a:pt x="12700" y="1018787"/>
+                </a:cubicBezTo>
+                <a:cubicBezTo>
+                  <a:pt x="12700" y="900573"/>
+                  <a:pt x="-847" y="796760"/>
+                  <a:pt x="12700" y="709282"/>
+                </a:cubicBezTo>
+                <a:cubicBezTo>
+                  <a:pt x="26247" y="621804"/>
+                  <a:pt x="64982" y="565706"/>
+                  <a:pt x="93980" y="493918"/>
+                </a:cubicBezTo>
+                <a:cubicBezTo>
+                  <a:pt x="122978" y="422130"/>
+                  <a:pt x="155787" y="332503"/>
+                  <a:pt x="186690" y="278554"/>
+                </a:cubicBezTo>
+                <a:cubicBezTo>
+                  <a:pt x="217593" y="224606"/>
+                  <a:pt x="247438" y="197309"/>
+                  <a:pt x="279400" y="170228"/>
+                </a:cubicBezTo>
+                <a:cubicBezTo>
+                  <a:pt x="311362" y="143146"/>
+                  <a:pt x="349673" y="134119"/>
+                  <a:pt x="378460" y="116064"/>
+                </a:cubicBezTo>
+                <a:cubicBezTo>
+                  <a:pt x="407247" y="98010"/>
+                  <a:pt x="417830" y="76517"/>
+                  <a:pt x="452120" y="61901"/>
+                </a:cubicBezTo>
+                <a:cubicBezTo>
+                  <a:pt x="486410" y="47285"/>
+                  <a:pt x="562187" y="33960"/>
+                  <a:pt x="584200" y="28371"/>
+                </a:cubicBezTo>
+              </a:path>
+            </a:pathLst>
+          </a:custGeom>
+          <a:ln w="16891">
+            <a:solidFill>
+              <a:srgbClr val="E36C09"/>
+            </a:solidFill>
+            <a:prstDash val="solid"/>
+          </a:ln>
+        </p:spPr>
+      </p:sp>
+      <p:sp>
+        <p:nvSpPr>
+          <p:cNvPr id="63" name="Shape 61"/>
+          <p:cNvSpPr/>
+          <p:nvPr/>
+        </p:nvSpPr>
+        <p:spPr>
+          <a:xfrm>
+            <a:off x="5687060" y="1893570"/>
+            <a:ext cx="685800" cy="1921510"/>
+          </a:xfrm>
+          <a:custGeom>
+            <a:avLst/>
+            <a:gdLst/>
+            <a:ahLst/>
+            <a:cxnLst/>
+            <a:rect l="l" t="t" r="r" b="b"/>
+            <a:pathLst>
+              <a:path w="685800" h="1921510">
+                <a:moveTo>
+                  <a:pt x="594360" y="28371"/>
+                </a:moveTo>
+                <a:lnTo>
+                  <a:pt x="543241" y="70828"/>
+                </a:lnTo>
+                <a:lnTo>
+                  <a:pt x="529832" y="14102"/>
+                </a:lnTo>
+                <a:close/>
+              </a:path>
+            </a:pathLst>
+          </a:custGeom>
+          <a:solidFill>
+            <a:srgbClr val="E36C09"/>
+          </a:solidFill>
+          <a:ln/>
+        </p:spPr>
+      </p:sp>
+      <p:sp>
+        <p:nvSpPr>
+          <p:cNvPr id="64" name="Shape 62"/>
+          <p:cNvSpPr/>
+          <p:nvPr/>
+        </p:nvSpPr>
         <p:spPr>
           <a:xfrm>
             <a:off x="6630670" y="1893570"/>
             <a:ext cx="685800" cy="1921510"/>
           </a:xfrm>
-          <a:prstGeom prst="rect">
-            <a:avLst/>
-          </a:prstGeom>
-        </p:spPr>
-      </p:pic>
-      <p:pic>
-        <p:nvPicPr>
-          <p:cNvPr id="60" name="Image 6" descr="/home/ahmed/Projects/ai_llm_slides/videos/deep-learning/002_transformers_part2/recreated_pptx/build/assets/s038_orangearrow.png">    </p:cNvPr>
-          <p:cNvPicPr>
-            <a:picLocks noChangeAspect="1"/>
-          </p:cNvPicPr>
-          <p:nvPr/>
-        </p:nvPicPr>
-        <p:blipFill>
-          <a:blip r:embed="rId7"/>
-          <a:stretch>
-            <a:fillRect/>
-          </a:stretch>
-        </p:blipFill>
+          <a:custGeom>
+            <a:avLst/>
+            <a:gdLst/>
+            <a:ahLst/>
+            <a:cxnLst/>
+            <a:rect l="l" t="t" r="r" b="b"/>
+            <a:pathLst>
+              <a:path w="685800" h="1921510">
+                <a:moveTo>
+                  <a:pt x="220980" y="1897008"/>
+                </a:moveTo>
+                <a:cubicBezTo>
+                  <a:pt x="201930" y="1870141"/>
+                  <a:pt x="141393" y="1815548"/>
+                  <a:pt x="106680" y="1735807"/>
+                </a:cubicBezTo>
+                <a:cubicBezTo>
+                  <a:pt x="71967" y="1656067"/>
+                  <a:pt x="28363" y="1538068"/>
+                  <a:pt x="12700" y="1418564"/>
+                </a:cubicBezTo>
+                <a:cubicBezTo>
+                  <a:pt x="-2963" y="1299061"/>
+                  <a:pt x="12700" y="1137001"/>
+                  <a:pt x="12700" y="1018787"/>
+                </a:cubicBezTo>
+                <a:cubicBezTo>
+                  <a:pt x="12700" y="900573"/>
+                  <a:pt x="-847" y="796760"/>
+                  <a:pt x="12700" y="709282"/>
+                </a:cubicBezTo>
+                <a:cubicBezTo>
+                  <a:pt x="26247" y="621804"/>
+                  <a:pt x="64982" y="565706"/>
+                  <a:pt x="93980" y="493918"/>
+                </a:cubicBezTo>
+                <a:cubicBezTo>
+                  <a:pt x="122978" y="422130"/>
+                  <a:pt x="155787" y="332503"/>
+                  <a:pt x="186690" y="278554"/>
+                </a:cubicBezTo>
+                <a:cubicBezTo>
+                  <a:pt x="217593" y="224606"/>
+                  <a:pt x="247438" y="197309"/>
+                  <a:pt x="279400" y="170228"/>
+                </a:cubicBezTo>
+                <a:cubicBezTo>
+                  <a:pt x="311362" y="143146"/>
+                  <a:pt x="349673" y="134119"/>
+                  <a:pt x="378460" y="116064"/>
+                </a:cubicBezTo>
+                <a:cubicBezTo>
+                  <a:pt x="407247" y="98010"/>
+                  <a:pt x="417830" y="76517"/>
+                  <a:pt x="452120" y="61901"/>
+                </a:cubicBezTo>
+                <a:cubicBezTo>
+                  <a:pt x="486410" y="47285"/>
+                  <a:pt x="562187" y="33960"/>
+                  <a:pt x="584200" y="28371"/>
+                </a:cubicBezTo>
+              </a:path>
+            </a:pathLst>
+          </a:custGeom>
+          <a:ln w="16891">
+            <a:solidFill>
+              <a:srgbClr val="E36C09"/>
+            </a:solidFill>
+            <a:prstDash val="solid"/>
+          </a:ln>
+        </p:spPr>
+      </p:sp>
+      <p:sp>
+        <p:nvSpPr>
+          <p:cNvPr id="65" name="Shape 63"/>
+          <p:cNvSpPr/>
+          <p:nvPr/>
+        </p:nvSpPr>
+        <p:spPr>
+          <a:xfrm>
+            <a:off x="6630670" y="1893570"/>
+            <a:ext cx="685800" cy="1921510"/>
+          </a:xfrm>
+          <a:custGeom>
+            <a:avLst/>
+            <a:gdLst/>
+            <a:ahLst/>
+            <a:cxnLst/>
+            <a:rect l="l" t="t" r="r" b="b"/>
+            <a:pathLst>
+              <a:path w="685800" h="1921510">
+                <a:moveTo>
+                  <a:pt x="594360" y="28371"/>
+                </a:moveTo>
+                <a:lnTo>
+                  <a:pt x="543241" y="70828"/>
+                </a:lnTo>
+                <a:lnTo>
+                  <a:pt x="529832" y="14102"/>
+                </a:lnTo>
+                <a:close/>
+              </a:path>
+            </a:pathLst>
+          </a:custGeom>
+          <a:solidFill>
+            <a:srgbClr val="E36C09"/>
+          </a:solidFill>
+          <a:ln/>
+        </p:spPr>
+      </p:sp>
+      <p:sp>
+        <p:nvSpPr>
+          <p:cNvPr id="66" name="Shape 64"/>
+          <p:cNvSpPr/>
+          <p:nvPr/>
+        </p:nvSpPr>
         <p:spPr>
           <a:xfrm>
             <a:off x="9141460" y="1893570"/>
             <a:ext cx="685800" cy="1921510"/>
           </a:xfrm>
-          <a:prstGeom prst="rect">
-            <a:avLst/>
-          </a:prstGeom>
-        </p:spPr>
-      </p:pic>
-      <p:pic>
-        <p:nvPicPr>
-          <p:cNvPr id="61" name="Image 7" descr="/home/ahmed/Projects/ai_llm_slides/videos/deep-learning/002_transformers_part2/recreated_pptx/build/assets/s038_orangearrow.png">    </p:cNvPr>
-          <p:cNvPicPr>
-            <a:picLocks noChangeAspect="1"/>
-          </p:cNvPicPr>
-          <p:nvPr/>
-        </p:nvPicPr>
-        <p:blipFill>
-          <a:blip r:embed="rId8"/>
-          <a:stretch>
-            <a:fillRect/>
-          </a:stretch>
-        </p:blipFill>
+          <a:custGeom>
+            <a:avLst/>
+            <a:gdLst/>
+            <a:ahLst/>
+            <a:cxnLst/>
+            <a:rect l="l" t="t" r="r" b="b"/>
+            <a:pathLst>
+              <a:path w="685800" h="1921510">
+                <a:moveTo>
+                  <a:pt x="220980" y="1897008"/>
+                </a:moveTo>
+                <a:cubicBezTo>
+                  <a:pt x="201930" y="1870141"/>
+                  <a:pt x="141393" y="1815548"/>
+                  <a:pt x="106680" y="1735807"/>
+                </a:cubicBezTo>
+                <a:cubicBezTo>
+                  <a:pt x="71967" y="1656067"/>
+                  <a:pt x="28363" y="1538068"/>
+                  <a:pt x="12700" y="1418564"/>
+                </a:cubicBezTo>
+                <a:cubicBezTo>
+                  <a:pt x="-2963" y="1299061"/>
+                  <a:pt x="12700" y="1137001"/>
+                  <a:pt x="12700" y="1018787"/>
+                </a:cubicBezTo>
+                <a:cubicBezTo>
+                  <a:pt x="12700" y="900573"/>
+                  <a:pt x="-847" y="796760"/>
+                  <a:pt x="12700" y="709282"/>
+                </a:cubicBezTo>
+                <a:cubicBezTo>
+                  <a:pt x="26247" y="621804"/>
+                  <a:pt x="64982" y="565706"/>
+                  <a:pt x="93980" y="493918"/>
+                </a:cubicBezTo>
+                <a:cubicBezTo>
+                  <a:pt x="122978" y="422130"/>
+                  <a:pt x="155787" y="332503"/>
+                  <a:pt x="186690" y="278554"/>
+                </a:cubicBezTo>
+                <a:cubicBezTo>
+                  <a:pt x="217593" y="224606"/>
+                  <a:pt x="247438" y="197309"/>
+                  <a:pt x="279400" y="170228"/>
+                </a:cubicBezTo>
+                <a:cubicBezTo>
+                  <a:pt x="311362" y="143146"/>
+                  <a:pt x="349673" y="134119"/>
+                  <a:pt x="378460" y="116064"/>
+                </a:cubicBezTo>
+                <a:cubicBezTo>
+                  <a:pt x="407247" y="98010"/>
+                  <a:pt x="417830" y="76517"/>
+                  <a:pt x="452120" y="61901"/>
+                </a:cubicBezTo>
+                <a:cubicBezTo>
+                  <a:pt x="486410" y="47285"/>
+                  <a:pt x="562187" y="33960"/>
+                  <a:pt x="584200" y="28371"/>
+                </a:cubicBezTo>
+              </a:path>
+            </a:pathLst>
+          </a:custGeom>
+          <a:ln w="16891">
+            <a:solidFill>
+              <a:srgbClr val="E36C09"/>
+            </a:solidFill>
+            <a:prstDash val="solid"/>
+          </a:ln>
+        </p:spPr>
+      </p:sp>
+      <p:sp>
+        <p:nvSpPr>
+          <p:cNvPr id="67" name="Shape 65"/>
+          <p:cNvSpPr/>
+          <p:nvPr/>
+        </p:nvSpPr>
+        <p:spPr>
+          <a:xfrm>
+            <a:off x="9141460" y="1893570"/>
+            <a:ext cx="685800" cy="1921510"/>
+          </a:xfrm>
+          <a:custGeom>
+            <a:avLst/>
+            <a:gdLst/>
+            <a:ahLst/>
+            <a:cxnLst/>
+            <a:rect l="l" t="t" r="r" b="b"/>
+            <a:pathLst>
+              <a:path w="685800" h="1921510">
+                <a:moveTo>
+                  <a:pt x="594360" y="28371"/>
+                </a:moveTo>
+                <a:lnTo>
+                  <a:pt x="543241" y="70828"/>
+                </a:lnTo>
+                <a:lnTo>
+                  <a:pt x="529832" y="14102"/>
+                </a:lnTo>
+                <a:close/>
+              </a:path>
+            </a:pathLst>
+          </a:custGeom>
+          <a:solidFill>
+            <a:srgbClr val="E36C09"/>
+          </a:solidFill>
+          <a:ln/>
+        </p:spPr>
+      </p:sp>
+      <p:sp>
+        <p:nvSpPr>
+          <p:cNvPr id="68" name="Shape 66"/>
+          <p:cNvSpPr/>
+          <p:nvPr/>
+        </p:nvSpPr>
         <p:spPr>
           <a:xfrm>
             <a:off x="10119360" y="1893570"/>
             <a:ext cx="685800" cy="1921510"/>
           </a:xfrm>
-          <a:prstGeom prst="rect">
-            <a:avLst/>
-          </a:prstGeom>
-        </p:spPr>
-      </p:pic>
-      <p:sp>
-        <p:nvSpPr>
-          <p:cNvPr id="62" name="Shape 52"/>
+          <a:custGeom>
+            <a:avLst/>
+            <a:gdLst/>
+            <a:ahLst/>
+            <a:cxnLst/>
+            <a:rect l="l" t="t" r="r" b="b"/>
+            <a:pathLst>
+              <a:path w="685800" h="1921510">
+                <a:moveTo>
+                  <a:pt x="220980" y="1897008"/>
+                </a:moveTo>
+                <a:cubicBezTo>
+                  <a:pt x="201930" y="1870141"/>
+                  <a:pt x="141393" y="1815548"/>
+                  <a:pt x="106680" y="1735807"/>
+                </a:cubicBezTo>
+                <a:cubicBezTo>
+                  <a:pt x="71967" y="1656067"/>
+                  <a:pt x="28363" y="1538068"/>
+                  <a:pt x="12700" y="1418564"/>
+                </a:cubicBezTo>
+                <a:cubicBezTo>
+                  <a:pt x="-2963" y="1299061"/>
+                  <a:pt x="12700" y="1137001"/>
+                  <a:pt x="12700" y="1018787"/>
+                </a:cubicBezTo>
+                <a:cubicBezTo>
+                  <a:pt x="12700" y="900573"/>
+                  <a:pt x="-847" y="796760"/>
+                  <a:pt x="12700" y="709282"/>
+                </a:cubicBezTo>
+                <a:cubicBezTo>
+                  <a:pt x="26247" y="621804"/>
+                  <a:pt x="64982" y="565706"/>
+                  <a:pt x="93980" y="493918"/>
+                </a:cubicBezTo>
+                <a:cubicBezTo>
+                  <a:pt x="122978" y="422130"/>
+                  <a:pt x="155787" y="332503"/>
+                  <a:pt x="186690" y="278554"/>
+                </a:cubicBezTo>
+                <a:cubicBezTo>
+                  <a:pt x="217593" y="224606"/>
+                  <a:pt x="247438" y="197309"/>
+                  <a:pt x="279400" y="170228"/>
+                </a:cubicBezTo>
+                <a:cubicBezTo>
+                  <a:pt x="311362" y="143146"/>
+                  <a:pt x="349673" y="134119"/>
+                  <a:pt x="378460" y="116064"/>
+                </a:cubicBezTo>
+                <a:cubicBezTo>
+                  <a:pt x="407247" y="98010"/>
+                  <a:pt x="417830" y="76517"/>
+                  <a:pt x="452120" y="61901"/>
+                </a:cubicBezTo>
+                <a:cubicBezTo>
+                  <a:pt x="486410" y="47285"/>
+                  <a:pt x="562187" y="33960"/>
+                  <a:pt x="584200" y="28371"/>
+                </a:cubicBezTo>
+              </a:path>
+            </a:pathLst>
+          </a:custGeom>
+          <a:ln w="16891">
+            <a:solidFill>
+              <a:srgbClr val="E36C09"/>
+            </a:solidFill>
+            <a:prstDash val="solid"/>
+          </a:ln>
+        </p:spPr>
+      </p:sp>
+      <p:sp>
+        <p:nvSpPr>
+          <p:cNvPr id="69" name="Shape 67"/>
+          <p:cNvSpPr/>
+          <p:nvPr/>
+        </p:nvSpPr>
+        <p:spPr>
+          <a:xfrm>
+            <a:off x="10119360" y="1893570"/>
+            <a:ext cx="685800" cy="1921510"/>
+          </a:xfrm>
+          <a:custGeom>
+            <a:avLst/>
+            <a:gdLst/>
+            <a:ahLst/>
+            <a:cxnLst/>
+            <a:rect l="l" t="t" r="r" b="b"/>
+            <a:pathLst>
+              <a:path w="685800" h="1921510">
+                <a:moveTo>
+                  <a:pt x="594360" y="28371"/>
+                </a:moveTo>
+                <a:lnTo>
+                  <a:pt x="543241" y="70828"/>
+                </a:lnTo>
+                <a:lnTo>
+                  <a:pt x="529832" y="14102"/>
+                </a:lnTo>
+                <a:close/>
+              </a:path>
+            </a:pathLst>
+          </a:custGeom>
+          <a:solidFill>
+            <a:srgbClr val="E36C09"/>
+          </a:solidFill>
+          <a:ln/>
+        </p:spPr>
+      </p:sp>
+      <p:sp>
+        <p:nvSpPr>
+          <p:cNvPr id="70" name="Shape 68"/>
           <p:cNvSpPr/>
           <p:nvPr/>
         </p:nvSpPr>
@@ -2691,7 +3467,7 @@
       </p:sp>
       <p:sp>
         <p:nvSpPr>
-          <p:cNvPr id="63" name="Shape 53"/>
+          <p:cNvPr id="71" name="Shape 69"/>
           <p:cNvSpPr/>
           <p:nvPr/>
         </p:nvSpPr>
@@ -2716,7 +3492,7 @@
       </p:sp>
       <p:sp>
         <p:nvSpPr>
-          <p:cNvPr id="64" name="Shape 54"/>
+          <p:cNvPr id="72" name="Shape 70"/>
           <p:cNvSpPr/>
           <p:nvPr/>
         </p:nvSpPr>
@@ -2741,7 +3517,7 @@
       </p:sp>
       <p:sp>
         <p:nvSpPr>
-          <p:cNvPr id="65" name="Shape 55"/>
+          <p:cNvPr id="73" name="Shape 71"/>
           <p:cNvSpPr/>
           <p:nvPr/>
         </p:nvSpPr>
@@ -2766,7 +3542,7 @@
       </p:sp>
       <p:sp>
         <p:nvSpPr>
-          <p:cNvPr id="66" name="Text 56"/>
+          <p:cNvPr id="74" name="Text 72"/>
           <p:cNvSpPr/>
           <p:nvPr/>
         </p:nvSpPr>
@@ -2825,7 +3601,7 @@
       </p:sp>
       <p:sp>
         <p:nvSpPr>
-          <p:cNvPr id="67" name="Shape 57"/>
+          <p:cNvPr id="75" name="Shape 73"/>
           <p:cNvSpPr/>
           <p:nvPr/>
         </p:nvSpPr>
@@ -2850,7 +3626,7 @@
       </p:sp>
       <p:sp>
         <p:nvSpPr>
-          <p:cNvPr id="68" name="Shape 58"/>
+          <p:cNvPr id="76" name="Shape 74"/>
           <p:cNvSpPr/>
           <p:nvPr/>
         </p:nvSpPr>
@@ -2875,7 +3651,7 @@
       </p:sp>
       <p:sp>
         <p:nvSpPr>
-          <p:cNvPr id="69" name="Shape 59"/>
+          <p:cNvPr id="77" name="Shape 75"/>
           <p:cNvSpPr/>
           <p:nvPr/>
         </p:nvSpPr>
@@ -2900,7 +3676,7 @@
       </p:sp>
       <p:sp>
         <p:nvSpPr>
-          <p:cNvPr id="70" name="Shape 60"/>
+          <p:cNvPr id="78" name="Shape 76"/>
           <p:cNvSpPr/>
           <p:nvPr/>
         </p:nvSpPr>
@@ -2925,7 +3701,7 @@
       </p:sp>
       <p:sp>
         <p:nvSpPr>
-          <p:cNvPr id="71" name="Text 61"/>
+          <p:cNvPr id="79" name="Text 77"/>
           <p:cNvSpPr/>
           <p:nvPr/>
         </p:nvSpPr>
@@ -2984,7 +3760,7 @@
       </p:sp>
       <p:sp>
         <p:nvSpPr>
-          <p:cNvPr id="72" name="Shape 62"/>
+          <p:cNvPr id="80" name="Shape 78"/>
           <p:cNvSpPr/>
           <p:nvPr/>
         </p:nvSpPr>
@@ -3009,7 +3785,7 @@
       </p:sp>
       <p:sp>
         <p:nvSpPr>
-          <p:cNvPr id="73" name="Shape 63"/>
+          <p:cNvPr id="81" name="Shape 79"/>
           <p:cNvSpPr/>
           <p:nvPr/>
         </p:nvSpPr>
@@ -3034,7 +3810,7 @@
       </p:sp>
       <p:sp>
         <p:nvSpPr>
-          <p:cNvPr id="74" name="Shape 64"/>
+          <p:cNvPr id="82" name="Shape 80"/>
           <p:cNvSpPr/>
           <p:nvPr/>
         </p:nvSpPr>
@@ -3059,7 +3835,7 @@
       </p:sp>
       <p:sp>
         <p:nvSpPr>
-          <p:cNvPr id="75" name="Shape 65"/>
+          <p:cNvPr id="83" name="Shape 81"/>
           <p:cNvSpPr/>
           <p:nvPr/>
         </p:nvSpPr>
@@ -3084,7 +3860,7 @@
       </p:sp>
       <p:sp>
         <p:nvSpPr>
-          <p:cNvPr id="76" name="Text 66"/>
+          <p:cNvPr id="84" name="Text 82"/>
           <p:cNvSpPr/>
           <p:nvPr/>
         </p:nvSpPr>
@@ -3143,7 +3919,7 @@
       </p:sp>
       <p:sp>
         <p:nvSpPr>
-          <p:cNvPr id="77" name="Shape 67"/>
+          <p:cNvPr id="85" name="Shape 83"/>
           <p:cNvSpPr/>
           <p:nvPr/>
         </p:nvSpPr>
@@ -3168,7 +3944,7 @@
       </p:sp>
       <p:sp>
         <p:nvSpPr>
-          <p:cNvPr id="78" name="Shape 68"/>
+          <p:cNvPr id="86" name="Shape 84"/>
           <p:cNvSpPr/>
           <p:nvPr/>
         </p:nvSpPr>
@@ -3193,7 +3969,7 @@
       </p:sp>
       <p:sp>
         <p:nvSpPr>
-          <p:cNvPr id="79" name="Shape 69"/>
+          <p:cNvPr id="87" name="Shape 85"/>
           <p:cNvSpPr/>
           <p:nvPr/>
         </p:nvSpPr>
@@ -3218,7 +3994,7 @@
       </p:sp>
       <p:sp>
         <p:nvSpPr>
-          <p:cNvPr id="80" name="Shape 70"/>
+          <p:cNvPr id="88" name="Shape 86"/>
           <p:cNvSpPr/>
           <p:nvPr/>
         </p:nvSpPr>
@@ -3243,7 +4019,7 @@
       </p:sp>
       <p:sp>
         <p:nvSpPr>
-          <p:cNvPr id="81" name="Text 71"/>
+          <p:cNvPr id="89" name="Text 87"/>
           <p:cNvSpPr/>
           <p:nvPr/>
         </p:nvSpPr>
@@ -3302,7 +4078,7 @@
       </p:sp>
       <p:sp>
         <p:nvSpPr>
-          <p:cNvPr id="82" name="Shape 72"/>
+          <p:cNvPr id="90" name="Shape 88"/>
           <p:cNvSpPr/>
           <p:nvPr/>
         </p:nvSpPr>
@@ -3327,7 +4103,7 @@
       </p:sp>
       <p:sp>
         <p:nvSpPr>
-          <p:cNvPr id="83" name="Shape 73"/>
+          <p:cNvPr id="91" name="Shape 89"/>
           <p:cNvSpPr/>
           <p:nvPr/>
         </p:nvSpPr>
@@ -3352,7 +4128,7 @@
       </p:sp>
       <p:sp>
         <p:nvSpPr>
-          <p:cNvPr id="84" name="Shape 74"/>
+          <p:cNvPr id="92" name="Shape 90"/>
           <p:cNvSpPr/>
           <p:nvPr/>
         </p:nvSpPr>
@@ -3377,7 +4153,7 @@
       </p:sp>
       <p:sp>
         <p:nvSpPr>
-          <p:cNvPr id="85" name="Shape 75"/>
+          <p:cNvPr id="93" name="Shape 91"/>
           <p:cNvSpPr/>
           <p:nvPr/>
         </p:nvSpPr>
@@ -3402,7 +4178,7 @@
       </p:sp>
       <p:sp>
         <p:nvSpPr>
-          <p:cNvPr id="86" name="Text 76"/>
+          <p:cNvPr id="94" name="Text 92"/>
           <p:cNvSpPr/>
           <p:nvPr/>
         </p:nvSpPr>
@@ -3461,7 +4237,7 @@
       </p:sp>
       <p:sp>
         <p:nvSpPr>
-          <p:cNvPr id="87" name="Shape 77"/>
+          <p:cNvPr id="95" name="Shape 93"/>
           <p:cNvSpPr/>
           <p:nvPr/>
         </p:nvSpPr>
@@ -3486,7 +4262,7 @@
       </p:sp>
       <p:sp>
         <p:nvSpPr>
-          <p:cNvPr id="88" name="Shape 78"/>
+          <p:cNvPr id="96" name="Shape 94"/>
           <p:cNvSpPr/>
           <p:nvPr/>
         </p:nvSpPr>
@@ -3511,7 +4287,7 @@
       </p:sp>
       <p:sp>
         <p:nvSpPr>
-          <p:cNvPr id="89" name="Shape 79"/>
+          <p:cNvPr id="97" name="Shape 95"/>
           <p:cNvSpPr/>
           <p:nvPr/>
         </p:nvSpPr>
@@ -3536,7 +4312,7 @@
       </p:sp>
       <p:sp>
         <p:nvSpPr>
-          <p:cNvPr id="90" name="Shape 80"/>
+          <p:cNvPr id="98" name="Shape 96"/>
           <p:cNvSpPr/>
           <p:nvPr/>
         </p:nvSpPr>
@@ -3561,7 +4337,7 @@
       </p:sp>
       <p:sp>
         <p:nvSpPr>
-          <p:cNvPr id="91" name="Text 81"/>
+          <p:cNvPr id="99" name="Text 97"/>
           <p:cNvSpPr/>
           <p:nvPr/>
         </p:nvSpPr>
@@ -3620,7 +4396,7 @@
       </p:sp>
       <p:sp>
         <p:nvSpPr>
-          <p:cNvPr id="92" name="Shape 82"/>
+          <p:cNvPr id="100" name="Shape 98"/>
           <p:cNvSpPr/>
           <p:nvPr/>
         </p:nvSpPr>
@@ -3645,7 +4421,7 @@
       </p:sp>
       <p:sp>
         <p:nvSpPr>
-          <p:cNvPr id="93" name="Shape 83"/>
+          <p:cNvPr id="101" name="Shape 99"/>
           <p:cNvSpPr/>
           <p:nvPr/>
         </p:nvSpPr>
@@ -3670,7 +4446,7 @@
       </p:sp>
       <p:sp>
         <p:nvSpPr>
-          <p:cNvPr id="94" name="Shape 84"/>
+          <p:cNvPr id="102" name="Shape 100"/>
           <p:cNvSpPr/>
           <p:nvPr/>
         </p:nvSpPr>
@@ -3695,7 +4471,7 @@
       </p:sp>
       <p:sp>
         <p:nvSpPr>
-          <p:cNvPr id="95" name="Shape 85"/>
+          <p:cNvPr id="103" name="Shape 101"/>
           <p:cNvSpPr/>
           <p:nvPr/>
         </p:nvSpPr>
@@ -3720,7 +4496,7 @@
       </p:sp>
       <p:sp>
         <p:nvSpPr>
-          <p:cNvPr id="96" name="Text 86"/>
+          <p:cNvPr id="104" name="Text 102"/>
           <p:cNvSpPr/>
           <p:nvPr/>
         </p:nvSpPr>
@@ -3779,7 +4555,7 @@
       </p:sp>
       <p:sp>
         <p:nvSpPr>
-          <p:cNvPr id="97" name="Shape 87"/>
+          <p:cNvPr id="105" name="Shape 103"/>
           <p:cNvSpPr/>
           <p:nvPr/>
         </p:nvSpPr>
@@ -3804,7 +4580,7 @@
       </p:sp>
       <p:sp>
         <p:nvSpPr>
-          <p:cNvPr id="98" name="Shape 88"/>
+          <p:cNvPr id="106" name="Shape 104"/>
           <p:cNvSpPr/>
           <p:nvPr/>
         </p:nvSpPr>
@@ -3829,7 +4605,7 @@
       </p:sp>
       <p:sp>
         <p:nvSpPr>
-          <p:cNvPr id="99" name="Shape 89"/>
+          <p:cNvPr id="107" name="Shape 105"/>
           <p:cNvSpPr/>
           <p:nvPr/>
         </p:nvSpPr>
@@ -3854,7 +4630,7 @@
       </p:sp>
       <p:sp>
         <p:nvSpPr>
-          <p:cNvPr id="100" name="Shape 90"/>
+          <p:cNvPr id="108" name="Shape 106"/>
           <p:cNvSpPr/>
           <p:nvPr/>
         </p:nvSpPr>
@@ -3879,7 +4655,7 @@
       </p:sp>
       <p:sp>
         <p:nvSpPr>
-          <p:cNvPr id="101" name="Text 91"/>
+          <p:cNvPr id="109" name="Text 107"/>
           <p:cNvSpPr/>
           <p:nvPr/>
         </p:nvSpPr>
@@ -3938,7 +4714,7 @@
       </p:sp>
       <p:sp>
         <p:nvSpPr>
-          <p:cNvPr id="102" name="Shape 92"/>
+          <p:cNvPr id="110" name="Shape 108"/>
           <p:cNvSpPr/>
           <p:nvPr/>
         </p:nvSpPr>
@@ -3958,7 +4734,7 @@
       </p:sp>
       <p:sp>
         <p:nvSpPr>
-          <p:cNvPr id="103" name="Shape 93"/>
+          <p:cNvPr id="111" name="Shape 109"/>
           <p:cNvSpPr/>
           <p:nvPr/>
         </p:nvSpPr>
@@ -3978,7 +4754,7 @@
       </p:sp>
       <p:sp>
         <p:nvSpPr>
-          <p:cNvPr id="104" name="Shape 94"/>
+          <p:cNvPr id="112" name="Shape 110"/>
           <p:cNvSpPr/>
           <p:nvPr/>
         </p:nvSpPr>
@@ -3998,7 +4774,7 @@
       </p:sp>
       <p:sp>
         <p:nvSpPr>
-          <p:cNvPr id="105" name="Shape 95"/>
+          <p:cNvPr id="113" name="Shape 111"/>
           <p:cNvSpPr/>
           <p:nvPr/>
         </p:nvSpPr>
@@ -4018,7 +4794,7 @@
       </p:sp>
       <p:sp>
         <p:nvSpPr>
-          <p:cNvPr id="106" name="Shape 96"/>
+          <p:cNvPr id="114" name="Shape 112"/>
           <p:cNvSpPr/>
           <p:nvPr/>
         </p:nvSpPr>
@@ -4038,7 +4814,7 @@
       </p:sp>
       <p:sp>
         <p:nvSpPr>
-          <p:cNvPr id="107" name="Shape 97"/>
+          <p:cNvPr id="115" name="Shape 113"/>
           <p:cNvSpPr/>
           <p:nvPr/>
         </p:nvSpPr>
@@ -4063,7 +4839,7 @@
       </p:sp>
       <p:sp>
         <p:nvSpPr>
-          <p:cNvPr id="108" name="Text 98"/>
+          <p:cNvPr id="116" name="Text 114"/>
           <p:cNvSpPr/>
           <p:nvPr/>
         </p:nvSpPr>
@@ -4102,7 +4878,7 @@
       </p:sp>
       <p:sp>
         <p:nvSpPr>
-          <p:cNvPr id="109" name="Shape 99"/>
+          <p:cNvPr id="117" name="Shape 115"/>
           <p:cNvSpPr/>
           <p:nvPr/>
         </p:nvSpPr>
@@ -4127,7 +4903,7 @@
       </p:sp>
       <p:sp>
         <p:nvSpPr>
-          <p:cNvPr id="110" name="Text 100"/>
+          <p:cNvPr id="118" name="Text 116"/>
           <p:cNvSpPr/>
           <p:nvPr/>
         </p:nvSpPr>
@@ -4166,7 +4942,7 @@
       </p:sp>
       <p:sp>
         <p:nvSpPr>
-          <p:cNvPr id="111" name="Shape 101"/>
+          <p:cNvPr id="119" name="Shape 117"/>
           <p:cNvSpPr/>
           <p:nvPr/>
         </p:nvSpPr>
@@ -4191,7 +4967,7 @@
       </p:sp>
       <p:sp>
         <p:nvSpPr>
-          <p:cNvPr id="112" name="Text 102"/>
+          <p:cNvPr id="120" name="Text 118"/>
           <p:cNvSpPr/>
           <p:nvPr/>
         </p:nvSpPr>
@@ -4230,7 +5006,7 @@
       </p:sp>
       <p:sp>
         <p:nvSpPr>
-          <p:cNvPr id="113" name="Shape 103"/>
+          <p:cNvPr id="121" name="Shape 119"/>
           <p:cNvSpPr/>
           <p:nvPr/>
         </p:nvSpPr>
@@ -4255,7 +5031,7 @@
       </p:sp>
       <p:sp>
         <p:nvSpPr>
-          <p:cNvPr id="114" name="Text 104"/>
+          <p:cNvPr id="122" name="Text 120"/>
           <p:cNvSpPr/>
           <p:nvPr/>
         </p:nvSpPr>
@@ -4294,7 +5070,7 @@
       </p:sp>
       <p:sp>
         <p:nvSpPr>
-          <p:cNvPr id="115" name="Shape 105"/>
+          <p:cNvPr id="123" name="Shape 121"/>
           <p:cNvSpPr/>
           <p:nvPr/>
         </p:nvSpPr>
@@ -4319,7 +5095,7 @@
       </p:sp>
       <p:sp>
         <p:nvSpPr>
-          <p:cNvPr id="116" name="Text 106"/>
+          <p:cNvPr id="124" name="Text 122"/>
           <p:cNvSpPr/>
           <p:nvPr/>
         </p:nvSpPr>
@@ -4358,7 +5134,7 @@
       </p:sp>
       <p:sp>
         <p:nvSpPr>
-          <p:cNvPr id="117" name="Shape 107"/>
+          <p:cNvPr id="125" name="Shape 123"/>
           <p:cNvSpPr/>
           <p:nvPr/>
         </p:nvSpPr>
@@ -4383,7 +5159,7 @@
       </p:sp>
       <p:sp>
         <p:nvSpPr>
-          <p:cNvPr id="118" name="Text 108"/>
+          <p:cNvPr id="126" name="Text 124"/>
           <p:cNvSpPr/>
           <p:nvPr/>
         </p:nvSpPr>
@@ -4422,7 +5198,7 @@
       </p:sp>
       <p:sp>
         <p:nvSpPr>
-          <p:cNvPr id="119" name="Shape 109"/>
+          <p:cNvPr id="127" name="Shape 125"/>
           <p:cNvSpPr/>
           <p:nvPr/>
         </p:nvSpPr>
@@ -4447,7 +5223,7 @@
       </p:sp>
       <p:sp>
         <p:nvSpPr>
-          <p:cNvPr id="120" name="Text 110"/>
+          <p:cNvPr id="128" name="Text 126"/>
           <p:cNvSpPr/>
           <p:nvPr/>
         </p:nvSpPr>
@@ -4486,7 +5262,7 @@
       </p:sp>
       <p:sp>
         <p:nvSpPr>
-          <p:cNvPr id="121" name="Shape 111"/>
+          <p:cNvPr id="129" name="Shape 127"/>
           <p:cNvSpPr/>
           <p:nvPr/>
         </p:nvSpPr>
@@ -4511,7 +5287,7 @@
       </p:sp>
       <p:sp>
         <p:nvSpPr>
-          <p:cNvPr id="122" name="Text 112"/>
+          <p:cNvPr id="130" name="Text 128"/>
           <p:cNvSpPr/>
           <p:nvPr/>
         </p:nvSpPr>
@@ -4550,7 +5326,7 @@
       </p:sp>
       <p:sp>
         <p:nvSpPr>
-          <p:cNvPr id="123" name="Shape 113"/>
+          <p:cNvPr id="131" name="Shape 129"/>
           <p:cNvSpPr/>
           <p:nvPr/>
         </p:nvSpPr>
@@ -4574,7 +5350,7 @@
       </p:sp>
       <p:sp>
         <p:nvSpPr>
-          <p:cNvPr id="124" name="Shape 114"/>
+          <p:cNvPr id="132" name="Shape 130"/>
           <p:cNvSpPr/>
           <p:nvPr/>
         </p:nvSpPr>
@@ -4598,7 +5374,7 @@
       </p:sp>
       <p:sp>
         <p:nvSpPr>
-          <p:cNvPr id="125" name="Shape 115"/>
+          <p:cNvPr id="133" name="Shape 131"/>
           <p:cNvSpPr/>
           <p:nvPr/>
         </p:nvSpPr>
@@ -4622,7 +5398,7 @@
       </p:sp>
       <p:sp>
         <p:nvSpPr>
-          <p:cNvPr id="126" name="Shape 116"/>
+          <p:cNvPr id="134" name="Shape 132"/>
           <p:cNvSpPr/>
           <p:nvPr/>
         </p:nvSpPr>
@@ -4646,7 +5422,7 @@
       </p:sp>
       <p:sp>
         <p:nvSpPr>
-          <p:cNvPr id="127" name="Shape 117"/>
+          <p:cNvPr id="135" name="Shape 133"/>
           <p:cNvSpPr/>
           <p:nvPr/>
         </p:nvSpPr>
@@ -4670,7 +5446,7 @@
       </p:sp>
       <p:sp>
         <p:nvSpPr>
-          <p:cNvPr id="128" name="Shape 118"/>
+          <p:cNvPr id="136" name="Shape 134"/>
           <p:cNvSpPr/>
           <p:nvPr/>
         </p:nvSpPr>
@@ -4694,7 +5470,7 @@
       </p:sp>
       <p:sp>
         <p:nvSpPr>
-          <p:cNvPr id="129" name="Shape 119"/>
+          <p:cNvPr id="137" name="Shape 135"/>
           <p:cNvSpPr/>
           <p:nvPr/>
         </p:nvSpPr>
@@ -4718,7 +5494,7 @@
       </p:sp>
       <p:sp>
         <p:nvSpPr>
-          <p:cNvPr id="130" name="Shape 120"/>
+          <p:cNvPr id="138" name="Shape 136"/>
           <p:cNvSpPr/>
           <p:nvPr/>
         </p:nvSpPr>
@@ -4742,7 +5518,7 @@
       </p:sp>
       <p:sp>
         <p:nvSpPr>
-          <p:cNvPr id="131" name="Shape 121"/>
+          <p:cNvPr id="139" name="Shape 137"/>
           <p:cNvSpPr/>
           <p:nvPr/>
         </p:nvSpPr>
@@ -4766,7 +5542,7 @@
       </p:sp>
       <p:sp>
         <p:nvSpPr>
-          <p:cNvPr id="132" name="Shape 122"/>
+          <p:cNvPr id="140" name="Shape 138"/>
           <p:cNvSpPr/>
           <p:nvPr/>
         </p:nvSpPr>
@@ -4790,7 +5566,7 @@
       </p:sp>
       <p:sp>
         <p:nvSpPr>
-          <p:cNvPr id="133" name="Shape 123"/>
+          <p:cNvPr id="141" name="Shape 139"/>
           <p:cNvSpPr/>
           <p:nvPr/>
         </p:nvSpPr>
@@ -4814,7 +5590,7 @@
       </p:sp>
       <p:sp>
         <p:nvSpPr>
-          <p:cNvPr id="134" name="Shape 124"/>
+          <p:cNvPr id="142" name="Shape 140"/>
           <p:cNvSpPr/>
           <p:nvPr/>
         </p:nvSpPr>
@@ -4838,7 +5614,7 @@
       </p:sp>
       <p:sp>
         <p:nvSpPr>
-          <p:cNvPr id="135" name="Shape 125"/>
+          <p:cNvPr id="143" name="Shape 141"/>
           <p:cNvSpPr/>
           <p:nvPr/>
         </p:nvSpPr>
@@ -4862,7 +5638,7 @@
       </p:sp>
       <p:sp>
         <p:nvSpPr>
-          <p:cNvPr id="136" name="Shape 126"/>
+          <p:cNvPr id="144" name="Shape 142"/>
           <p:cNvSpPr/>
           <p:nvPr/>
         </p:nvSpPr>
@@ -4886,7 +5662,7 @@
       </p:sp>
       <p:sp>
         <p:nvSpPr>
-          <p:cNvPr id="137" name="Shape 127"/>
+          <p:cNvPr id="145" name="Shape 143"/>
           <p:cNvSpPr/>
           <p:nvPr/>
         </p:nvSpPr>
@@ -4910,7 +5686,7 @@
       </p:sp>
       <p:sp>
         <p:nvSpPr>
-          <p:cNvPr id="138" name="Shape 128"/>
+          <p:cNvPr id="146" name="Shape 144"/>
           <p:cNvSpPr/>
           <p:nvPr/>
         </p:nvSpPr>
@@ -4934,7 +5710,7 @@
       </p:sp>
       <p:sp>
         <p:nvSpPr>
-          <p:cNvPr id="139" name="Shape 129"/>
+          <p:cNvPr id="147" name="Shape 145"/>
           <p:cNvSpPr/>
           <p:nvPr/>
         </p:nvSpPr>
@@ -4958,7 +5734,7 @@
       </p:sp>
       <p:sp>
         <p:nvSpPr>
-          <p:cNvPr id="140" name="Shape 130"/>
+          <p:cNvPr id="148" name="Shape 146"/>
           <p:cNvSpPr/>
           <p:nvPr/>
         </p:nvSpPr>
@@ -4982,7 +5758,7 @@
       </p:sp>
       <p:sp>
         <p:nvSpPr>
-          <p:cNvPr id="141" name="Shape 131"/>
+          <p:cNvPr id="149" name="Shape 147"/>
           <p:cNvSpPr/>
           <p:nvPr/>
         </p:nvSpPr>
@@ -5006,7 +5782,7 @@
       </p:sp>
       <p:sp>
         <p:nvSpPr>
-          <p:cNvPr id="142" name="Shape 132"/>
+          <p:cNvPr id="150" name="Shape 148"/>
           <p:cNvSpPr/>
           <p:nvPr/>
         </p:nvSpPr>
@@ -5030,7 +5806,7 @@
       </p:sp>
       <p:sp>
         <p:nvSpPr>
-          <p:cNvPr id="143" name="Shape 133"/>
+          <p:cNvPr id="151" name="Shape 149"/>
           <p:cNvSpPr/>
           <p:nvPr/>
         </p:nvSpPr>
@@ -5054,7 +5830,7 @@
       </p:sp>
       <p:sp>
         <p:nvSpPr>
-          <p:cNvPr id="144" name="Shape 134"/>
+          <p:cNvPr id="152" name="Shape 150"/>
           <p:cNvSpPr/>
           <p:nvPr/>
         </p:nvSpPr>
@@ -5078,7 +5854,7 @@
       </p:sp>
       <p:sp>
         <p:nvSpPr>
-          <p:cNvPr id="145" name="Shape 135"/>
+          <p:cNvPr id="153" name="Shape 151"/>
           <p:cNvSpPr/>
           <p:nvPr/>
         </p:nvSpPr>
@@ -5102,7 +5878,7 @@
       </p:sp>
       <p:sp>
         <p:nvSpPr>
-          <p:cNvPr id="146" name="Shape 136"/>
+          <p:cNvPr id="154" name="Shape 152"/>
           <p:cNvSpPr/>
           <p:nvPr/>
         </p:nvSpPr>
@@ -5126,7 +5902,7 @@
       </p:sp>
       <p:sp>
         <p:nvSpPr>
-          <p:cNvPr id="147" name="Shape 137"/>
+          <p:cNvPr id="155" name="Shape 153"/>
           <p:cNvSpPr/>
           <p:nvPr/>
         </p:nvSpPr>
@@ -5151,7 +5927,7 @@
       </p:sp>
       <p:sp>
         <p:nvSpPr>
-          <p:cNvPr id="148" name="Text 138"/>
+          <p:cNvPr id="156" name="Text 154"/>
           <p:cNvSpPr/>
           <p:nvPr/>
         </p:nvSpPr>
@@ -5190,7 +5966,7 @@
       </p:sp>
       <p:sp>
         <p:nvSpPr>
-          <p:cNvPr id="149" name="Shape 139"/>
+          <p:cNvPr id="157" name="Shape 155"/>
           <p:cNvSpPr/>
           <p:nvPr/>
         </p:nvSpPr>
@@ -5217,7 +5993,7 @@
       </p:sp>
       <p:sp>
         <p:nvSpPr>
-          <p:cNvPr id="150" name="Shape 140"/>
+          <p:cNvPr id="158" name="Shape 156"/>
           <p:cNvSpPr/>
           <p:nvPr/>
         </p:nvSpPr>
@@ -5240,7 +6016,7 @@
       </p:sp>
       <p:sp>
         <p:nvSpPr>
-          <p:cNvPr id="151" name="Shape 141"/>
+          <p:cNvPr id="159" name="Shape 157"/>
           <p:cNvSpPr/>
           <p:nvPr/>
         </p:nvSpPr>
@@ -5263,7 +6039,7 @@
       </p:sp>
       <p:sp>
         <p:nvSpPr>
-          <p:cNvPr id="152" name="Shape 142"/>
+          <p:cNvPr id="160" name="Shape 158"/>
           <p:cNvSpPr/>
           <p:nvPr/>
         </p:nvSpPr>
@@ -5286,7 +6062,7 @@
       </p:sp>
       <p:sp>
         <p:nvSpPr>
-          <p:cNvPr id="153" name="Shape 143"/>
+          <p:cNvPr id="161" name="Shape 159"/>
           <p:cNvSpPr/>
           <p:nvPr/>
         </p:nvSpPr>
@@ -5309,7 +6085,7 @@
       </p:sp>
       <p:sp>
         <p:nvSpPr>
-          <p:cNvPr id="154" name="Shape 144"/>
+          <p:cNvPr id="162" name="Shape 160"/>
           <p:cNvSpPr/>
           <p:nvPr/>
         </p:nvSpPr>
@@ -5332,7 +6108,7 @@
       </p:sp>
       <p:sp>
         <p:nvSpPr>
-          <p:cNvPr id="155" name="Shape 145"/>
+          <p:cNvPr id="163" name="Shape 161"/>
           <p:cNvSpPr/>
           <p:nvPr/>
         </p:nvSpPr>
@@ -5355,7 +6131,7 @@
       </p:sp>
       <p:sp>
         <p:nvSpPr>
-          <p:cNvPr id="156" name="Shape 146"/>
+          <p:cNvPr id="164" name="Shape 162"/>
           <p:cNvSpPr/>
           <p:nvPr/>
         </p:nvSpPr>
@@ -5378,7 +6154,7 @@
       </p:sp>
       <p:sp>
         <p:nvSpPr>
-          <p:cNvPr id="157" name="Shape 147"/>
+          <p:cNvPr id="165" name="Shape 163"/>
           <p:cNvSpPr/>
           <p:nvPr/>
         </p:nvSpPr>
@@ -5401,7 +6177,7 @@
       </p:sp>
       <p:sp>
         <p:nvSpPr>
-          <p:cNvPr id="158" name="Shape 148"/>
+          <p:cNvPr id="166" name="Shape 164"/>
           <p:cNvSpPr/>
           <p:nvPr/>
         </p:nvSpPr>
@@ -5424,7 +6200,7 @@
       </p:sp>
       <p:sp>
         <p:nvSpPr>
-          <p:cNvPr id="159" name="Shape 149"/>
+          <p:cNvPr id="167" name="Shape 165"/>
           <p:cNvSpPr/>
           <p:nvPr/>
         </p:nvSpPr>
@@ -5447,7 +6223,7 @@
       </p:sp>
       <p:sp>
         <p:nvSpPr>
-          <p:cNvPr id="160" name="Shape 150"/>
+          <p:cNvPr id="168" name="Shape 166"/>
           <p:cNvSpPr/>
           <p:nvPr/>
         </p:nvSpPr>
@@ -5470,7 +6246,7 @@
       </p:sp>
       <p:sp>
         <p:nvSpPr>
-          <p:cNvPr id="161" name="Shape 151"/>
+          <p:cNvPr id="169" name="Shape 167"/>
           <p:cNvSpPr/>
           <p:nvPr/>
         </p:nvSpPr>
@@ -5493,7 +6269,7 @@
       </p:sp>
       <p:sp>
         <p:nvSpPr>
-          <p:cNvPr id="162" name="Shape 152"/>
+          <p:cNvPr id="170" name="Shape 168"/>
           <p:cNvSpPr/>
           <p:nvPr/>
         </p:nvSpPr>
@@ -5516,7 +6292,7 @@
       </p:sp>
       <p:sp>
         <p:nvSpPr>
-          <p:cNvPr id="163" name="Shape 153"/>
+          <p:cNvPr id="171" name="Shape 169"/>
           <p:cNvSpPr/>
           <p:nvPr/>
         </p:nvSpPr>
@@ -5539,7 +6315,7 @@
       </p:sp>
       <p:sp>
         <p:nvSpPr>
-          <p:cNvPr id="164" name="Shape 154"/>
+          <p:cNvPr id="172" name="Shape 170"/>
           <p:cNvSpPr/>
           <p:nvPr/>
         </p:nvSpPr>
@@ -5562,7 +6338,7 @@
       </p:sp>
       <p:sp>
         <p:nvSpPr>
-          <p:cNvPr id="165" name="Shape 155"/>
+          <p:cNvPr id="173" name="Shape 171"/>
           <p:cNvSpPr/>
           <p:nvPr/>
         </p:nvSpPr>
@@ -5585,7 +6361,7 @@
       </p:sp>
       <p:sp>
         <p:nvSpPr>
-          <p:cNvPr id="166" name="Shape 156"/>
+          <p:cNvPr id="174" name="Shape 172"/>
           <p:cNvSpPr/>
           <p:nvPr/>
         </p:nvSpPr>
@@ -5608,7 +6384,7 @@
       </p:sp>
       <p:sp>
         <p:nvSpPr>
-          <p:cNvPr id="167" name="Shape 157"/>
+          <p:cNvPr id="175" name="Shape 173"/>
           <p:cNvSpPr/>
           <p:nvPr/>
         </p:nvSpPr>
@@ -5631,7 +6407,7 @@
       </p:sp>
       <p:sp>
         <p:nvSpPr>
-          <p:cNvPr id="168" name="Shape 158"/>
+          <p:cNvPr id="176" name="Shape 174"/>
           <p:cNvSpPr/>
           <p:nvPr/>
         </p:nvSpPr>
@@ -5654,7 +6430,7 @@
       </p:sp>
       <p:sp>
         <p:nvSpPr>
-          <p:cNvPr id="169" name="Shape 159"/>
+          <p:cNvPr id="177" name="Shape 175"/>
           <p:cNvSpPr/>
           <p:nvPr/>
         </p:nvSpPr>
@@ -5677,7 +6453,7 @@
       </p:sp>
       <p:sp>
         <p:nvSpPr>
-          <p:cNvPr id="170" name="Shape 160"/>
+          <p:cNvPr id="178" name="Shape 176"/>
           <p:cNvSpPr/>
           <p:nvPr/>
         </p:nvSpPr>
@@ -5700,7 +6476,7 @@
       </p:sp>
       <p:sp>
         <p:nvSpPr>
-          <p:cNvPr id="171" name="Shape 161"/>
+          <p:cNvPr id="179" name="Shape 177"/>
           <p:cNvSpPr/>
           <p:nvPr/>
         </p:nvSpPr>
@@ -5723,7 +6499,7 @@
       </p:sp>
       <p:sp>
         <p:nvSpPr>
-          <p:cNvPr id="172" name="Shape 162"/>
+          <p:cNvPr id="180" name="Shape 178"/>
           <p:cNvSpPr/>
           <p:nvPr/>
         </p:nvSpPr>
@@ -5746,7 +6522,7 @@
       </p:sp>
       <p:sp>
         <p:nvSpPr>
-          <p:cNvPr id="173" name="Shape 163"/>
+          <p:cNvPr id="181" name="Shape 179"/>
           <p:cNvSpPr/>
           <p:nvPr/>
         </p:nvSpPr>
@@ -5769,7 +6545,7 @@
       </p:sp>
       <p:sp>
         <p:nvSpPr>
-          <p:cNvPr id="174" name="Shape 164"/>
+          <p:cNvPr id="182" name="Shape 180"/>
           <p:cNvSpPr/>
           <p:nvPr/>
         </p:nvSpPr>
@@ -5792,7 +6568,7 @@
       </p:sp>
       <p:sp>
         <p:nvSpPr>
-          <p:cNvPr id="175" name="Shape 165"/>
+          <p:cNvPr id="183" name="Shape 181"/>
           <p:cNvSpPr/>
           <p:nvPr/>
         </p:nvSpPr>
@@ -5815,7 +6591,7 @@
       </p:sp>
       <p:sp>
         <p:nvSpPr>
-          <p:cNvPr id="176" name="Shape 166"/>
+          <p:cNvPr id="184" name="Shape 182"/>
           <p:cNvSpPr/>
           <p:nvPr/>
         </p:nvSpPr>
@@ -5838,7 +6614,7 @@
       </p:sp>
       <p:sp>
         <p:nvSpPr>
-          <p:cNvPr id="177" name="Shape 167"/>
+          <p:cNvPr id="185" name="Shape 183"/>
           <p:cNvSpPr/>
           <p:nvPr/>
         </p:nvSpPr>
@@ -5861,7 +6637,7 @@
       </p:sp>
       <p:sp>
         <p:nvSpPr>
-          <p:cNvPr id="178" name="Shape 168"/>
+          <p:cNvPr id="186" name="Shape 184"/>
           <p:cNvSpPr/>
           <p:nvPr/>
         </p:nvSpPr>
@@ -5884,7 +6660,7 @@
       </p:sp>
       <p:sp>
         <p:nvSpPr>
-          <p:cNvPr id="179" name="Shape 169"/>
+          <p:cNvPr id="187" name="Shape 185"/>
           <p:cNvSpPr/>
           <p:nvPr/>
         </p:nvSpPr>
@@ -5907,7 +6683,7 @@
       </p:sp>
       <p:sp>
         <p:nvSpPr>
-          <p:cNvPr id="180" name="Shape 170"/>
+          <p:cNvPr id="188" name="Shape 186"/>
           <p:cNvSpPr/>
           <p:nvPr/>
         </p:nvSpPr>
@@ -5930,7 +6706,7 @@
       </p:sp>
       <p:sp>
         <p:nvSpPr>
-          <p:cNvPr id="181" name="Shape 171"/>
+          <p:cNvPr id="189" name="Shape 187"/>
           <p:cNvSpPr/>
           <p:nvPr/>
         </p:nvSpPr>
@@ -5953,7 +6729,7 @@
       </p:sp>
       <p:sp>
         <p:nvSpPr>
-          <p:cNvPr id="182" name="Shape 172"/>
+          <p:cNvPr id="190" name="Shape 188"/>
           <p:cNvSpPr/>
           <p:nvPr/>
         </p:nvSpPr>
@@ -5973,7 +6749,7 @@
       </p:sp>
       <p:sp>
         <p:nvSpPr>
-          <p:cNvPr id="183" name="Shape 173"/>
+          <p:cNvPr id="191" name="Shape 189"/>
           <p:cNvSpPr/>
           <p:nvPr/>
         </p:nvSpPr>
@@ -5993,7 +6769,7 @@
       </p:sp>
       <p:sp>
         <p:nvSpPr>
-          <p:cNvPr id="184" name="Shape 174"/>
+          <p:cNvPr id="192" name="Shape 190"/>
           <p:cNvSpPr/>
           <p:nvPr/>
         </p:nvSpPr>
@@ -6013,7 +6789,7 @@
       </p:sp>
       <p:sp>
         <p:nvSpPr>
-          <p:cNvPr id="185" name="Shape 175"/>
+          <p:cNvPr id="193" name="Shape 191"/>
           <p:cNvSpPr/>
           <p:nvPr/>
         </p:nvSpPr>
@@ -6033,7 +6809,7 @@
       </p:sp>
       <p:sp>
         <p:nvSpPr>
-          <p:cNvPr id="186" name="Shape 176"/>
+          <p:cNvPr id="194" name="Shape 192"/>
           <p:cNvSpPr/>
           <p:nvPr/>
         </p:nvSpPr>
@@ -6053,7 +6829,7 @@
       </p:sp>
       <p:sp>
         <p:nvSpPr>
-          <p:cNvPr id="187" name="Shape 177"/>
+          <p:cNvPr id="195" name="Shape 193"/>
           <p:cNvSpPr/>
           <p:nvPr/>
         </p:nvSpPr>
@@ -6073,7 +6849,7 @@
       </p:sp>
       <p:sp>
         <p:nvSpPr>
-          <p:cNvPr id="188" name="Shape 178"/>
+          <p:cNvPr id="196" name="Shape 194"/>
           <p:cNvSpPr/>
           <p:nvPr/>
         </p:nvSpPr>
@@ -6093,7 +6869,7 @@
       </p:sp>
       <p:sp>
         <p:nvSpPr>
-          <p:cNvPr id="189" name="Shape 179"/>
+          <p:cNvPr id="197" name="Shape 195"/>
           <p:cNvSpPr/>
           <p:nvPr/>
         </p:nvSpPr>
@@ -6113,7 +6889,7 @@
       </p:sp>
       <p:sp>
         <p:nvSpPr>
-          <p:cNvPr id="190" name="Shape 180"/>
+          <p:cNvPr id="198" name="Shape 196"/>
           <p:cNvSpPr/>
           <p:nvPr/>
         </p:nvSpPr>
@@ -6133,7 +6909,7 @@
       </p:sp>
       <p:sp>
         <p:nvSpPr>
-          <p:cNvPr id="191" name="Shape 181"/>
+          <p:cNvPr id="199" name="Shape 197"/>
           <p:cNvSpPr/>
           <p:nvPr/>
         </p:nvSpPr>
@@ -6153,7 +6929,7 @@
       </p:sp>
       <p:sp>
         <p:nvSpPr>
-          <p:cNvPr id="192" name="Shape 182"/>
+          <p:cNvPr id="200" name="Shape 198"/>
           <p:cNvSpPr/>
           <p:nvPr/>
         </p:nvSpPr>
@@ -6173,7 +6949,7 @@
       </p:sp>
       <p:sp>
         <p:nvSpPr>
-          <p:cNvPr id="193" name="Shape 183"/>
+          <p:cNvPr id="201" name="Shape 199"/>
           <p:cNvSpPr/>
           <p:nvPr/>
         </p:nvSpPr>
@@ -6193,7 +6969,7 @@
       </p:sp>
       <p:sp>
         <p:nvSpPr>
-          <p:cNvPr id="194" name="Text 184"/>
+          <p:cNvPr id="202" name="Text 200"/>
           <p:cNvSpPr/>
           <p:nvPr/>
         </p:nvSpPr>
@@ -6232,7 +7008,7 @@
       </p:sp>
       <p:sp>
         <p:nvSpPr>
-          <p:cNvPr id="195" name="Shape 185"/>
+          <p:cNvPr id="203" name="Shape 201"/>
           <p:cNvSpPr/>
           <p:nvPr/>
         </p:nvSpPr>
@@ -6259,7 +7035,7 @@
       </p:sp>
       <p:sp>
         <p:nvSpPr>
-          <p:cNvPr id="196" name="Shape 186"/>
+          <p:cNvPr id="204" name="Shape 202"/>
           <p:cNvSpPr/>
           <p:nvPr/>
         </p:nvSpPr>
@@ -6282,7 +7058,7 @@
       </p:sp>
       <p:sp>
         <p:nvSpPr>
-          <p:cNvPr id="197" name="Shape 187"/>
+          <p:cNvPr id="205" name="Shape 203"/>
           <p:cNvSpPr/>
           <p:nvPr/>
         </p:nvSpPr>
@@ -6305,7 +7081,7 @@
       </p:sp>
       <p:sp>
         <p:nvSpPr>
-          <p:cNvPr id="198" name="Shape 188"/>
+          <p:cNvPr id="206" name="Shape 204"/>
           <p:cNvSpPr/>
           <p:nvPr/>
         </p:nvSpPr>
@@ -6328,7 +7104,7 @@
       </p:sp>
       <p:sp>
         <p:nvSpPr>
-          <p:cNvPr id="199" name="Shape 189"/>
+          <p:cNvPr id="207" name="Shape 205"/>
           <p:cNvSpPr/>
           <p:nvPr/>
         </p:nvSpPr>
@@ -6351,7 +7127,7 @@
       </p:sp>
       <p:sp>
         <p:nvSpPr>
-          <p:cNvPr id="200" name="Shape 190"/>
+          <p:cNvPr id="208" name="Shape 206"/>
           <p:cNvSpPr/>
           <p:nvPr/>
         </p:nvSpPr>
@@ -6374,7 +7150,7 @@
       </p:sp>
       <p:sp>
         <p:nvSpPr>
-          <p:cNvPr id="201" name="Shape 191"/>
+          <p:cNvPr id="209" name="Shape 207"/>
           <p:cNvSpPr/>
           <p:nvPr/>
         </p:nvSpPr>
@@ -6397,7 +7173,7 @@
       </p:sp>
       <p:sp>
         <p:nvSpPr>
-          <p:cNvPr id="202" name="Shape 192"/>
+          <p:cNvPr id="210" name="Shape 208"/>
           <p:cNvSpPr/>
           <p:nvPr/>
         </p:nvSpPr>
@@ -6420,7 +7196,7 @@
       </p:sp>
       <p:sp>
         <p:nvSpPr>
-          <p:cNvPr id="203" name="Shape 193"/>
+          <p:cNvPr id="211" name="Shape 209"/>
           <p:cNvSpPr/>
           <p:nvPr/>
         </p:nvSpPr>
@@ -6443,7 +7219,7 @@
       </p:sp>
       <p:sp>
         <p:nvSpPr>
-          <p:cNvPr id="204" name="Shape 194"/>
+          <p:cNvPr id="212" name="Shape 210"/>
           <p:cNvSpPr/>
           <p:nvPr/>
         </p:nvSpPr>
@@ -6466,7 +7242,7 @@
       </p:sp>
       <p:sp>
         <p:nvSpPr>
-          <p:cNvPr id="205" name="Shape 195"/>
+          <p:cNvPr id="213" name="Shape 211"/>
           <p:cNvSpPr/>
           <p:nvPr/>
         </p:nvSpPr>
@@ -6489,7 +7265,7 @@
       </p:sp>
       <p:sp>
         <p:nvSpPr>
-          <p:cNvPr id="206" name="Shape 196"/>
+          <p:cNvPr id="214" name="Shape 212"/>
           <p:cNvSpPr/>
           <p:nvPr/>
         </p:nvSpPr>
@@ -6512,7 +7288,7 @@
       </p:sp>
       <p:sp>
         <p:nvSpPr>
-          <p:cNvPr id="207" name="Shape 197"/>
+          <p:cNvPr id="215" name="Shape 213"/>
           <p:cNvSpPr/>
           <p:nvPr/>
         </p:nvSpPr>
@@ -6535,7 +7311,7 @@
       </p:sp>
       <p:sp>
         <p:nvSpPr>
-          <p:cNvPr id="208" name="Shape 198"/>
+          <p:cNvPr id="216" name="Shape 214"/>
           <p:cNvSpPr/>
           <p:nvPr/>
         </p:nvSpPr>
@@ -6558,7 +7334,7 @@
       </p:sp>
       <p:sp>
         <p:nvSpPr>
-          <p:cNvPr id="209" name="Shape 199"/>
+          <p:cNvPr id="217" name="Shape 215"/>
           <p:cNvSpPr/>
           <p:nvPr/>
         </p:nvSpPr>
@@ -6581,7 +7357,7 @@
       </p:sp>
       <p:sp>
         <p:nvSpPr>
-          <p:cNvPr id="210" name="Shape 200"/>
+          <p:cNvPr id="218" name="Shape 216"/>
           <p:cNvSpPr/>
           <p:nvPr/>
         </p:nvSpPr>
@@ -6604,7 +7380,7 @@
       </p:sp>
       <p:sp>
         <p:nvSpPr>
-          <p:cNvPr id="211" name="Shape 201"/>
+          <p:cNvPr id="219" name="Shape 217"/>
           <p:cNvSpPr/>
           <p:nvPr/>
         </p:nvSpPr>
@@ -6627,7 +7403,7 @@
       </p:sp>
       <p:sp>
         <p:nvSpPr>
-          <p:cNvPr id="212" name="Shape 202"/>
+          <p:cNvPr id="220" name="Shape 218"/>
           <p:cNvSpPr/>
           <p:nvPr/>
         </p:nvSpPr>
@@ -6650,7 +7426,7 @@
       </p:sp>
       <p:sp>
         <p:nvSpPr>
-          <p:cNvPr id="213" name="Shape 203"/>
+          <p:cNvPr id="221" name="Shape 219"/>
           <p:cNvSpPr/>
           <p:nvPr/>
         </p:nvSpPr>
@@ -6673,7 +7449,7 @@
       </p:sp>
       <p:sp>
         <p:nvSpPr>
-          <p:cNvPr id="214" name="Shape 204"/>
+          <p:cNvPr id="222" name="Shape 220"/>
           <p:cNvSpPr/>
           <p:nvPr/>
         </p:nvSpPr>
@@ -6696,7 +7472,7 @@
       </p:sp>
       <p:sp>
         <p:nvSpPr>
-          <p:cNvPr id="215" name="Shape 205"/>
+          <p:cNvPr id="223" name="Shape 221"/>
           <p:cNvSpPr/>
           <p:nvPr/>
         </p:nvSpPr>
@@ -6719,7 +7495,7 @@
       </p:sp>
       <p:sp>
         <p:nvSpPr>
-          <p:cNvPr id="216" name="Shape 206"/>
+          <p:cNvPr id="224" name="Shape 222"/>
           <p:cNvSpPr/>
           <p:nvPr/>
         </p:nvSpPr>
@@ -6742,7 +7518,7 @@
       </p:sp>
       <p:sp>
         <p:nvSpPr>
-          <p:cNvPr id="217" name="Shape 207"/>
+          <p:cNvPr id="225" name="Shape 223"/>
           <p:cNvSpPr/>
           <p:nvPr/>
         </p:nvSpPr>
@@ -6765,7 +7541,7 @@
       </p:sp>
       <p:sp>
         <p:nvSpPr>
-          <p:cNvPr id="218" name="Shape 208"/>
+          <p:cNvPr id="226" name="Shape 224"/>
           <p:cNvSpPr/>
           <p:nvPr/>
         </p:nvSpPr>
@@ -6788,7 +7564,7 @@
       </p:sp>
       <p:sp>
         <p:nvSpPr>
-          <p:cNvPr id="219" name="Shape 209"/>
+          <p:cNvPr id="227" name="Shape 225"/>
           <p:cNvSpPr/>
           <p:nvPr/>
         </p:nvSpPr>
@@ -6811,7 +7587,7 @@
       </p:sp>
       <p:sp>
         <p:nvSpPr>
-          <p:cNvPr id="220" name="Shape 210"/>
+          <p:cNvPr id="228" name="Shape 226"/>
           <p:cNvSpPr/>
           <p:nvPr/>
         </p:nvSpPr>
@@ -6834,7 +7610,7 @@
       </p:sp>
       <p:sp>
         <p:nvSpPr>
-          <p:cNvPr id="221" name="Shape 211"/>
+          <p:cNvPr id="229" name="Shape 227"/>
           <p:cNvSpPr/>
           <p:nvPr/>
         </p:nvSpPr>
@@ -6857,7 +7633,7 @@
       </p:sp>
       <p:sp>
         <p:nvSpPr>
-          <p:cNvPr id="222" name="Shape 212"/>
+          <p:cNvPr id="230" name="Shape 228"/>
           <p:cNvSpPr/>
           <p:nvPr/>
         </p:nvSpPr>
@@ -6880,7 +7656,7 @@
       </p:sp>
       <p:sp>
         <p:nvSpPr>
-          <p:cNvPr id="223" name="Shape 213"/>
+          <p:cNvPr id="231" name="Shape 229"/>
           <p:cNvSpPr/>
           <p:nvPr/>
         </p:nvSpPr>
@@ -6903,7 +7679,7 @@
       </p:sp>
       <p:sp>
         <p:nvSpPr>
-          <p:cNvPr id="224" name="Shape 214"/>
+          <p:cNvPr id="232" name="Shape 230"/>
           <p:cNvSpPr/>
           <p:nvPr/>
         </p:nvSpPr>
@@ -6926,7 +7702,7 @@
       </p:sp>
       <p:sp>
         <p:nvSpPr>
-          <p:cNvPr id="225" name="Shape 215"/>
+          <p:cNvPr id="233" name="Shape 231"/>
           <p:cNvSpPr/>
           <p:nvPr/>
         </p:nvSpPr>
@@ -6949,7 +7725,7 @@
       </p:sp>
       <p:sp>
         <p:nvSpPr>
-          <p:cNvPr id="226" name="Shape 216"/>
+          <p:cNvPr id="234" name="Shape 232"/>
           <p:cNvSpPr/>
           <p:nvPr/>
         </p:nvSpPr>
@@ -6972,7 +7748,7 @@
       </p:sp>
       <p:sp>
         <p:nvSpPr>
-          <p:cNvPr id="227" name="Shape 217"/>
+          <p:cNvPr id="235" name="Shape 233"/>
           <p:cNvSpPr/>
           <p:nvPr/>
         </p:nvSpPr>
@@ -6995,7 +7771,7 @@
       </p:sp>
       <p:sp>
         <p:nvSpPr>
-          <p:cNvPr id="228" name="Shape 218"/>
+          <p:cNvPr id="236" name="Shape 234"/>
           <p:cNvSpPr/>
           <p:nvPr/>
         </p:nvSpPr>
@@ -7015,7 +7791,7 @@
       </p:sp>
       <p:sp>
         <p:nvSpPr>
-          <p:cNvPr id="229" name="Shape 219"/>
+          <p:cNvPr id="237" name="Shape 235"/>
           <p:cNvSpPr/>
           <p:nvPr/>
         </p:nvSpPr>
@@ -7035,7 +7811,7 @@
       </p:sp>
       <p:sp>
         <p:nvSpPr>
-          <p:cNvPr id="230" name="Shape 220"/>
+          <p:cNvPr id="238" name="Shape 236"/>
           <p:cNvSpPr/>
           <p:nvPr/>
         </p:nvSpPr>
@@ -7055,7 +7831,7 @@
       </p:sp>
       <p:sp>
         <p:nvSpPr>
-          <p:cNvPr id="231" name="Shape 221"/>
+          <p:cNvPr id="239" name="Shape 237"/>
           <p:cNvSpPr/>
           <p:nvPr/>
         </p:nvSpPr>
@@ -7075,7 +7851,7 @@
       </p:sp>
       <p:sp>
         <p:nvSpPr>
-          <p:cNvPr id="232" name="Shape 222"/>
+          <p:cNvPr id="240" name="Shape 238"/>
           <p:cNvSpPr/>
           <p:nvPr/>
         </p:nvSpPr>
@@ -7095,7 +7871,7 @@
       </p:sp>
       <p:sp>
         <p:nvSpPr>
-          <p:cNvPr id="233" name="Shape 223"/>
+          <p:cNvPr id="241" name="Shape 239"/>
           <p:cNvSpPr/>
           <p:nvPr/>
         </p:nvSpPr>
@@ -7115,7 +7891,7 @@
       </p:sp>
       <p:sp>
         <p:nvSpPr>
-          <p:cNvPr id="234" name="Shape 224"/>
+          <p:cNvPr id="242" name="Shape 240"/>
           <p:cNvSpPr/>
           <p:nvPr/>
         </p:nvSpPr>
@@ -7135,7 +7911,7 @@
       </p:sp>
       <p:sp>
         <p:nvSpPr>
-          <p:cNvPr id="235" name="Shape 225"/>
+          <p:cNvPr id="243" name="Shape 241"/>
           <p:cNvSpPr/>
           <p:nvPr/>
         </p:nvSpPr>
@@ -7155,7 +7931,7 @@
       </p:sp>
       <p:sp>
         <p:nvSpPr>
-          <p:cNvPr id="236" name="Shape 226"/>
+          <p:cNvPr id="244" name="Shape 242"/>
           <p:cNvSpPr/>
           <p:nvPr/>
         </p:nvSpPr>
@@ -7175,7 +7951,7 @@
       </p:sp>
       <p:sp>
         <p:nvSpPr>
-          <p:cNvPr id="237" name="Shape 227"/>
+          <p:cNvPr id="245" name="Shape 243"/>
           <p:cNvSpPr/>
           <p:nvPr/>
         </p:nvSpPr>
@@ -7195,7 +7971,7 @@
       </p:sp>
       <p:sp>
         <p:nvSpPr>
-          <p:cNvPr id="238" name="Shape 228"/>
+          <p:cNvPr id="246" name="Shape 244"/>
           <p:cNvSpPr/>
           <p:nvPr/>
         </p:nvSpPr>
@@ -7215,7 +7991,7 @@
       </p:sp>
       <p:sp>
         <p:nvSpPr>
-          <p:cNvPr id="239" name="Shape 229"/>
+          <p:cNvPr id="247" name="Shape 245"/>
           <p:cNvSpPr/>
           <p:nvPr/>
         </p:nvSpPr>
@@ -7235,7 +8011,7 @@
       </p:sp>
       <p:sp>
         <p:nvSpPr>
-          <p:cNvPr id="240" name="Text 230"/>
+          <p:cNvPr id="248" name="Text 246"/>
           <p:cNvSpPr/>
           <p:nvPr/>
         </p:nvSpPr>
@@ -7274,7 +8050,7 @@
       </p:sp>
       <p:sp>
         <p:nvSpPr>
-          <p:cNvPr id="241" name="Shape 231"/>
+          <p:cNvPr id="249" name="Shape 247"/>
           <p:cNvSpPr/>
           <p:nvPr/>
         </p:nvSpPr>
@@ -7301,7 +8077,7 @@
       </p:sp>
       <p:sp>
         <p:nvSpPr>
-          <p:cNvPr id="242" name="Shape 232"/>
+          <p:cNvPr id="250" name="Shape 248"/>
           <p:cNvSpPr/>
           <p:nvPr/>
         </p:nvSpPr>
@@ -7324,7 +8100,7 @@
       </p:sp>
       <p:sp>
         <p:nvSpPr>
-          <p:cNvPr id="243" name="Shape 233"/>
+          <p:cNvPr id="251" name="Shape 249"/>
           <p:cNvSpPr/>
           <p:nvPr/>
         </p:nvSpPr>
@@ -7347,7 +8123,7 @@
       </p:sp>
       <p:sp>
         <p:nvSpPr>
-          <p:cNvPr id="244" name="Shape 234"/>
+          <p:cNvPr id="252" name="Shape 250"/>
           <p:cNvSpPr/>
           <p:nvPr/>
         </p:nvSpPr>
@@ -7370,7 +8146,7 @@
       </p:sp>
       <p:sp>
         <p:nvSpPr>
-          <p:cNvPr id="245" name="Shape 235"/>
+          <p:cNvPr id="253" name="Shape 251"/>
           <p:cNvSpPr/>
           <p:nvPr/>
         </p:nvSpPr>
@@ -7393,7 +8169,7 @@
       </p:sp>
       <p:sp>
         <p:nvSpPr>
-          <p:cNvPr id="246" name="Shape 236"/>
+          <p:cNvPr id="254" name="Shape 252"/>
           <p:cNvSpPr/>
           <p:nvPr/>
         </p:nvSpPr>
@@ -7416,7 +8192,7 @@
       </p:sp>
       <p:sp>
         <p:nvSpPr>
-          <p:cNvPr id="247" name="Shape 237"/>
+          <p:cNvPr id="255" name="Shape 253"/>
           <p:cNvSpPr/>
           <p:nvPr/>
         </p:nvSpPr>
@@ -7439,7 +8215,7 @@
       </p:sp>
       <p:sp>
         <p:nvSpPr>
-          <p:cNvPr id="248" name="Shape 238"/>
+          <p:cNvPr id="256" name="Shape 254"/>
           <p:cNvSpPr/>
           <p:nvPr/>
         </p:nvSpPr>
@@ -7462,7 +8238,7 @@
       </p:sp>
       <p:sp>
         <p:nvSpPr>
-          <p:cNvPr id="249" name="Shape 239"/>
+          <p:cNvPr id="257" name="Shape 255"/>
           <p:cNvSpPr/>
           <p:nvPr/>
         </p:nvSpPr>
@@ -7485,7 +8261,7 @@
       </p:sp>
       <p:sp>
         <p:nvSpPr>
-          <p:cNvPr id="250" name="Shape 240"/>
+          <p:cNvPr id="258" name="Shape 256"/>
           <p:cNvSpPr/>
           <p:nvPr/>
         </p:nvSpPr>
@@ -7508,7 +8284,7 @@
       </p:sp>
       <p:sp>
         <p:nvSpPr>
-          <p:cNvPr id="251" name="Shape 241"/>
+          <p:cNvPr id="259" name="Shape 257"/>
           <p:cNvSpPr/>
           <p:nvPr/>
         </p:nvSpPr>
@@ -7531,7 +8307,7 @@
       </p:sp>
       <p:sp>
         <p:nvSpPr>
-          <p:cNvPr id="252" name="Shape 242"/>
+          <p:cNvPr id="260" name="Shape 258"/>
           <p:cNvSpPr/>
           <p:nvPr/>
         </p:nvSpPr>
@@ -7554,7 +8330,7 @@
       </p:sp>
       <p:sp>
         <p:nvSpPr>
-          <p:cNvPr id="253" name="Shape 243"/>
+          <p:cNvPr id="261" name="Shape 259"/>
           <p:cNvSpPr/>
           <p:nvPr/>
         </p:nvSpPr>
@@ -7577,7 +8353,7 @@
       </p:sp>
       <p:sp>
         <p:nvSpPr>
-          <p:cNvPr id="254" name="Shape 244"/>
+          <p:cNvPr id="262" name="Shape 260"/>
           <p:cNvSpPr/>
           <p:nvPr/>
         </p:nvSpPr>
@@ -7600,7 +8376,7 @@
       </p:sp>
       <p:sp>
         <p:nvSpPr>
-          <p:cNvPr id="255" name="Shape 245"/>
+          <p:cNvPr id="263" name="Shape 261"/>
           <p:cNvSpPr/>
           <p:nvPr/>
         </p:nvSpPr>
@@ -7623,7 +8399,7 @@
       </p:sp>
       <p:sp>
         <p:nvSpPr>
-          <p:cNvPr id="256" name="Shape 246"/>
+          <p:cNvPr id="264" name="Shape 262"/>
           <p:cNvSpPr/>
           <p:nvPr/>
         </p:nvSpPr>
@@ -7646,7 +8422,7 @@
       </p:sp>
       <p:sp>
         <p:nvSpPr>
-          <p:cNvPr id="257" name="Shape 247"/>
+          <p:cNvPr id="265" name="Shape 263"/>
           <p:cNvSpPr/>
           <p:nvPr/>
         </p:nvSpPr>
@@ -7669,7 +8445,7 @@
       </p:sp>
       <p:sp>
         <p:nvSpPr>
-          <p:cNvPr id="258" name="Shape 248"/>
+          <p:cNvPr id="266" name="Shape 264"/>
           <p:cNvSpPr/>
           <p:nvPr/>
         </p:nvSpPr>
@@ -7692,7 +8468,7 @@
       </p:sp>
       <p:sp>
         <p:nvSpPr>
-          <p:cNvPr id="259" name="Shape 249"/>
+          <p:cNvPr id="267" name="Shape 265"/>
           <p:cNvSpPr/>
           <p:nvPr/>
         </p:nvSpPr>
@@ -7715,7 +8491,7 @@
       </p:sp>
       <p:sp>
         <p:nvSpPr>
-          <p:cNvPr id="260" name="Shape 250"/>
+          <p:cNvPr id="268" name="Shape 266"/>
           <p:cNvSpPr/>
           <p:nvPr/>
         </p:nvSpPr>
@@ -7738,7 +8514,7 @@
       </p:sp>
       <p:sp>
         <p:nvSpPr>
-          <p:cNvPr id="261" name="Shape 251"/>
+          <p:cNvPr id="269" name="Shape 267"/>
           <p:cNvSpPr/>
           <p:nvPr/>
         </p:nvSpPr>
@@ -7761,7 +8537,7 @@
       </p:sp>
       <p:sp>
         <p:nvSpPr>
-          <p:cNvPr id="262" name="Shape 252"/>
+          <p:cNvPr id="270" name="Shape 268"/>
           <p:cNvSpPr/>
           <p:nvPr/>
         </p:nvSpPr>
@@ -7784,7 +8560,7 @@
       </p:sp>
       <p:sp>
         <p:nvSpPr>
-          <p:cNvPr id="263" name="Shape 253"/>
+          <p:cNvPr id="271" name="Shape 269"/>
           <p:cNvSpPr/>
           <p:nvPr/>
         </p:nvSpPr>
@@ -7807,7 +8583,7 @@
       </p:sp>
       <p:sp>
         <p:nvSpPr>
-          <p:cNvPr id="264" name="Shape 254"/>
+          <p:cNvPr id="272" name="Shape 270"/>
           <p:cNvSpPr/>
           <p:nvPr/>
         </p:nvSpPr>
@@ -7830,7 +8606,7 @@
       </p:sp>
       <p:sp>
         <p:nvSpPr>
-          <p:cNvPr id="265" name="Shape 255"/>
+          <p:cNvPr id="273" name="Shape 271"/>
           <p:cNvSpPr/>
           <p:nvPr/>
         </p:nvSpPr>
@@ -7853,7 +8629,7 @@
       </p:sp>
       <p:sp>
         <p:nvSpPr>
-          <p:cNvPr id="266" name="Shape 256"/>
+          <p:cNvPr id="274" name="Shape 272"/>
           <p:cNvSpPr/>
           <p:nvPr/>
         </p:nvSpPr>
@@ -7876,7 +8652,7 @@
       </p:sp>
       <p:sp>
         <p:nvSpPr>
-          <p:cNvPr id="267" name="Shape 257"/>
+          <p:cNvPr id="275" name="Shape 273"/>
           <p:cNvSpPr/>
           <p:nvPr/>
         </p:nvSpPr>
@@ -7899,7 +8675,7 @@
       </p:sp>
       <p:sp>
         <p:nvSpPr>
-          <p:cNvPr id="268" name="Shape 258"/>
+          <p:cNvPr id="276" name="Shape 274"/>
           <p:cNvSpPr/>
           <p:nvPr/>
         </p:nvSpPr>
@@ -7922,7 +8698,7 @@
       </p:sp>
       <p:sp>
         <p:nvSpPr>
-          <p:cNvPr id="269" name="Shape 259"/>
+          <p:cNvPr id="277" name="Shape 275"/>
           <p:cNvSpPr/>
           <p:nvPr/>
         </p:nvSpPr>
@@ -7945,7 +8721,7 @@
       </p:sp>
       <p:sp>
         <p:nvSpPr>
-          <p:cNvPr id="270" name="Shape 260"/>
+          <p:cNvPr id="278" name="Shape 276"/>
           <p:cNvSpPr/>
           <p:nvPr/>
         </p:nvSpPr>
@@ -7968,7 +8744,7 @@
       </p:sp>
       <p:sp>
         <p:nvSpPr>
-          <p:cNvPr id="271" name="Shape 261"/>
+          <p:cNvPr id="279" name="Shape 277"/>
           <p:cNvSpPr/>
           <p:nvPr/>
         </p:nvSpPr>
@@ -7991,7 +8767,7 @@
       </p:sp>
       <p:sp>
         <p:nvSpPr>
-          <p:cNvPr id="272" name="Shape 262"/>
+          <p:cNvPr id="280" name="Shape 278"/>
           <p:cNvSpPr/>
           <p:nvPr/>
         </p:nvSpPr>
@@ -8014,7 +8790,7 @@
       </p:sp>
       <p:sp>
         <p:nvSpPr>
-          <p:cNvPr id="273" name="Shape 263"/>
+          <p:cNvPr id="281" name="Shape 279"/>
           <p:cNvSpPr/>
           <p:nvPr/>
         </p:nvSpPr>
@@ -8037,7 +8813,7 @@
       </p:sp>
       <p:sp>
         <p:nvSpPr>
-          <p:cNvPr id="274" name="Shape 264"/>
+          <p:cNvPr id="282" name="Shape 280"/>
           <p:cNvSpPr/>
           <p:nvPr/>
         </p:nvSpPr>
@@ -8057,7 +8833,7 @@
       </p:sp>
       <p:sp>
         <p:nvSpPr>
-          <p:cNvPr id="275" name="Shape 265"/>
+          <p:cNvPr id="283" name="Shape 281"/>
           <p:cNvSpPr/>
           <p:nvPr/>
         </p:nvSpPr>
@@ -8077,7 +8853,7 @@
       </p:sp>
       <p:sp>
         <p:nvSpPr>
-          <p:cNvPr id="276" name="Shape 266"/>
+          <p:cNvPr id="284" name="Shape 282"/>
           <p:cNvSpPr/>
           <p:nvPr/>
         </p:nvSpPr>
@@ -8097,7 +8873,7 @@
       </p:sp>
       <p:sp>
         <p:nvSpPr>
-          <p:cNvPr id="277" name="Shape 267"/>
+          <p:cNvPr id="285" name="Shape 283"/>
           <p:cNvSpPr/>
           <p:nvPr/>
         </p:nvSpPr>
@@ -8117,7 +8893,7 @@
       </p:sp>
       <p:sp>
         <p:nvSpPr>
-          <p:cNvPr id="278" name="Shape 268"/>
+          <p:cNvPr id="286" name="Shape 284"/>
           <p:cNvSpPr/>
           <p:nvPr/>
         </p:nvSpPr>
@@ -8137,7 +8913,7 @@
       </p:sp>
       <p:sp>
         <p:nvSpPr>
-          <p:cNvPr id="279" name="Shape 269"/>
+          <p:cNvPr id="287" name="Shape 285"/>
           <p:cNvSpPr/>
           <p:nvPr/>
         </p:nvSpPr>
@@ -8157,7 +8933,7 @@
       </p:sp>
       <p:sp>
         <p:nvSpPr>
-          <p:cNvPr id="280" name="Shape 270"/>
+          <p:cNvPr id="288" name="Shape 286"/>
           <p:cNvSpPr/>
           <p:nvPr/>
         </p:nvSpPr>
@@ -8177,7 +8953,7 @@
       </p:sp>
       <p:sp>
         <p:nvSpPr>
-          <p:cNvPr id="281" name="Shape 271"/>
+          <p:cNvPr id="289" name="Shape 287"/>
           <p:cNvSpPr/>
           <p:nvPr/>
         </p:nvSpPr>
@@ -8197,7 +8973,7 @@
       </p:sp>
       <p:sp>
         <p:nvSpPr>
-          <p:cNvPr id="282" name="Shape 272"/>
+          <p:cNvPr id="290" name="Shape 288"/>
           <p:cNvSpPr/>
           <p:nvPr/>
         </p:nvSpPr>
@@ -8217,7 +8993,7 @@
       </p:sp>
       <p:sp>
         <p:nvSpPr>
-          <p:cNvPr id="283" name="Shape 273"/>
+          <p:cNvPr id="291" name="Shape 289"/>
           <p:cNvSpPr/>
           <p:nvPr/>
         </p:nvSpPr>
@@ -8237,7 +9013,7 @@
       </p:sp>
       <p:sp>
         <p:nvSpPr>
-          <p:cNvPr id="284" name="Shape 274"/>
+          <p:cNvPr id="292" name="Shape 290"/>
           <p:cNvSpPr/>
           <p:nvPr/>
         </p:nvSpPr>
@@ -8257,7 +9033,7 @@
       </p:sp>
       <p:sp>
         <p:nvSpPr>
-          <p:cNvPr id="285" name="Shape 275"/>
+          <p:cNvPr id="293" name="Shape 291"/>
           <p:cNvSpPr/>
           <p:nvPr/>
         </p:nvSpPr>
@@ -8277,7 +9053,7 @@
       </p:sp>
       <p:sp>
         <p:nvSpPr>
-          <p:cNvPr id="286" name="Text 276"/>
+          <p:cNvPr id="294" name="Text 292"/>
           <p:cNvSpPr/>
           <p:nvPr/>
         </p:nvSpPr>
@@ -8316,7 +9092,7 @@
       </p:sp>
       <p:sp>
         <p:nvSpPr>
-          <p:cNvPr id="287" name="Shape 277"/>
+          <p:cNvPr id="295" name="Shape 293"/>
           <p:cNvSpPr/>
           <p:nvPr/>
         </p:nvSpPr>
@@ -8343,7 +9119,7 @@
       </p:sp>
       <p:sp>
         <p:nvSpPr>
-          <p:cNvPr id="288" name="Shape 278"/>
+          <p:cNvPr id="296" name="Shape 294"/>
           <p:cNvSpPr/>
           <p:nvPr/>
         </p:nvSpPr>
@@ -8366,7 +9142,7 @@
       </p:sp>
       <p:sp>
         <p:nvSpPr>
-          <p:cNvPr id="289" name="Shape 279"/>
+          <p:cNvPr id="297" name="Shape 295"/>
           <p:cNvSpPr/>
           <p:nvPr/>
         </p:nvSpPr>
@@ -8389,7 +9165,7 @@
       </p:sp>
       <p:sp>
         <p:nvSpPr>
-          <p:cNvPr id="290" name="Shape 280"/>
+          <p:cNvPr id="298" name="Shape 296"/>
           <p:cNvSpPr/>
           <p:nvPr/>
         </p:nvSpPr>
@@ -8412,7 +9188,7 @@
       </p:sp>
       <p:sp>
         <p:nvSpPr>
-          <p:cNvPr id="291" name="Shape 281"/>
+          <p:cNvPr id="299" name="Shape 297"/>
           <p:cNvSpPr/>
           <p:nvPr/>
         </p:nvSpPr>
@@ -8435,7 +9211,7 @@
       </p:sp>
       <p:sp>
         <p:nvSpPr>
-          <p:cNvPr id="292" name="Shape 282"/>
+          <p:cNvPr id="300" name="Shape 298"/>
           <p:cNvSpPr/>
           <p:nvPr/>
         </p:nvSpPr>
@@ -8458,7 +9234,7 @@
       </p:sp>
       <p:sp>
         <p:nvSpPr>
-          <p:cNvPr id="293" name="Shape 283"/>
+          <p:cNvPr id="301" name="Shape 299"/>
           <p:cNvSpPr/>
           <p:nvPr/>
         </p:nvSpPr>
@@ -8481,7 +9257,7 @@
       </p:sp>
       <p:sp>
         <p:nvSpPr>
-          <p:cNvPr id="294" name="Shape 284"/>
+          <p:cNvPr id="302" name="Shape 300"/>
           <p:cNvSpPr/>
           <p:nvPr/>
         </p:nvSpPr>
@@ -8504,7 +9280,7 @@
       </p:sp>
       <p:sp>
         <p:nvSpPr>
-          <p:cNvPr id="295" name="Shape 285"/>
+          <p:cNvPr id="303" name="Shape 301"/>
           <p:cNvSpPr/>
           <p:nvPr/>
         </p:nvSpPr>
@@ -8527,7 +9303,7 @@
       </p:sp>
       <p:sp>
         <p:nvSpPr>
-          <p:cNvPr id="296" name="Shape 286"/>
+          <p:cNvPr id="304" name="Shape 302"/>
           <p:cNvSpPr/>
           <p:nvPr/>
         </p:nvSpPr>
@@ -8550,7 +9326,7 @@
       </p:sp>
       <p:sp>
         <p:nvSpPr>
-          <p:cNvPr id="297" name="Shape 287"/>
+          <p:cNvPr id="305" name="Shape 303"/>
           <p:cNvSpPr/>
           <p:nvPr/>
         </p:nvSpPr>
@@ -8573,7 +9349,7 @@
       </p:sp>
       <p:sp>
         <p:nvSpPr>
-          <p:cNvPr id="298" name="Shape 288"/>
+          <p:cNvPr id="306" name="Shape 304"/>
           <p:cNvSpPr/>
           <p:nvPr/>
         </p:nvSpPr>
@@ -8596,7 +9372,7 @@
       </p:sp>
       <p:sp>
         <p:nvSpPr>
-          <p:cNvPr id="299" name="Shape 289"/>
+          <p:cNvPr id="307" name="Shape 305"/>
           <p:cNvSpPr/>
           <p:nvPr/>
         </p:nvSpPr>
@@ -8619,7 +9395,7 @@
       </p:sp>
       <p:sp>
         <p:nvSpPr>
-          <p:cNvPr id="300" name="Shape 290"/>
+          <p:cNvPr id="308" name="Shape 306"/>
           <p:cNvSpPr/>
           <p:nvPr/>
         </p:nvSpPr>
@@ -8642,7 +9418,7 @@
       </p:sp>
       <p:sp>
         <p:nvSpPr>
-          <p:cNvPr id="301" name="Shape 291"/>
+          <p:cNvPr id="309" name="Shape 307"/>
           <p:cNvSpPr/>
           <p:nvPr/>
         </p:nvSpPr>
@@ -8665,7 +9441,7 @@
       </p:sp>
       <p:sp>
         <p:nvSpPr>
-          <p:cNvPr id="302" name="Shape 292"/>
+          <p:cNvPr id="310" name="Shape 308"/>
           <p:cNvSpPr/>
           <p:nvPr/>
         </p:nvSpPr>
@@ -8688,7 +9464,7 @@
       </p:sp>
       <p:sp>
         <p:nvSpPr>
-          <p:cNvPr id="303" name="Shape 293"/>
+          <p:cNvPr id="311" name="Shape 309"/>
           <p:cNvSpPr/>
           <p:nvPr/>
         </p:nvSpPr>
@@ -8711,7 +9487,7 @@
       </p:sp>
       <p:sp>
         <p:nvSpPr>
-          <p:cNvPr id="304" name="Shape 294"/>
+          <p:cNvPr id="312" name="Shape 310"/>
           <p:cNvSpPr/>
           <p:nvPr/>
         </p:nvSpPr>
@@ -8734,7 +9510,7 @@
       </p:sp>
       <p:sp>
         <p:nvSpPr>
-          <p:cNvPr id="305" name="Shape 295"/>
+          <p:cNvPr id="313" name="Shape 311"/>
           <p:cNvSpPr/>
           <p:nvPr/>
         </p:nvSpPr>
@@ -8757,7 +9533,7 @@
       </p:sp>
       <p:sp>
         <p:nvSpPr>
-          <p:cNvPr id="306" name="Shape 296"/>
+          <p:cNvPr id="314" name="Shape 312"/>
           <p:cNvSpPr/>
           <p:nvPr/>
         </p:nvSpPr>
@@ -8780,7 +9556,7 @@
       </p:sp>
       <p:sp>
         <p:nvSpPr>
-          <p:cNvPr id="307" name="Shape 297"/>
+          <p:cNvPr id="315" name="Shape 313"/>
           <p:cNvSpPr/>
           <p:nvPr/>
         </p:nvSpPr>
@@ -8803,7 +9579,7 @@
       </p:sp>
       <p:sp>
         <p:nvSpPr>
-          <p:cNvPr id="308" name="Shape 298"/>
+          <p:cNvPr id="316" name="Shape 314"/>
           <p:cNvSpPr/>
           <p:nvPr/>
         </p:nvSpPr>
@@ -8826,7 +9602,7 @@
       </p:sp>
       <p:sp>
         <p:nvSpPr>
-          <p:cNvPr id="309" name="Shape 299"/>
+          <p:cNvPr id="317" name="Shape 315"/>
           <p:cNvSpPr/>
           <p:nvPr/>
         </p:nvSpPr>
@@ -8849,7 +9625,7 @@
       </p:sp>
       <p:sp>
         <p:nvSpPr>
-          <p:cNvPr id="310" name="Shape 300"/>
+          <p:cNvPr id="318" name="Shape 316"/>
           <p:cNvSpPr/>
           <p:nvPr/>
         </p:nvSpPr>
@@ -8872,7 +9648,7 @@
       </p:sp>
       <p:sp>
         <p:nvSpPr>
-          <p:cNvPr id="311" name="Shape 301"/>
+          <p:cNvPr id="319" name="Shape 317"/>
           <p:cNvSpPr/>
           <p:nvPr/>
         </p:nvSpPr>
@@ -8895,7 +9671,7 @@
       </p:sp>
       <p:sp>
         <p:nvSpPr>
-          <p:cNvPr id="312" name="Shape 302"/>
+          <p:cNvPr id="320" name="Shape 318"/>
           <p:cNvSpPr/>
           <p:nvPr/>
         </p:nvSpPr>
@@ -8918,7 +9694,7 @@
       </p:sp>
       <p:sp>
         <p:nvSpPr>
-          <p:cNvPr id="313" name="Shape 303"/>
+          <p:cNvPr id="321" name="Shape 319"/>
           <p:cNvSpPr/>
           <p:nvPr/>
         </p:nvSpPr>
@@ -8941,7 +9717,7 @@
       </p:sp>
       <p:sp>
         <p:nvSpPr>
-          <p:cNvPr id="314" name="Shape 304"/>
+          <p:cNvPr id="322" name="Shape 320"/>
           <p:cNvSpPr/>
           <p:nvPr/>
         </p:nvSpPr>
@@ -8964,7 +9740,7 @@
       </p:sp>
       <p:sp>
         <p:nvSpPr>
-          <p:cNvPr id="315" name="Shape 305"/>
+          <p:cNvPr id="323" name="Shape 321"/>
           <p:cNvSpPr/>
           <p:nvPr/>
         </p:nvSpPr>
@@ -8987,7 +9763,7 @@
       </p:sp>
       <p:sp>
         <p:nvSpPr>
-          <p:cNvPr id="316" name="Shape 306"/>
+          <p:cNvPr id="324" name="Shape 322"/>
           <p:cNvSpPr/>
           <p:nvPr/>
         </p:nvSpPr>
@@ -9010,7 +9786,7 @@
       </p:sp>
       <p:sp>
         <p:nvSpPr>
-          <p:cNvPr id="317" name="Shape 307"/>
+          <p:cNvPr id="325" name="Shape 323"/>
           <p:cNvSpPr/>
           <p:nvPr/>
         </p:nvSpPr>
@@ -9033,7 +9809,7 @@
       </p:sp>
       <p:sp>
         <p:nvSpPr>
-          <p:cNvPr id="318" name="Shape 308"/>
+          <p:cNvPr id="326" name="Shape 324"/>
           <p:cNvSpPr/>
           <p:nvPr/>
         </p:nvSpPr>
@@ -9056,7 +9832,7 @@
       </p:sp>
       <p:sp>
         <p:nvSpPr>
-          <p:cNvPr id="319" name="Shape 309"/>
+          <p:cNvPr id="327" name="Shape 325"/>
           <p:cNvSpPr/>
           <p:nvPr/>
         </p:nvSpPr>
@@ -9079,7 +9855,7 @@
       </p:sp>
       <p:sp>
         <p:nvSpPr>
-          <p:cNvPr id="320" name="Shape 310"/>
+          <p:cNvPr id="328" name="Shape 326"/>
           <p:cNvSpPr/>
           <p:nvPr/>
         </p:nvSpPr>
@@ -9099,7 +9875,7 @@
       </p:sp>
       <p:sp>
         <p:nvSpPr>
-          <p:cNvPr id="321" name="Shape 311"/>
+          <p:cNvPr id="329" name="Shape 327"/>
           <p:cNvSpPr/>
           <p:nvPr/>
         </p:nvSpPr>
@@ -9119,7 +9895,7 @@
       </p:sp>
       <p:sp>
         <p:nvSpPr>
-          <p:cNvPr id="322" name="Shape 312"/>
+          <p:cNvPr id="330" name="Shape 328"/>
           <p:cNvSpPr/>
           <p:nvPr/>
         </p:nvSpPr>
@@ -9139,7 +9915,7 @@
       </p:sp>
       <p:sp>
         <p:nvSpPr>
-          <p:cNvPr id="323" name="Shape 313"/>
+          <p:cNvPr id="331" name="Shape 329"/>
           <p:cNvSpPr/>
           <p:nvPr/>
         </p:nvSpPr>
@@ -9159,7 +9935,7 @@
       </p:sp>
       <p:sp>
         <p:nvSpPr>
-          <p:cNvPr id="324" name="Shape 314"/>
+          <p:cNvPr id="332" name="Shape 330"/>
           <p:cNvSpPr/>
           <p:nvPr/>
         </p:nvSpPr>
@@ -9179,7 +9955,7 @@
       </p:sp>
       <p:sp>
         <p:nvSpPr>
-          <p:cNvPr id="325" name="Shape 315"/>
+          <p:cNvPr id="333" name="Shape 331"/>
           <p:cNvSpPr/>
           <p:nvPr/>
         </p:nvSpPr>
@@ -9199,7 +9975,7 @@
       </p:sp>
       <p:sp>
         <p:nvSpPr>
-          <p:cNvPr id="326" name="Shape 316"/>
+          <p:cNvPr id="334" name="Shape 332"/>
           <p:cNvSpPr/>
           <p:nvPr/>
         </p:nvSpPr>
@@ -9219,7 +9995,7 @@
       </p:sp>
       <p:sp>
         <p:nvSpPr>
-          <p:cNvPr id="327" name="Shape 317"/>
+          <p:cNvPr id="335" name="Shape 333"/>
           <p:cNvSpPr/>
           <p:nvPr/>
         </p:nvSpPr>
@@ -9239,7 +10015,7 @@
       </p:sp>
       <p:sp>
         <p:nvSpPr>
-          <p:cNvPr id="328" name="Shape 318"/>
+          <p:cNvPr id="336" name="Shape 334"/>
           <p:cNvSpPr/>
           <p:nvPr/>
         </p:nvSpPr>
@@ -9259,7 +10035,7 @@
       </p:sp>
       <p:sp>
         <p:nvSpPr>
-          <p:cNvPr id="329" name="Shape 319"/>
+          <p:cNvPr id="337" name="Shape 335"/>
           <p:cNvSpPr/>
           <p:nvPr/>
         </p:nvSpPr>
@@ -9279,7 +10055,7 @@
       </p:sp>
       <p:sp>
         <p:nvSpPr>
-          <p:cNvPr id="330" name="Shape 320"/>
+          <p:cNvPr id="338" name="Shape 336"/>
           <p:cNvSpPr/>
           <p:nvPr/>
         </p:nvSpPr>
@@ -9299,7 +10075,7 @@
       </p:sp>
       <p:sp>
         <p:nvSpPr>
-          <p:cNvPr id="331" name="Shape 321"/>
+          <p:cNvPr id="339" name="Shape 337"/>
           <p:cNvSpPr/>
           <p:nvPr/>
         </p:nvSpPr>
@@ -9319,7 +10095,7 @@
       </p:sp>
       <p:sp>
         <p:nvSpPr>
-          <p:cNvPr id="332" name="Text 322"/>
+          <p:cNvPr id="340" name="Text 338"/>
           <p:cNvSpPr/>
           <p:nvPr/>
         </p:nvSpPr>
@@ -9358,7 +10134,7 @@
       </p:sp>
       <p:sp>
         <p:nvSpPr>
-          <p:cNvPr id="333" name="Shape 323"/>
+          <p:cNvPr id="341" name="Shape 339"/>
           <p:cNvSpPr/>
           <p:nvPr/>
         </p:nvSpPr>
@@ -9385,7 +10161,7 @@
       </p:sp>
       <p:sp>
         <p:nvSpPr>
-          <p:cNvPr id="334" name="Shape 324"/>
+          <p:cNvPr id="342" name="Shape 340"/>
           <p:cNvSpPr/>
           <p:nvPr/>
         </p:nvSpPr>
@@ -9408,7 +10184,7 @@
       </p:sp>
       <p:sp>
         <p:nvSpPr>
-          <p:cNvPr id="335" name="Shape 325"/>
+          <p:cNvPr id="343" name="Shape 341"/>
           <p:cNvSpPr/>
           <p:nvPr/>
         </p:nvSpPr>
@@ -9431,7 +10207,7 @@
       </p:sp>
       <p:sp>
         <p:nvSpPr>
-          <p:cNvPr id="336" name="Shape 326"/>
+          <p:cNvPr id="344" name="Shape 342"/>
           <p:cNvSpPr/>
           <p:nvPr/>
         </p:nvSpPr>
@@ -9454,7 +10230,7 @@
       </p:sp>
       <p:sp>
         <p:nvSpPr>
-          <p:cNvPr id="337" name="Shape 327"/>
+          <p:cNvPr id="345" name="Shape 343"/>
           <p:cNvSpPr/>
           <p:nvPr/>
         </p:nvSpPr>
@@ -9477,7 +10253,7 @@
       </p:sp>
       <p:sp>
         <p:nvSpPr>
-          <p:cNvPr id="338" name="Shape 328"/>
+          <p:cNvPr id="346" name="Shape 344"/>
           <p:cNvSpPr/>
           <p:nvPr/>
         </p:nvSpPr>
@@ -9500,7 +10276,7 @@
       </p:sp>
       <p:sp>
         <p:nvSpPr>
-          <p:cNvPr id="339" name="Shape 329"/>
+          <p:cNvPr id="347" name="Shape 345"/>
           <p:cNvSpPr/>
           <p:nvPr/>
         </p:nvSpPr>
@@ -9523,7 +10299,7 @@
       </p:sp>
       <p:sp>
         <p:nvSpPr>
-          <p:cNvPr id="340" name="Shape 330"/>
+          <p:cNvPr id="348" name="Shape 346"/>
           <p:cNvSpPr/>
           <p:nvPr/>
         </p:nvSpPr>
@@ -9546,7 +10322,7 @@
       </p:sp>
       <p:sp>
         <p:nvSpPr>
-          <p:cNvPr id="341" name="Shape 331"/>
+          <p:cNvPr id="349" name="Shape 347"/>
           <p:cNvSpPr/>
           <p:nvPr/>
         </p:nvSpPr>
@@ -9569,7 +10345,7 @@
       </p:sp>
       <p:sp>
         <p:nvSpPr>
-          <p:cNvPr id="342" name="Shape 332"/>
+          <p:cNvPr id="350" name="Shape 348"/>
           <p:cNvSpPr/>
           <p:nvPr/>
         </p:nvSpPr>
@@ -9592,7 +10368,7 @@
       </p:sp>
       <p:sp>
         <p:nvSpPr>
-          <p:cNvPr id="343" name="Shape 333"/>
+          <p:cNvPr id="351" name="Shape 349"/>
           <p:cNvSpPr/>
           <p:nvPr/>
         </p:nvSpPr>
@@ -9615,7 +10391,7 @@
       </p:sp>
       <p:sp>
         <p:nvSpPr>
-          <p:cNvPr id="344" name="Shape 334"/>
+          <p:cNvPr id="352" name="Shape 350"/>
           <p:cNvSpPr/>
           <p:nvPr/>
         </p:nvSpPr>
@@ -9638,7 +10414,7 @@
       </p:sp>
       <p:sp>
         <p:nvSpPr>
-          <p:cNvPr id="345" name="Shape 335"/>
+          <p:cNvPr id="353" name="Shape 351"/>
           <p:cNvSpPr/>
           <p:nvPr/>
         </p:nvSpPr>
@@ -9661,7 +10437,7 @@
       </p:sp>
       <p:sp>
         <p:nvSpPr>
-          <p:cNvPr id="346" name="Shape 336"/>
+          <p:cNvPr id="354" name="Shape 352"/>
           <p:cNvSpPr/>
           <p:nvPr/>
         </p:nvSpPr>
@@ -9684,7 +10460,7 @@
       </p:sp>
       <p:sp>
         <p:nvSpPr>
-          <p:cNvPr id="347" name="Shape 337"/>
+          <p:cNvPr id="355" name="Shape 353"/>
           <p:cNvSpPr/>
           <p:nvPr/>
         </p:nvSpPr>
@@ -9707,7 +10483,7 @@
       </p:sp>
       <p:sp>
         <p:nvSpPr>
-          <p:cNvPr id="348" name="Shape 338"/>
+          <p:cNvPr id="356" name="Shape 354"/>
           <p:cNvSpPr/>
           <p:nvPr/>
         </p:nvSpPr>
@@ -9730,7 +10506,7 @@
       </p:sp>
       <p:sp>
         <p:nvSpPr>
-          <p:cNvPr id="349" name="Shape 339"/>
+          <p:cNvPr id="357" name="Shape 355"/>
           <p:cNvSpPr/>
           <p:nvPr/>
         </p:nvSpPr>
@@ -9753,7 +10529,7 @@
       </p:sp>
       <p:sp>
         <p:nvSpPr>
-          <p:cNvPr id="350" name="Shape 340"/>
+          <p:cNvPr id="358" name="Shape 356"/>
           <p:cNvSpPr/>
           <p:nvPr/>
         </p:nvSpPr>
@@ -9776,7 +10552,7 @@
       </p:sp>
       <p:sp>
         <p:nvSpPr>
-          <p:cNvPr id="351" name="Shape 341"/>
+          <p:cNvPr id="359" name="Shape 357"/>
           <p:cNvSpPr/>
           <p:nvPr/>
         </p:nvSpPr>
@@ -9799,7 +10575,7 @@
       </p:sp>
       <p:sp>
         <p:nvSpPr>
-          <p:cNvPr id="352" name="Shape 342"/>
+          <p:cNvPr id="360" name="Shape 358"/>
           <p:cNvSpPr/>
           <p:nvPr/>
         </p:nvSpPr>
@@ -9822,7 +10598,7 @@
       </p:sp>
       <p:sp>
         <p:nvSpPr>
-          <p:cNvPr id="353" name="Shape 343"/>
+          <p:cNvPr id="361" name="Shape 359"/>
           <p:cNvSpPr/>
           <p:nvPr/>
         </p:nvSpPr>
@@ -9845,7 +10621,7 @@
       </p:sp>
       <p:sp>
         <p:nvSpPr>
-          <p:cNvPr id="354" name="Shape 344"/>
+          <p:cNvPr id="362" name="Shape 360"/>
           <p:cNvSpPr/>
           <p:nvPr/>
         </p:nvSpPr>
@@ -9868,7 +10644,7 @@
       </p:sp>
       <p:sp>
         <p:nvSpPr>
-          <p:cNvPr id="355" name="Shape 345"/>
+          <p:cNvPr id="363" name="Shape 361"/>
           <p:cNvSpPr/>
           <p:nvPr/>
         </p:nvSpPr>
@@ -9891,7 +10667,7 @@
       </p:sp>
       <p:sp>
         <p:nvSpPr>
-          <p:cNvPr id="356" name="Shape 346"/>
+          <p:cNvPr id="364" name="Shape 362"/>
           <p:cNvSpPr/>
           <p:nvPr/>
         </p:nvSpPr>
@@ -9914,7 +10690,7 @@
       </p:sp>
       <p:sp>
         <p:nvSpPr>
-          <p:cNvPr id="357" name="Shape 347"/>
+          <p:cNvPr id="365" name="Shape 363"/>
           <p:cNvSpPr/>
           <p:nvPr/>
         </p:nvSpPr>
@@ -9937,7 +10713,7 @@
       </p:sp>
       <p:sp>
         <p:nvSpPr>
-          <p:cNvPr id="358" name="Shape 348"/>
+          <p:cNvPr id="366" name="Shape 364"/>
           <p:cNvSpPr/>
           <p:nvPr/>
         </p:nvSpPr>
@@ -9960,7 +10736,7 @@
       </p:sp>
       <p:sp>
         <p:nvSpPr>
-          <p:cNvPr id="359" name="Shape 349"/>
+          <p:cNvPr id="367" name="Shape 365"/>
           <p:cNvSpPr/>
           <p:nvPr/>
         </p:nvSpPr>
@@ -9983,7 +10759,7 @@
       </p:sp>
       <p:sp>
         <p:nvSpPr>
-          <p:cNvPr id="360" name="Shape 350"/>
+          <p:cNvPr id="368" name="Shape 366"/>
           <p:cNvSpPr/>
           <p:nvPr/>
         </p:nvSpPr>
@@ -10006,7 +10782,7 @@
       </p:sp>
       <p:sp>
         <p:nvSpPr>
-          <p:cNvPr id="361" name="Shape 351"/>
+          <p:cNvPr id="369" name="Shape 367"/>
           <p:cNvSpPr/>
           <p:nvPr/>
         </p:nvSpPr>
@@ -10029,7 +10805,7 @@
       </p:sp>
       <p:sp>
         <p:nvSpPr>
-          <p:cNvPr id="362" name="Shape 352"/>
+          <p:cNvPr id="370" name="Shape 368"/>
           <p:cNvSpPr/>
           <p:nvPr/>
         </p:nvSpPr>
@@ -10052,7 +10828,7 @@
       </p:sp>
       <p:sp>
         <p:nvSpPr>
-          <p:cNvPr id="363" name="Shape 353"/>
+          <p:cNvPr id="371" name="Shape 369"/>
           <p:cNvSpPr/>
           <p:nvPr/>
         </p:nvSpPr>
@@ -10075,7 +10851,7 @@
       </p:sp>
       <p:sp>
         <p:nvSpPr>
-          <p:cNvPr id="364" name="Shape 354"/>
+          <p:cNvPr id="372" name="Shape 370"/>
           <p:cNvSpPr/>
           <p:nvPr/>
         </p:nvSpPr>
@@ -10098,7 +10874,7 @@
       </p:sp>
       <p:sp>
         <p:nvSpPr>
-          <p:cNvPr id="365" name="Shape 355"/>
+          <p:cNvPr id="373" name="Shape 371"/>
           <p:cNvSpPr/>
           <p:nvPr/>
         </p:nvSpPr>
@@ -10121,7 +10897,7 @@
       </p:sp>
       <p:sp>
         <p:nvSpPr>
-          <p:cNvPr id="366" name="Shape 356"/>
+          <p:cNvPr id="374" name="Shape 372"/>
           <p:cNvSpPr/>
           <p:nvPr/>
         </p:nvSpPr>
@@ -10141,7 +10917,7 @@
       </p:sp>
       <p:sp>
         <p:nvSpPr>
-          <p:cNvPr id="367" name="Shape 357"/>
+          <p:cNvPr id="375" name="Shape 373"/>
           <p:cNvSpPr/>
           <p:nvPr/>
         </p:nvSpPr>
@@ -10161,7 +10937,7 @@
       </p:sp>
       <p:sp>
         <p:nvSpPr>
-          <p:cNvPr id="368" name="Shape 358"/>
+          <p:cNvPr id="376" name="Shape 374"/>
           <p:cNvSpPr/>
           <p:nvPr/>
         </p:nvSpPr>
@@ -10181,7 +10957,7 @@
       </p:sp>
       <p:sp>
         <p:nvSpPr>
-          <p:cNvPr id="369" name="Shape 359"/>
+          <p:cNvPr id="377" name="Shape 375"/>
           <p:cNvSpPr/>
           <p:nvPr/>
         </p:nvSpPr>
@@ -10201,7 +10977,7 @@
       </p:sp>
       <p:sp>
         <p:nvSpPr>
-          <p:cNvPr id="370" name="Shape 360"/>
+          <p:cNvPr id="378" name="Shape 376"/>
           <p:cNvSpPr/>
           <p:nvPr/>
         </p:nvSpPr>
@@ -10221,7 +10997,7 @@
       </p:sp>
       <p:sp>
         <p:nvSpPr>
-          <p:cNvPr id="371" name="Shape 361"/>
+          <p:cNvPr id="379" name="Shape 377"/>
           <p:cNvSpPr/>
           <p:nvPr/>
         </p:nvSpPr>
@@ -10241,7 +11017,7 @@
       </p:sp>
       <p:sp>
         <p:nvSpPr>
-          <p:cNvPr id="372" name="Shape 362"/>
+          <p:cNvPr id="380" name="Shape 378"/>
           <p:cNvSpPr/>
           <p:nvPr/>
         </p:nvSpPr>
@@ -10261,7 +11037,7 @@
       </p:sp>
       <p:sp>
         <p:nvSpPr>
-          <p:cNvPr id="373" name="Shape 363"/>
+          <p:cNvPr id="381" name="Shape 379"/>
           <p:cNvSpPr/>
           <p:nvPr/>
         </p:nvSpPr>
@@ -10281,7 +11057,7 @@
       </p:sp>
       <p:sp>
         <p:nvSpPr>
-          <p:cNvPr id="374" name="Shape 364"/>
+          <p:cNvPr id="382" name="Shape 380"/>
           <p:cNvSpPr/>
           <p:nvPr/>
         </p:nvSpPr>
@@ -10301,7 +11077,7 @@
       </p:sp>
       <p:sp>
         <p:nvSpPr>
-          <p:cNvPr id="375" name="Shape 365"/>
+          <p:cNvPr id="383" name="Shape 381"/>
           <p:cNvSpPr/>
           <p:nvPr/>
         </p:nvSpPr>
@@ -10321,7 +11097,7 @@
       </p:sp>
       <p:sp>
         <p:nvSpPr>
-          <p:cNvPr id="376" name="Shape 366"/>
+          <p:cNvPr id="384" name="Shape 382"/>
           <p:cNvSpPr/>
           <p:nvPr/>
         </p:nvSpPr>
@@ -10341,7 +11117,7 @@
       </p:sp>
       <p:sp>
         <p:nvSpPr>
-          <p:cNvPr id="377" name="Shape 367"/>
+          <p:cNvPr id="385" name="Shape 383"/>
           <p:cNvSpPr/>
           <p:nvPr/>
         </p:nvSpPr>
@@ -10361,7 +11137,7 @@
       </p:sp>
       <p:sp>
         <p:nvSpPr>
-          <p:cNvPr id="378" name="Text 368"/>
+          <p:cNvPr id="386" name="Text 384"/>
           <p:cNvSpPr/>
           <p:nvPr/>
         </p:nvSpPr>
@@ -10400,7 +11176,7 @@
       </p:sp>
       <p:sp>
         <p:nvSpPr>
-          <p:cNvPr id="379" name="Shape 369"/>
+          <p:cNvPr id="387" name="Shape 385"/>
           <p:cNvSpPr/>
           <p:nvPr/>
         </p:nvSpPr>
@@ -10427,7 +11203,7 @@
       </p:sp>
       <p:sp>
         <p:nvSpPr>
-          <p:cNvPr id="380" name="Shape 370"/>
+          <p:cNvPr id="388" name="Shape 386"/>
           <p:cNvSpPr/>
           <p:nvPr/>
         </p:nvSpPr>
@@ -10450,7 +11226,7 @@
       </p:sp>
       <p:sp>
         <p:nvSpPr>
-          <p:cNvPr id="381" name="Shape 371"/>
+          <p:cNvPr id="389" name="Shape 387"/>
           <p:cNvSpPr/>
           <p:nvPr/>
         </p:nvSpPr>
@@ -10473,7 +11249,7 @@
       </p:sp>
       <p:sp>
         <p:nvSpPr>
-          <p:cNvPr id="382" name="Shape 372"/>
+          <p:cNvPr id="390" name="Shape 388"/>
           <p:cNvSpPr/>
           <p:nvPr/>
         </p:nvSpPr>
@@ -10496,7 +11272,7 @@
       </p:sp>
       <p:sp>
         <p:nvSpPr>
-          <p:cNvPr id="383" name="Shape 373"/>
+          <p:cNvPr id="391" name="Shape 389"/>
           <p:cNvSpPr/>
           <p:nvPr/>
         </p:nvSpPr>
@@ -10519,7 +11295,7 @@
       </p:sp>
       <p:sp>
         <p:nvSpPr>
-          <p:cNvPr id="384" name="Shape 374"/>
+          <p:cNvPr id="392" name="Shape 390"/>
           <p:cNvSpPr/>
           <p:nvPr/>
         </p:nvSpPr>
@@ -10542,7 +11318,7 @@
       </p:sp>
       <p:sp>
         <p:nvSpPr>
-          <p:cNvPr id="385" name="Shape 375"/>
+          <p:cNvPr id="393" name="Shape 391"/>
           <p:cNvSpPr/>
           <p:nvPr/>
         </p:nvSpPr>
@@ -10565,7 +11341,7 @@
       </p:sp>
       <p:sp>
         <p:nvSpPr>
-          <p:cNvPr id="386" name="Shape 376"/>
+          <p:cNvPr id="394" name="Shape 392"/>
           <p:cNvSpPr/>
           <p:nvPr/>
         </p:nvSpPr>
@@ -10588,7 +11364,7 @@
       </p:sp>
       <p:sp>
         <p:nvSpPr>
-          <p:cNvPr id="387" name="Shape 377"/>
+          <p:cNvPr id="395" name="Shape 393"/>
           <p:cNvSpPr/>
           <p:nvPr/>
         </p:nvSpPr>
@@ -10611,7 +11387,7 @@
       </p:sp>
       <p:sp>
         <p:nvSpPr>
-          <p:cNvPr id="388" name="Shape 378"/>
+          <p:cNvPr id="396" name="Shape 394"/>
           <p:cNvSpPr/>
           <p:nvPr/>
         </p:nvSpPr>
@@ -10634,7 +11410,7 @@
       </p:sp>
       <p:sp>
         <p:nvSpPr>
-          <p:cNvPr id="389" name="Shape 379"/>
+          <p:cNvPr id="397" name="Shape 395"/>
           <p:cNvSpPr/>
           <p:nvPr/>
         </p:nvSpPr>
@@ -10657,7 +11433,7 @@
       </p:sp>
       <p:sp>
         <p:nvSpPr>
-          <p:cNvPr id="390" name="Shape 380"/>
+          <p:cNvPr id="398" name="Shape 396"/>
           <p:cNvSpPr/>
           <p:nvPr/>
         </p:nvSpPr>
@@ -10680,7 +11456,7 @@
       </p:sp>
       <p:sp>
         <p:nvSpPr>
-          <p:cNvPr id="391" name="Shape 381"/>
+          <p:cNvPr id="399" name="Shape 397"/>
           <p:cNvSpPr/>
           <p:nvPr/>
         </p:nvSpPr>
@@ -10703,7 +11479,7 @@
       </p:sp>
       <p:sp>
         <p:nvSpPr>
-          <p:cNvPr id="392" name="Shape 382"/>
+          <p:cNvPr id="400" name="Shape 398"/>
           <p:cNvSpPr/>
           <p:nvPr/>
         </p:nvSpPr>
@@ -10726,7 +11502,7 @@
       </p:sp>
       <p:sp>
         <p:nvSpPr>
-          <p:cNvPr id="393" name="Shape 383"/>
+          <p:cNvPr id="401" name="Shape 399"/>
           <p:cNvSpPr/>
           <p:nvPr/>
         </p:nvSpPr>
@@ -10749,7 +11525,7 @@
       </p:sp>
       <p:sp>
         <p:nvSpPr>
-          <p:cNvPr id="394" name="Shape 384"/>
+          <p:cNvPr id="402" name="Shape 400"/>
           <p:cNvSpPr/>
           <p:nvPr/>
         </p:nvSpPr>
@@ -10772,7 +11548,7 @@
       </p:sp>
       <p:sp>
         <p:nvSpPr>
-          <p:cNvPr id="395" name="Shape 385"/>
+          <p:cNvPr id="403" name="Shape 401"/>
           <p:cNvSpPr/>
           <p:nvPr/>
         </p:nvSpPr>
@@ -10795,7 +11571,7 @@
       </p:sp>
       <p:sp>
         <p:nvSpPr>
-          <p:cNvPr id="396" name="Shape 386"/>
+          <p:cNvPr id="404" name="Shape 402"/>
           <p:cNvSpPr/>
           <p:nvPr/>
         </p:nvSpPr>
@@ -10818,7 +11594,7 @@
       </p:sp>
       <p:sp>
         <p:nvSpPr>
-          <p:cNvPr id="397" name="Shape 387"/>
+          <p:cNvPr id="405" name="Shape 403"/>
           <p:cNvSpPr/>
           <p:nvPr/>
         </p:nvSpPr>
@@ -10841,7 +11617,7 @@
       </p:sp>
       <p:sp>
         <p:nvSpPr>
-          <p:cNvPr id="398" name="Shape 388"/>
+          <p:cNvPr id="406" name="Shape 404"/>
           <p:cNvSpPr/>
           <p:nvPr/>
         </p:nvSpPr>
@@ -10864,7 +11640,7 @@
       </p:sp>
       <p:sp>
         <p:nvSpPr>
-          <p:cNvPr id="399" name="Shape 389"/>
+          <p:cNvPr id="407" name="Shape 405"/>
           <p:cNvSpPr/>
           <p:nvPr/>
         </p:nvSpPr>
@@ -10887,7 +11663,7 @@
       </p:sp>
       <p:sp>
         <p:nvSpPr>
-          <p:cNvPr id="400" name="Shape 390"/>
+          <p:cNvPr id="408" name="Shape 406"/>
           <p:cNvSpPr/>
           <p:nvPr/>
         </p:nvSpPr>
@@ -10910,7 +11686,7 @@
       </p:sp>
       <p:sp>
         <p:nvSpPr>
-          <p:cNvPr id="401" name="Shape 391"/>
+          <p:cNvPr id="409" name="Shape 407"/>
           <p:cNvSpPr/>
           <p:nvPr/>
         </p:nvSpPr>
@@ -10933,7 +11709,7 @@
       </p:sp>
       <p:sp>
         <p:nvSpPr>
-          <p:cNvPr id="402" name="Shape 392"/>
+          <p:cNvPr id="410" name="Shape 408"/>
           <p:cNvSpPr/>
           <p:nvPr/>
         </p:nvSpPr>
@@ -10956,7 +11732,7 @@
       </p:sp>
       <p:sp>
         <p:nvSpPr>
-          <p:cNvPr id="403" name="Shape 393"/>
+          <p:cNvPr id="411" name="Shape 409"/>
           <p:cNvSpPr/>
           <p:nvPr/>
         </p:nvSpPr>
@@ -10979,7 +11755,7 @@
       </p:sp>
       <p:sp>
         <p:nvSpPr>
-          <p:cNvPr id="404" name="Shape 394"/>
+          <p:cNvPr id="412" name="Shape 410"/>
           <p:cNvSpPr/>
           <p:nvPr/>
         </p:nvSpPr>
@@ -11002,7 +11778,7 @@
       </p:sp>
       <p:sp>
         <p:nvSpPr>
-          <p:cNvPr id="405" name="Shape 395"/>
+          <p:cNvPr id="413" name="Shape 411"/>
           <p:cNvSpPr/>
           <p:nvPr/>
         </p:nvSpPr>
@@ -11025,7 +11801,7 @@
       </p:sp>
       <p:sp>
         <p:nvSpPr>
-          <p:cNvPr id="406" name="Shape 396"/>
+          <p:cNvPr id="414" name="Shape 412"/>
           <p:cNvSpPr/>
           <p:nvPr/>
         </p:nvSpPr>
@@ -11048,7 +11824,7 @@
       </p:sp>
       <p:sp>
         <p:nvSpPr>
-          <p:cNvPr id="407" name="Shape 397"/>
+          <p:cNvPr id="415" name="Shape 413"/>
           <p:cNvSpPr/>
           <p:nvPr/>
         </p:nvSpPr>
@@ -11071,7 +11847,7 @@
       </p:sp>
       <p:sp>
         <p:nvSpPr>
-          <p:cNvPr id="408" name="Shape 398"/>
+          <p:cNvPr id="416" name="Shape 414"/>
           <p:cNvSpPr/>
           <p:nvPr/>
         </p:nvSpPr>
@@ -11094,7 +11870,7 @@
       </p:sp>
       <p:sp>
         <p:nvSpPr>
-          <p:cNvPr id="409" name="Shape 399"/>
+          <p:cNvPr id="417" name="Shape 415"/>
           <p:cNvSpPr/>
           <p:nvPr/>
         </p:nvSpPr>
@@ -11117,7 +11893,7 @@
       </p:sp>
       <p:sp>
         <p:nvSpPr>
-          <p:cNvPr id="410" name="Shape 400"/>
+          <p:cNvPr id="418" name="Shape 416"/>
           <p:cNvSpPr/>
           <p:nvPr/>
         </p:nvSpPr>
@@ -11140,7 +11916,7 @@
       </p:sp>
       <p:sp>
         <p:nvSpPr>
-          <p:cNvPr id="411" name="Shape 401"/>
+          <p:cNvPr id="419" name="Shape 417"/>
           <p:cNvSpPr/>
           <p:nvPr/>
         </p:nvSpPr>
@@ -11163,7 +11939,7 @@
       </p:sp>
       <p:sp>
         <p:nvSpPr>
-          <p:cNvPr id="412" name="Shape 402"/>
+          <p:cNvPr id="420" name="Shape 418"/>
           <p:cNvSpPr/>
           <p:nvPr/>
         </p:nvSpPr>
@@ -11183,7 +11959,7 @@
       </p:sp>
       <p:sp>
         <p:nvSpPr>
-          <p:cNvPr id="413" name="Shape 403"/>
+          <p:cNvPr id="421" name="Shape 419"/>
           <p:cNvSpPr/>
           <p:nvPr/>
         </p:nvSpPr>
@@ -11203,7 +11979,7 @@
       </p:sp>
       <p:sp>
         <p:nvSpPr>
-          <p:cNvPr id="414" name="Shape 404"/>
+          <p:cNvPr id="422" name="Shape 420"/>
           <p:cNvSpPr/>
           <p:nvPr/>
         </p:nvSpPr>
@@ -11223,7 +11999,7 @@
       </p:sp>
       <p:sp>
         <p:nvSpPr>
-          <p:cNvPr id="415" name="Shape 405"/>
+          <p:cNvPr id="423" name="Shape 421"/>
           <p:cNvSpPr/>
           <p:nvPr/>
         </p:nvSpPr>
@@ -11243,7 +12019,7 @@
       </p:sp>
       <p:sp>
         <p:nvSpPr>
-          <p:cNvPr id="416" name="Shape 406"/>
+          <p:cNvPr id="424" name="Shape 422"/>
           <p:cNvSpPr/>
           <p:nvPr/>
         </p:nvSpPr>
@@ -11263,7 +12039,7 @@
       </p:sp>
       <p:sp>
         <p:nvSpPr>
-          <p:cNvPr id="417" name="Shape 407"/>
+          <p:cNvPr id="425" name="Shape 423"/>
           <p:cNvSpPr/>
           <p:nvPr/>
         </p:nvSpPr>
@@ -11283,7 +12059,7 @@
       </p:sp>
       <p:sp>
         <p:nvSpPr>
-          <p:cNvPr id="418" name="Shape 408"/>
+          <p:cNvPr id="426" name="Shape 424"/>
           <p:cNvSpPr/>
           <p:nvPr/>
         </p:nvSpPr>
@@ -11303,7 +12079,7 @@
       </p:sp>
       <p:sp>
         <p:nvSpPr>
-          <p:cNvPr id="419" name="Shape 409"/>
+          <p:cNvPr id="427" name="Shape 425"/>
           <p:cNvSpPr/>
           <p:nvPr/>
         </p:nvSpPr>
@@ -11323,7 +12099,7 @@
       </p:sp>
       <p:sp>
         <p:nvSpPr>
-          <p:cNvPr id="420" name="Shape 410"/>
+          <p:cNvPr id="428" name="Shape 426"/>
           <p:cNvSpPr/>
           <p:nvPr/>
         </p:nvSpPr>
@@ -11343,7 +12119,7 @@
       </p:sp>
       <p:sp>
         <p:nvSpPr>
-          <p:cNvPr id="421" name="Shape 411"/>
+          <p:cNvPr id="429" name="Shape 427"/>
           <p:cNvSpPr/>
           <p:nvPr/>
         </p:nvSpPr>
@@ -11363,7 +12139,7 @@
       </p:sp>
       <p:sp>
         <p:nvSpPr>
-          <p:cNvPr id="422" name="Shape 412"/>
+          <p:cNvPr id="430" name="Shape 428"/>
           <p:cNvSpPr/>
           <p:nvPr/>
         </p:nvSpPr>
@@ -11383,7 +12159,7 @@
       </p:sp>
       <p:sp>
         <p:nvSpPr>
-          <p:cNvPr id="423" name="Shape 413"/>
+          <p:cNvPr id="431" name="Shape 429"/>
           <p:cNvSpPr/>
           <p:nvPr/>
         </p:nvSpPr>
@@ -11403,7 +12179,7 @@
       </p:sp>
       <p:sp>
         <p:nvSpPr>
-          <p:cNvPr id="424" name="Text 414"/>
+          <p:cNvPr id="432" name="Text 430"/>
           <p:cNvSpPr/>
           <p:nvPr/>
         </p:nvSpPr>
@@ -11442,7 +12218,7 @@
       </p:sp>
       <p:sp>
         <p:nvSpPr>
-          <p:cNvPr id="425" name="Shape 415"/>
+          <p:cNvPr id="433" name="Shape 431"/>
           <p:cNvSpPr/>
           <p:nvPr/>
         </p:nvSpPr>
@@ -11469,7 +12245,7 @@
       </p:sp>
       <p:sp>
         <p:nvSpPr>
-          <p:cNvPr id="426" name="Shape 416"/>
+          <p:cNvPr id="434" name="Shape 432"/>
           <p:cNvSpPr/>
           <p:nvPr/>
         </p:nvSpPr>
@@ -11492,7 +12268,7 @@
       </p:sp>
       <p:sp>
         <p:nvSpPr>
-          <p:cNvPr id="427" name="Shape 417"/>
+          <p:cNvPr id="435" name="Shape 433"/>
           <p:cNvSpPr/>
           <p:nvPr/>
         </p:nvSpPr>
@@ -11515,7 +12291,7 @@
       </p:sp>
       <p:sp>
         <p:nvSpPr>
-          <p:cNvPr id="428" name="Shape 418"/>
+          <p:cNvPr id="436" name="Shape 434"/>
           <p:cNvSpPr/>
           <p:nvPr/>
         </p:nvSpPr>
@@ -11538,7 +12314,7 @@
       </p:sp>
       <p:sp>
         <p:nvSpPr>
-          <p:cNvPr id="429" name="Shape 419"/>
+          <p:cNvPr id="437" name="Shape 435"/>
           <p:cNvSpPr/>
           <p:nvPr/>
         </p:nvSpPr>
@@ -11561,7 +12337,7 @@
       </p:sp>
       <p:sp>
         <p:nvSpPr>
-          <p:cNvPr id="430" name="Shape 420"/>
+          <p:cNvPr id="438" name="Shape 436"/>
           <p:cNvSpPr/>
           <p:nvPr/>
         </p:nvSpPr>
@@ -11584,7 +12360,7 @@
       </p:sp>
       <p:sp>
         <p:nvSpPr>
-          <p:cNvPr id="431" name="Shape 421"/>
+          <p:cNvPr id="439" name="Shape 437"/>
           <p:cNvSpPr/>
           <p:nvPr/>
         </p:nvSpPr>
@@ -11607,7 +12383,7 @@
       </p:sp>
       <p:sp>
         <p:nvSpPr>
-          <p:cNvPr id="432" name="Shape 422"/>
+          <p:cNvPr id="440" name="Shape 438"/>
           <p:cNvSpPr/>
           <p:nvPr/>
         </p:nvSpPr>
@@ -11630,7 +12406,7 @@
       </p:sp>
       <p:sp>
         <p:nvSpPr>
-          <p:cNvPr id="433" name="Shape 423"/>
+          <p:cNvPr id="441" name="Shape 439"/>
           <p:cNvSpPr/>
           <p:nvPr/>
         </p:nvSpPr>
@@ -11653,7 +12429,7 @@
       </p:sp>
       <p:sp>
         <p:nvSpPr>
-          <p:cNvPr id="434" name="Shape 424"/>
+          <p:cNvPr id="442" name="Shape 440"/>
           <p:cNvSpPr/>
           <p:nvPr/>
         </p:nvSpPr>
@@ -11676,7 +12452,7 @@
       </p:sp>
       <p:sp>
         <p:nvSpPr>
-          <p:cNvPr id="435" name="Shape 425"/>
+          <p:cNvPr id="443" name="Shape 441"/>
           <p:cNvSpPr/>
           <p:nvPr/>
         </p:nvSpPr>
@@ -11699,7 +12475,7 @@
       </p:sp>
       <p:sp>
         <p:nvSpPr>
-          <p:cNvPr id="436" name="Shape 426"/>
+          <p:cNvPr id="444" name="Shape 442"/>
           <p:cNvSpPr/>
           <p:nvPr/>
         </p:nvSpPr>
@@ -11722,7 +12498,7 @@
       </p:sp>
       <p:sp>
         <p:nvSpPr>
-          <p:cNvPr id="437" name="Shape 427"/>
+          <p:cNvPr id="445" name="Shape 443"/>
           <p:cNvSpPr/>
           <p:nvPr/>
         </p:nvSpPr>
@@ -11745,7 +12521,7 @@
       </p:sp>
       <p:sp>
         <p:nvSpPr>
-          <p:cNvPr id="438" name="Shape 428"/>
+          <p:cNvPr id="446" name="Shape 444"/>
           <p:cNvSpPr/>
           <p:nvPr/>
         </p:nvSpPr>
@@ -11768,7 +12544,7 @@
       </p:sp>
       <p:sp>
         <p:nvSpPr>
-          <p:cNvPr id="439" name="Shape 429"/>
+          <p:cNvPr id="447" name="Shape 445"/>
           <p:cNvSpPr/>
           <p:nvPr/>
         </p:nvSpPr>
@@ -11791,7 +12567,7 @@
       </p:sp>
       <p:sp>
         <p:nvSpPr>
-          <p:cNvPr id="440" name="Shape 430"/>
+          <p:cNvPr id="448" name="Shape 446"/>
           <p:cNvSpPr/>
           <p:nvPr/>
         </p:nvSpPr>
@@ -11814,7 +12590,7 @@
       </p:sp>
       <p:sp>
         <p:nvSpPr>
-          <p:cNvPr id="441" name="Shape 431"/>
+          <p:cNvPr id="449" name="Shape 447"/>
           <p:cNvSpPr/>
           <p:nvPr/>
         </p:nvSpPr>
@@ -11837,7 +12613,7 @@
       </p:sp>
       <p:sp>
         <p:nvSpPr>
-          <p:cNvPr id="442" name="Shape 432"/>
+          <p:cNvPr id="450" name="Shape 448"/>
           <p:cNvSpPr/>
           <p:nvPr/>
         </p:nvSpPr>
@@ -11860,7 +12636,7 @@
       </p:sp>
       <p:sp>
         <p:nvSpPr>
-          <p:cNvPr id="443" name="Shape 433"/>
+          <p:cNvPr id="451" name="Shape 449"/>
           <p:cNvSpPr/>
           <p:nvPr/>
         </p:nvSpPr>
@@ -11883,7 +12659,7 @@
       </p:sp>
       <p:sp>
         <p:nvSpPr>
-          <p:cNvPr id="444" name="Shape 434"/>
+          <p:cNvPr id="452" name="Shape 450"/>
           <p:cNvSpPr/>
           <p:nvPr/>
         </p:nvSpPr>
@@ -11906,7 +12682,7 @@
       </p:sp>
       <p:sp>
         <p:nvSpPr>
-          <p:cNvPr id="445" name="Shape 435"/>
+          <p:cNvPr id="453" name="Shape 451"/>
           <p:cNvSpPr/>
           <p:nvPr/>
         </p:nvSpPr>
@@ -11929,7 +12705,7 @@
       </p:sp>
       <p:sp>
         <p:nvSpPr>
-          <p:cNvPr id="446" name="Shape 436"/>
+          <p:cNvPr id="454" name="Shape 452"/>
           <p:cNvSpPr/>
           <p:nvPr/>
         </p:nvSpPr>
@@ -11952,7 +12728,7 @@
       </p:sp>
       <p:sp>
         <p:nvSpPr>
-          <p:cNvPr id="447" name="Shape 437"/>
+          <p:cNvPr id="455" name="Shape 453"/>
           <p:cNvSpPr/>
           <p:nvPr/>
         </p:nvSpPr>
@@ -11975,7 +12751,7 @@
       </p:sp>
       <p:sp>
         <p:nvSpPr>
-          <p:cNvPr id="448" name="Shape 438"/>
+          <p:cNvPr id="456" name="Shape 454"/>
           <p:cNvSpPr/>
           <p:nvPr/>
         </p:nvSpPr>
@@ -11998,7 +12774,7 @@
       </p:sp>
       <p:sp>
         <p:nvSpPr>
-          <p:cNvPr id="449" name="Shape 439"/>
+          <p:cNvPr id="457" name="Shape 455"/>
           <p:cNvSpPr/>
           <p:nvPr/>
         </p:nvSpPr>
@@ -12021,7 +12797,7 @@
       </p:sp>
       <p:sp>
         <p:nvSpPr>
-          <p:cNvPr id="450" name="Shape 440"/>
+          <p:cNvPr id="458" name="Shape 456"/>
           <p:cNvSpPr/>
           <p:nvPr/>
         </p:nvSpPr>
@@ -12044,7 +12820,7 @@
       </p:sp>
       <p:sp>
         <p:nvSpPr>
-          <p:cNvPr id="451" name="Shape 441"/>
+          <p:cNvPr id="459" name="Shape 457"/>
           <p:cNvSpPr/>
           <p:nvPr/>
         </p:nvSpPr>
@@ -12067,7 +12843,7 @@
       </p:sp>
       <p:sp>
         <p:nvSpPr>
-          <p:cNvPr id="452" name="Shape 442"/>
+          <p:cNvPr id="460" name="Shape 458"/>
           <p:cNvSpPr/>
           <p:nvPr/>
         </p:nvSpPr>
@@ -12090,7 +12866,7 @@
       </p:sp>
       <p:sp>
         <p:nvSpPr>
-          <p:cNvPr id="453" name="Shape 443"/>
+          <p:cNvPr id="461" name="Shape 459"/>
           <p:cNvSpPr/>
           <p:nvPr/>
         </p:nvSpPr>
@@ -12113,7 +12889,7 @@
       </p:sp>
       <p:sp>
         <p:nvSpPr>
-          <p:cNvPr id="454" name="Shape 444"/>
+          <p:cNvPr id="462" name="Shape 460"/>
           <p:cNvSpPr/>
           <p:nvPr/>
         </p:nvSpPr>
@@ -12136,7 +12912,7 @@
       </p:sp>
       <p:sp>
         <p:nvSpPr>
-          <p:cNvPr id="455" name="Shape 445"/>
+          <p:cNvPr id="463" name="Shape 461"/>
           <p:cNvSpPr/>
           <p:nvPr/>
         </p:nvSpPr>
@@ -12159,7 +12935,7 @@
       </p:sp>
       <p:sp>
         <p:nvSpPr>
-          <p:cNvPr id="456" name="Shape 446"/>
+          <p:cNvPr id="464" name="Shape 462"/>
           <p:cNvSpPr/>
           <p:nvPr/>
         </p:nvSpPr>
@@ -12182,7 +12958,7 @@
       </p:sp>
       <p:sp>
         <p:nvSpPr>
-          <p:cNvPr id="457" name="Shape 447"/>
+          <p:cNvPr id="465" name="Shape 463"/>
           <p:cNvSpPr/>
           <p:nvPr/>
         </p:nvSpPr>
@@ -12205,7 +12981,7 @@
       </p:sp>
       <p:sp>
         <p:nvSpPr>
-          <p:cNvPr id="458" name="Shape 448"/>
+          <p:cNvPr id="466" name="Shape 464"/>
           <p:cNvSpPr/>
           <p:nvPr/>
         </p:nvSpPr>
@@ -12225,7 +13001,7 @@
       </p:sp>
       <p:sp>
         <p:nvSpPr>
-          <p:cNvPr id="459" name="Shape 449"/>
+          <p:cNvPr id="467" name="Shape 465"/>
           <p:cNvSpPr/>
           <p:nvPr/>
         </p:nvSpPr>
@@ -12245,7 +13021,7 @@
       </p:sp>
       <p:sp>
         <p:nvSpPr>
-          <p:cNvPr id="460" name="Shape 450"/>
+          <p:cNvPr id="468" name="Shape 466"/>
           <p:cNvSpPr/>
           <p:nvPr/>
         </p:nvSpPr>
@@ -12265,7 +13041,7 @@
       </p:sp>
       <p:sp>
         <p:nvSpPr>
-          <p:cNvPr id="461" name="Shape 451"/>
+          <p:cNvPr id="469" name="Shape 467"/>
           <p:cNvSpPr/>
           <p:nvPr/>
         </p:nvSpPr>
@@ -12285,7 +13061,7 @@
       </p:sp>
       <p:sp>
         <p:nvSpPr>
-          <p:cNvPr id="462" name="Shape 452"/>
+          <p:cNvPr id="470" name="Shape 468"/>
           <p:cNvSpPr/>
           <p:nvPr/>
         </p:nvSpPr>
@@ -12305,7 +13081,7 @@
       </p:sp>
       <p:sp>
         <p:nvSpPr>
-          <p:cNvPr id="463" name="Shape 453"/>
+          <p:cNvPr id="471" name="Shape 469"/>
           <p:cNvSpPr/>
           <p:nvPr/>
         </p:nvSpPr>
@@ -12325,7 +13101,7 @@
       </p:sp>
       <p:sp>
         <p:nvSpPr>
-          <p:cNvPr id="464" name="Shape 454"/>
+          <p:cNvPr id="472" name="Shape 470"/>
           <p:cNvSpPr/>
           <p:nvPr/>
         </p:nvSpPr>
@@ -12345,7 +13121,7 @@
       </p:sp>
       <p:sp>
         <p:nvSpPr>
-          <p:cNvPr id="465" name="Shape 455"/>
+          <p:cNvPr id="473" name="Shape 471"/>
           <p:cNvSpPr/>
           <p:nvPr/>
         </p:nvSpPr>
@@ -12365,7 +13141,7 @@
       </p:sp>
       <p:sp>
         <p:nvSpPr>
-          <p:cNvPr id="466" name="Shape 456"/>
+          <p:cNvPr id="474" name="Shape 472"/>
           <p:cNvSpPr/>
           <p:nvPr/>
         </p:nvSpPr>
@@ -12385,7 +13161,7 @@
       </p:sp>
       <p:sp>
         <p:nvSpPr>
-          <p:cNvPr id="467" name="Shape 457"/>
+          <p:cNvPr id="475" name="Shape 473"/>
           <p:cNvSpPr/>
           <p:nvPr/>
         </p:nvSpPr>
@@ -12405,7 +13181,7 @@
       </p:sp>
       <p:sp>
         <p:nvSpPr>
-          <p:cNvPr id="468" name="Shape 458"/>
+          <p:cNvPr id="476" name="Shape 474"/>
           <p:cNvSpPr/>
           <p:nvPr/>
         </p:nvSpPr>
@@ -12425,7 +13201,7 @@
       </p:sp>
       <p:sp>
         <p:nvSpPr>
-          <p:cNvPr id="469" name="Shape 459"/>
+          <p:cNvPr id="477" name="Shape 475"/>
           <p:cNvSpPr/>
           <p:nvPr/>
         </p:nvSpPr>
@@ -12445,7 +13221,7 @@
       </p:sp>
       <p:sp>
         <p:nvSpPr>
-          <p:cNvPr id="470" name="Text 460"/>
+          <p:cNvPr id="478" name="Text 476"/>
           <p:cNvSpPr/>
           <p:nvPr/>
         </p:nvSpPr>
@@ -12484,7 +13260,7 @@
       </p:sp>
       <p:sp>
         <p:nvSpPr>
-          <p:cNvPr id="471" name="Shape 461"/>
+          <p:cNvPr id="479" name="Shape 477"/>
           <p:cNvSpPr/>
           <p:nvPr/>
         </p:nvSpPr>
@@ -12511,7 +13287,7 @@
       </p:sp>
       <p:sp>
         <p:nvSpPr>
-          <p:cNvPr id="472" name="Shape 462"/>
+          <p:cNvPr id="480" name="Shape 478"/>
           <p:cNvSpPr/>
           <p:nvPr/>
         </p:nvSpPr>
@@ -12534,7 +13310,7 @@
       </p:sp>
       <p:sp>
         <p:nvSpPr>
-          <p:cNvPr id="473" name="Shape 463"/>
+          <p:cNvPr id="481" name="Shape 479"/>
           <p:cNvSpPr/>
           <p:nvPr/>
         </p:nvSpPr>
@@ -12557,7 +13333,7 @@
       </p:sp>
       <p:sp>
         <p:nvSpPr>
-          <p:cNvPr id="474" name="Shape 464"/>
+          <p:cNvPr id="482" name="Shape 480"/>
           <p:cNvSpPr/>
           <p:nvPr/>
         </p:nvSpPr>
@@ -12580,7 +13356,7 @@
       </p:sp>
       <p:sp>
         <p:nvSpPr>
-          <p:cNvPr id="475" name="Shape 465"/>
+          <p:cNvPr id="483" name="Shape 481"/>
           <p:cNvSpPr/>
           <p:nvPr/>
         </p:nvSpPr>
@@ -12603,7 +13379,7 @@
       </p:sp>
       <p:sp>
         <p:nvSpPr>
-          <p:cNvPr id="476" name="Shape 466"/>
+          <p:cNvPr id="484" name="Shape 482"/>
           <p:cNvSpPr/>
           <p:nvPr/>
         </p:nvSpPr>
@@ -12626,7 +13402,7 @@
       </p:sp>
       <p:sp>
         <p:nvSpPr>
-          <p:cNvPr id="477" name="Shape 467"/>
+          <p:cNvPr id="485" name="Shape 483"/>
           <p:cNvSpPr/>
           <p:nvPr/>
         </p:nvSpPr>
@@ -12649,7 +13425,7 @@
       </p:sp>
       <p:sp>
         <p:nvSpPr>
-          <p:cNvPr id="478" name="Shape 468"/>
+          <p:cNvPr id="486" name="Shape 484"/>
           <p:cNvSpPr/>
           <p:nvPr/>
         </p:nvSpPr>
@@ -12672,7 +13448,7 @@
       </p:sp>
       <p:sp>
         <p:nvSpPr>
-          <p:cNvPr id="479" name="Shape 469"/>
+          <p:cNvPr id="487" name="Shape 485"/>
           <p:cNvSpPr/>
           <p:nvPr/>
         </p:nvSpPr>
@@ -12695,7 +13471,7 @@
       </p:sp>
       <p:sp>
         <p:nvSpPr>
-          <p:cNvPr id="480" name="Shape 470"/>
+          <p:cNvPr id="488" name="Shape 486"/>
           <p:cNvSpPr/>
           <p:nvPr/>
         </p:nvSpPr>
@@ -12718,7 +13494,7 @@
       </p:sp>
       <p:sp>
         <p:nvSpPr>
-          <p:cNvPr id="481" name="Shape 471"/>
+          <p:cNvPr id="489" name="Shape 487"/>
           <p:cNvSpPr/>
           <p:nvPr/>
         </p:nvSpPr>
@@ -12741,7 +13517,7 @@
       </p:sp>
       <p:sp>
         <p:nvSpPr>
-          <p:cNvPr id="482" name="Shape 472"/>
+          <p:cNvPr id="490" name="Shape 488"/>
           <p:cNvSpPr/>
           <p:nvPr/>
         </p:nvSpPr>
@@ -12764,7 +13540,7 @@
       </p:sp>
       <p:sp>
         <p:nvSpPr>
-          <p:cNvPr id="483" name="Shape 473"/>
+          <p:cNvPr id="491" name="Shape 489"/>
           <p:cNvSpPr/>
           <p:nvPr/>
         </p:nvSpPr>
@@ -12787,7 +13563,7 @@
       </p:sp>
       <p:sp>
         <p:nvSpPr>
-          <p:cNvPr id="484" name="Shape 474"/>
+          <p:cNvPr id="492" name="Shape 490"/>
           <p:cNvSpPr/>
           <p:nvPr/>
         </p:nvSpPr>
@@ -12810,7 +13586,7 @@
       </p:sp>
       <p:sp>
         <p:nvSpPr>
-          <p:cNvPr id="485" name="Shape 475"/>
+          <p:cNvPr id="493" name="Shape 491"/>
           <p:cNvSpPr/>
           <p:nvPr/>
         </p:nvSpPr>
@@ -12833,7 +13609,7 @@
       </p:sp>
       <p:sp>
         <p:nvSpPr>
-          <p:cNvPr id="486" name="Shape 476"/>
+          <p:cNvPr id="494" name="Shape 492"/>
           <p:cNvSpPr/>
           <p:nvPr/>
         </p:nvSpPr>
@@ -12856,7 +13632,7 @@
       </p:sp>
       <p:sp>
         <p:nvSpPr>
-          <p:cNvPr id="487" name="Shape 477"/>
+          <p:cNvPr id="495" name="Shape 493"/>
           <p:cNvSpPr/>
           <p:nvPr/>
         </p:nvSpPr>
@@ -12879,7 +13655,7 @@
       </p:sp>
       <p:sp>
         <p:nvSpPr>
-          <p:cNvPr id="488" name="Shape 478"/>
+          <p:cNvPr id="496" name="Shape 494"/>
           <p:cNvSpPr/>
           <p:nvPr/>
         </p:nvSpPr>
@@ -12902,7 +13678,7 @@
       </p:sp>
       <p:sp>
         <p:nvSpPr>
-          <p:cNvPr id="489" name="Shape 479"/>
+          <p:cNvPr id="497" name="Shape 495"/>
           <p:cNvSpPr/>
           <p:nvPr/>
         </p:nvSpPr>
@@ -12925,7 +13701,7 @@
       </p:sp>
       <p:sp>
         <p:nvSpPr>
-          <p:cNvPr id="490" name="Shape 480"/>
+          <p:cNvPr id="498" name="Shape 496"/>
           <p:cNvSpPr/>
           <p:nvPr/>
         </p:nvSpPr>
@@ -12948,7 +13724,7 @@
       </p:sp>
       <p:sp>
         <p:nvSpPr>
-          <p:cNvPr id="491" name="Shape 481"/>
+          <p:cNvPr id="499" name="Shape 497"/>
           <p:cNvSpPr/>
           <p:nvPr/>
         </p:nvSpPr>
@@ -12971,7 +13747,7 @@
       </p:sp>
       <p:sp>
         <p:nvSpPr>
-          <p:cNvPr id="492" name="Shape 482"/>
+          <p:cNvPr id="500" name="Shape 498"/>
           <p:cNvSpPr/>
           <p:nvPr/>
         </p:nvSpPr>
@@ -12994,7 +13770,7 @@
       </p:sp>
       <p:sp>
         <p:nvSpPr>
-          <p:cNvPr id="493" name="Shape 483"/>
+          <p:cNvPr id="501" name="Shape 499"/>
           <p:cNvSpPr/>
           <p:nvPr/>
         </p:nvSpPr>
@@ -13017,7 +13793,7 @@
       </p:sp>
       <p:sp>
         <p:nvSpPr>
-          <p:cNvPr id="494" name="Shape 484"/>
+          <p:cNvPr id="502" name="Shape 500"/>
           <p:cNvSpPr/>
           <p:nvPr/>
         </p:nvSpPr>
@@ -13040,7 +13816,7 @@
       </p:sp>
       <p:sp>
         <p:nvSpPr>
-          <p:cNvPr id="495" name="Shape 485"/>
+          <p:cNvPr id="503" name="Shape 501"/>
           <p:cNvSpPr/>
           <p:nvPr/>
         </p:nvSpPr>
@@ -13063,7 +13839,7 @@
       </p:sp>
       <p:sp>
         <p:nvSpPr>
-          <p:cNvPr id="496" name="Shape 486"/>
+          <p:cNvPr id="504" name="Shape 502"/>
           <p:cNvSpPr/>
           <p:nvPr/>
         </p:nvSpPr>
@@ -13086,7 +13862,7 @@
       </p:sp>
       <p:sp>
         <p:nvSpPr>
-          <p:cNvPr id="497" name="Shape 487"/>
+          <p:cNvPr id="505" name="Shape 503"/>
           <p:cNvSpPr/>
           <p:nvPr/>
         </p:nvSpPr>
@@ -13109,7 +13885,7 @@
       </p:sp>
       <p:sp>
         <p:nvSpPr>
-          <p:cNvPr id="498" name="Shape 488"/>
+          <p:cNvPr id="506" name="Shape 504"/>
           <p:cNvSpPr/>
           <p:nvPr/>
         </p:nvSpPr>
@@ -13132,7 +13908,7 @@
       </p:sp>
       <p:sp>
         <p:nvSpPr>
-          <p:cNvPr id="499" name="Shape 489"/>
+          <p:cNvPr id="507" name="Shape 505"/>
           <p:cNvSpPr/>
           <p:nvPr/>
         </p:nvSpPr>
@@ -13155,7 +13931,7 @@
       </p:sp>
       <p:sp>
         <p:nvSpPr>
-          <p:cNvPr id="500" name="Shape 490"/>
+          <p:cNvPr id="508" name="Shape 506"/>
           <p:cNvSpPr/>
           <p:nvPr/>
         </p:nvSpPr>
@@ -13178,7 +13954,7 @@
       </p:sp>
       <p:sp>
         <p:nvSpPr>
-          <p:cNvPr id="501" name="Shape 491"/>
+          <p:cNvPr id="509" name="Shape 507"/>
           <p:cNvSpPr/>
           <p:nvPr/>
         </p:nvSpPr>
@@ -13201,7 +13977,7 @@
       </p:sp>
       <p:sp>
         <p:nvSpPr>
-          <p:cNvPr id="502" name="Shape 492"/>
+          <p:cNvPr id="510" name="Shape 508"/>
           <p:cNvSpPr/>
           <p:nvPr/>
         </p:nvSpPr>
@@ -13224,7 +14000,7 @@
       </p:sp>
       <p:sp>
         <p:nvSpPr>
-          <p:cNvPr id="503" name="Shape 493"/>
+          <p:cNvPr id="511" name="Shape 509"/>
           <p:cNvSpPr/>
           <p:nvPr/>
         </p:nvSpPr>
@@ -13247,7 +14023,7 @@
       </p:sp>
       <p:sp>
         <p:nvSpPr>
-          <p:cNvPr id="504" name="Shape 494"/>
+          <p:cNvPr id="512" name="Shape 510"/>
           <p:cNvSpPr/>
           <p:nvPr/>
         </p:nvSpPr>
@@ -13267,7 +14043,7 @@
       </p:sp>
       <p:sp>
         <p:nvSpPr>
-          <p:cNvPr id="505" name="Shape 495"/>
+          <p:cNvPr id="513" name="Shape 511"/>
           <p:cNvSpPr/>
           <p:nvPr/>
         </p:nvSpPr>
@@ -13287,7 +14063,7 @@
       </p:sp>
       <p:sp>
         <p:nvSpPr>
-          <p:cNvPr id="506" name="Shape 496"/>
+          <p:cNvPr id="514" name="Shape 512"/>
           <p:cNvSpPr/>
           <p:nvPr/>
         </p:nvSpPr>
@@ -13307,7 +14083,7 @@
       </p:sp>
       <p:sp>
         <p:nvSpPr>
-          <p:cNvPr id="507" name="Shape 497"/>
+          <p:cNvPr id="515" name="Shape 513"/>
           <p:cNvSpPr/>
           <p:nvPr/>
         </p:nvSpPr>
@@ -13327,7 +14103,7 @@
       </p:sp>
       <p:sp>
         <p:nvSpPr>
-          <p:cNvPr id="508" name="Shape 498"/>
+          <p:cNvPr id="516" name="Shape 514"/>
           <p:cNvSpPr/>
           <p:nvPr/>
         </p:nvSpPr>
@@ -13347,7 +14123,7 @@
       </p:sp>
       <p:sp>
         <p:nvSpPr>
-          <p:cNvPr id="509" name="Shape 499"/>
+          <p:cNvPr id="517" name="Shape 515"/>
           <p:cNvSpPr/>
           <p:nvPr/>
         </p:nvSpPr>
@@ -13367,7 +14143,7 @@
       </p:sp>
       <p:sp>
         <p:nvSpPr>
-          <p:cNvPr id="510" name="Shape 500"/>
+          <p:cNvPr id="518" name="Shape 516"/>
           <p:cNvSpPr/>
           <p:nvPr/>
         </p:nvSpPr>
@@ -13387,7 +14163,7 @@
       </p:sp>
       <p:sp>
         <p:nvSpPr>
-          <p:cNvPr id="511" name="Shape 501"/>
+          <p:cNvPr id="519" name="Shape 517"/>
           <p:cNvSpPr/>
           <p:nvPr/>
         </p:nvSpPr>
@@ -13407,7 +14183,7 @@
       </p:sp>
       <p:sp>
         <p:nvSpPr>
-          <p:cNvPr id="512" name="Shape 502"/>
+          <p:cNvPr id="520" name="Shape 518"/>
           <p:cNvSpPr/>
           <p:nvPr/>
         </p:nvSpPr>
@@ -13427,7 +14203,7 @@
       </p:sp>
       <p:sp>
         <p:nvSpPr>
-          <p:cNvPr id="513" name="Shape 503"/>
+          <p:cNvPr id="521" name="Shape 519"/>
           <p:cNvSpPr/>
           <p:nvPr/>
         </p:nvSpPr>
@@ -13447,7 +14223,7 @@
       </p:sp>
       <p:sp>
         <p:nvSpPr>
-          <p:cNvPr id="514" name="Shape 504"/>
+          <p:cNvPr id="522" name="Shape 520"/>
           <p:cNvSpPr/>
           <p:nvPr/>
         </p:nvSpPr>
@@ -13467,7 +14243,7 @@
       </p:sp>
       <p:sp>
         <p:nvSpPr>
-          <p:cNvPr id="515" name="Shape 505"/>
+          <p:cNvPr id="523" name="Shape 521"/>
           <p:cNvSpPr/>
           <p:nvPr/>
         </p:nvSpPr>
@@ -13487,7 +14263,7 @@
       </p:sp>
       <p:sp>
         <p:nvSpPr>
-          <p:cNvPr id="516" name="Text 506"/>
+          <p:cNvPr id="524" name="Text 522"/>
           <p:cNvSpPr/>
           <p:nvPr/>
         </p:nvSpPr>
@@ -13526,7 +14302,199 @@
       </p:sp>
       <p:pic>
         <p:nvPicPr>
-          <p:cNvPr id="517" name="Image 8" descr="/home/ahmed/Projects/ai_llm_slides/videos/deep-learning/002_transformers_part2/recreated_pptx/build/assets/s038_blkarrow.png">    </p:cNvPr>
+          <p:cNvPr id="525" name="Image 0" descr="/home/ahmed/Projects/ai_llm_slides/videos/deep-learning/002_transformers_part2/recreated_pptx/build/assets/s038_blkarrow.png">    </p:cNvPr>
+          <p:cNvPicPr>
+            <a:picLocks noChangeAspect="1"/>
+          </p:cNvPicPr>
+          <p:nvPr/>
+        </p:nvPicPr>
+        <p:blipFill>
+          <a:blip r:embed="rId1"/>
+          <a:stretch>
+            <a:fillRect/>
+          </a:stretch>
+        </p:blipFill>
+        <p:spPr>
+          <a:xfrm>
+            <a:off x="2408555" y="2524760"/>
+            <a:ext cx="133350" cy="213360"/>
+          </a:xfrm>
+          <a:prstGeom prst="rect">
+            <a:avLst/>
+          </a:prstGeom>
+        </p:spPr>
+      </p:pic>
+      <p:pic>
+        <p:nvPicPr>
+          <p:cNvPr id="526" name="Image 1" descr="/home/ahmed/Projects/ai_llm_slides/videos/deep-learning/002_transformers_part2/recreated_pptx/build/assets/s038_blkarrow.png">    </p:cNvPr>
+          <p:cNvPicPr>
+            <a:picLocks noChangeAspect="1"/>
+          </p:cNvPicPr>
+          <p:nvPr/>
+        </p:nvPicPr>
+        <p:blipFill>
+          <a:blip r:embed="rId2"/>
+          <a:stretch>
+            <a:fillRect/>
+          </a:stretch>
+        </p:blipFill>
+        <p:spPr>
+          <a:xfrm>
+            <a:off x="2408555" y="3509010"/>
+            <a:ext cx="133350" cy="171450"/>
+          </a:xfrm>
+          <a:prstGeom prst="rect">
+            <a:avLst/>
+          </a:prstGeom>
+        </p:spPr>
+      </p:pic>
+      <p:pic>
+        <p:nvPicPr>
+          <p:cNvPr id="527" name="Image 2" descr="/home/ahmed/Projects/ai_llm_slides/videos/deep-learning/002_transformers_part2/recreated_pptx/build/assets/s038_blkarrow.png">    </p:cNvPr>
+          <p:cNvPicPr>
+            <a:picLocks noChangeAspect="1"/>
+          </p:cNvPicPr>
+          <p:nvPr/>
+        </p:nvPicPr>
+        <p:blipFill>
+          <a:blip r:embed="rId3"/>
+          <a:stretch>
+            <a:fillRect/>
+          </a:stretch>
+        </p:blipFill>
+        <p:spPr>
+          <a:xfrm>
+            <a:off x="3366135" y="2524760"/>
+            <a:ext cx="133350" cy="213360"/>
+          </a:xfrm>
+          <a:prstGeom prst="rect">
+            <a:avLst/>
+          </a:prstGeom>
+        </p:spPr>
+      </p:pic>
+      <p:pic>
+        <p:nvPicPr>
+          <p:cNvPr id="528" name="Image 3" descr="/home/ahmed/Projects/ai_llm_slides/videos/deep-learning/002_transformers_part2/recreated_pptx/build/assets/s038_blkarrow.png">    </p:cNvPr>
+          <p:cNvPicPr>
+            <a:picLocks noChangeAspect="1"/>
+          </p:cNvPicPr>
+          <p:nvPr/>
+        </p:nvPicPr>
+        <p:blipFill>
+          <a:blip r:embed="rId4"/>
+          <a:stretch>
+            <a:fillRect/>
+          </a:stretch>
+        </p:blipFill>
+        <p:spPr>
+          <a:xfrm>
+            <a:off x="3366135" y="3509010"/>
+            <a:ext cx="133350" cy="171450"/>
+          </a:xfrm>
+          <a:prstGeom prst="rect">
+            <a:avLst/>
+          </a:prstGeom>
+        </p:spPr>
+      </p:pic>
+      <p:pic>
+        <p:nvPicPr>
+          <p:cNvPr id="529" name="Image 4" descr="/home/ahmed/Projects/ai_llm_slides/videos/deep-learning/002_transformers_part2/recreated_pptx/build/assets/s038_blkarrow.png">    </p:cNvPr>
+          <p:cNvPicPr>
+            <a:picLocks noChangeAspect="1"/>
+          </p:cNvPicPr>
+          <p:nvPr/>
+        </p:nvPicPr>
+        <p:blipFill>
+          <a:blip r:embed="rId5"/>
+          <a:stretch>
+            <a:fillRect/>
+          </a:stretch>
+        </p:blipFill>
+        <p:spPr>
+          <a:xfrm>
+            <a:off x="4331335" y="2524760"/>
+            <a:ext cx="133350" cy="213360"/>
+          </a:xfrm>
+          <a:prstGeom prst="rect">
+            <a:avLst/>
+          </a:prstGeom>
+        </p:spPr>
+      </p:pic>
+      <p:pic>
+        <p:nvPicPr>
+          <p:cNvPr id="530" name="Image 5" descr="/home/ahmed/Projects/ai_llm_slides/videos/deep-learning/002_transformers_part2/recreated_pptx/build/assets/s038_blkarrow.png">    </p:cNvPr>
+          <p:cNvPicPr>
+            <a:picLocks noChangeAspect="1"/>
+          </p:cNvPicPr>
+          <p:nvPr/>
+        </p:nvPicPr>
+        <p:blipFill>
+          <a:blip r:embed="rId6"/>
+          <a:stretch>
+            <a:fillRect/>
+          </a:stretch>
+        </p:blipFill>
+        <p:spPr>
+          <a:xfrm>
+            <a:off x="4331335" y="3509010"/>
+            <a:ext cx="133350" cy="171450"/>
+          </a:xfrm>
+          <a:prstGeom prst="rect">
+            <a:avLst/>
+          </a:prstGeom>
+        </p:spPr>
+      </p:pic>
+      <p:pic>
+        <p:nvPicPr>
+          <p:cNvPr id="531" name="Image 6" descr="/home/ahmed/Projects/ai_llm_slides/videos/deep-learning/002_transformers_part2/recreated_pptx/build/assets/s038_blkarrow.png">    </p:cNvPr>
+          <p:cNvPicPr>
+            <a:picLocks noChangeAspect="1"/>
+          </p:cNvPicPr>
+          <p:nvPr/>
+        </p:nvPicPr>
+        <p:blipFill>
+          <a:blip r:embed="rId7"/>
+          <a:stretch>
+            <a:fillRect/>
+          </a:stretch>
+        </p:blipFill>
+        <p:spPr>
+          <a:xfrm>
+            <a:off x="5302885" y="2524760"/>
+            <a:ext cx="133350" cy="213360"/>
+          </a:xfrm>
+          <a:prstGeom prst="rect">
+            <a:avLst/>
+          </a:prstGeom>
+        </p:spPr>
+      </p:pic>
+      <p:pic>
+        <p:nvPicPr>
+          <p:cNvPr id="532" name="Image 7" descr="/home/ahmed/Projects/ai_llm_slides/videos/deep-learning/002_transformers_part2/recreated_pptx/build/assets/s038_blkarrow.png">    </p:cNvPr>
+          <p:cNvPicPr>
+            <a:picLocks noChangeAspect="1"/>
+          </p:cNvPicPr>
+          <p:nvPr/>
+        </p:nvPicPr>
+        <p:blipFill>
+          <a:blip r:embed="rId8"/>
+          <a:stretch>
+            <a:fillRect/>
+          </a:stretch>
+        </p:blipFill>
+        <p:spPr>
+          <a:xfrm>
+            <a:off x="5302885" y="3509010"/>
+            <a:ext cx="133350" cy="171450"/>
+          </a:xfrm>
+          <a:prstGeom prst="rect">
+            <a:avLst/>
+          </a:prstGeom>
+        </p:spPr>
+      </p:pic>
+      <p:pic>
+        <p:nvPicPr>
+          <p:cNvPr id="533" name="Image 8" descr="/home/ahmed/Projects/ai_llm_slides/videos/deep-learning/002_transformers_part2/recreated_pptx/build/assets/s038_blkarrow.png">    </p:cNvPr>
           <p:cNvPicPr>
             <a:picLocks noChangeAspect="1"/>
           </p:cNvPicPr>
@@ -13540,7 +14508,7 @@
         </p:blipFill>
         <p:spPr>
           <a:xfrm>
-            <a:off x="2408555" y="2524760"/>
+            <a:off x="6280785" y="2524760"/>
             <a:ext cx="133350" cy="213360"/>
           </a:xfrm>
           <a:prstGeom prst="rect">
@@ -13550,7 +14518,7 @@
       </p:pic>
       <p:pic>
         <p:nvPicPr>
-          <p:cNvPr id="518" name="Image 9" descr="/home/ahmed/Projects/ai_llm_slides/videos/deep-learning/002_transformers_part2/recreated_pptx/build/assets/s038_blkarrow.png">    </p:cNvPr>
+          <p:cNvPr id="534" name="Image 9" descr="/home/ahmed/Projects/ai_llm_slides/videos/deep-learning/002_transformers_part2/recreated_pptx/build/assets/s038_blkarrow.png">    </p:cNvPr>
           <p:cNvPicPr>
             <a:picLocks noChangeAspect="1"/>
           </p:cNvPicPr>
@@ -13564,7 +14532,7 @@
         </p:blipFill>
         <p:spPr>
           <a:xfrm>
-            <a:off x="2408555" y="3509010"/>
+            <a:off x="6280785" y="3509010"/>
             <a:ext cx="133350" cy="171450"/>
           </a:xfrm>
           <a:prstGeom prst="rect">
@@ -13574,7 +14542,7 @@
       </p:pic>
       <p:pic>
         <p:nvPicPr>
-          <p:cNvPr id="519" name="Image 10" descr="/home/ahmed/Projects/ai_llm_slides/videos/deep-learning/002_transformers_part2/recreated_pptx/build/assets/s038_blkarrow.png">    </p:cNvPr>
+          <p:cNvPr id="535" name="Image 10" descr="/home/ahmed/Projects/ai_llm_slides/videos/deep-learning/002_transformers_part2/recreated_pptx/build/assets/s038_blkarrow.png">    </p:cNvPr>
           <p:cNvPicPr>
             <a:picLocks noChangeAspect="1"/>
           </p:cNvPicPr>
@@ -13588,7 +14556,7 @@
         </p:blipFill>
         <p:spPr>
           <a:xfrm>
-            <a:off x="3366135" y="2524760"/>
+            <a:off x="7224395" y="2524760"/>
             <a:ext cx="133350" cy="213360"/>
           </a:xfrm>
           <a:prstGeom prst="rect">
@@ -13598,7 +14566,7 @@
       </p:pic>
       <p:pic>
         <p:nvPicPr>
-          <p:cNvPr id="520" name="Image 11" descr="/home/ahmed/Projects/ai_llm_slides/videos/deep-learning/002_transformers_part2/recreated_pptx/build/assets/s038_blkarrow.png">    </p:cNvPr>
+          <p:cNvPr id="536" name="Image 11" descr="/home/ahmed/Projects/ai_llm_slides/videos/deep-learning/002_transformers_part2/recreated_pptx/build/assets/s038_blkarrow.png">    </p:cNvPr>
           <p:cNvPicPr>
             <a:picLocks noChangeAspect="1"/>
           </p:cNvPicPr>
@@ -13612,7 +14580,7 @@
         </p:blipFill>
         <p:spPr>
           <a:xfrm>
-            <a:off x="3366135" y="3509010"/>
+            <a:off x="7224395" y="3509010"/>
             <a:ext cx="133350" cy="171450"/>
           </a:xfrm>
           <a:prstGeom prst="rect">
@@ -13622,7 +14590,7 @@
       </p:pic>
       <p:pic>
         <p:nvPicPr>
-          <p:cNvPr id="521" name="Image 12" descr="/home/ahmed/Projects/ai_llm_slides/videos/deep-learning/002_transformers_part2/recreated_pptx/build/assets/s038_blkarrow.png">    </p:cNvPr>
+          <p:cNvPr id="537" name="Image 12" descr="/home/ahmed/Projects/ai_llm_slides/videos/deep-learning/002_transformers_part2/recreated_pptx/build/assets/s038_blkarrow.png">    </p:cNvPr>
           <p:cNvPicPr>
             <a:picLocks noChangeAspect="1"/>
           </p:cNvPicPr>
@@ -13636,7 +14604,7 @@
         </p:blipFill>
         <p:spPr>
           <a:xfrm>
-            <a:off x="4331335" y="2524760"/>
+            <a:off x="9735185" y="2524760"/>
             <a:ext cx="133350" cy="213360"/>
           </a:xfrm>
           <a:prstGeom prst="rect">
@@ -13646,7 +14614,7 @@
       </p:pic>
       <p:pic>
         <p:nvPicPr>
-          <p:cNvPr id="522" name="Image 13" descr="/home/ahmed/Projects/ai_llm_slides/videos/deep-learning/002_transformers_part2/recreated_pptx/build/assets/s038_blkarrow.png">    </p:cNvPr>
+          <p:cNvPr id="538" name="Image 13" descr="/home/ahmed/Projects/ai_llm_slides/videos/deep-learning/002_transformers_part2/recreated_pptx/build/assets/s038_blkarrow.png">    </p:cNvPr>
           <p:cNvPicPr>
             <a:picLocks noChangeAspect="1"/>
           </p:cNvPicPr>
@@ -13660,7 +14628,7 @@
         </p:blipFill>
         <p:spPr>
           <a:xfrm>
-            <a:off x="4331335" y="3509010"/>
+            <a:off x="9735185" y="3509010"/>
             <a:ext cx="133350" cy="171450"/>
           </a:xfrm>
           <a:prstGeom prst="rect">
@@ -13670,7 +14638,7 @@
       </p:pic>
       <p:pic>
         <p:nvPicPr>
-          <p:cNvPr id="523" name="Image 14" descr="/home/ahmed/Projects/ai_llm_slides/videos/deep-learning/002_transformers_part2/recreated_pptx/build/assets/s038_blkarrow.png">    </p:cNvPr>
+          <p:cNvPr id="539" name="Image 14" descr="/home/ahmed/Projects/ai_llm_slides/videos/deep-learning/002_transformers_part2/recreated_pptx/build/assets/s038_blkarrow.png">    </p:cNvPr>
           <p:cNvPicPr>
             <a:picLocks noChangeAspect="1"/>
           </p:cNvPicPr>
@@ -13684,7 +14652,7 @@
         </p:blipFill>
         <p:spPr>
           <a:xfrm>
-            <a:off x="5302885" y="2524760"/>
+            <a:off x="10713085" y="2524760"/>
             <a:ext cx="133350" cy="213360"/>
           </a:xfrm>
           <a:prstGeom prst="rect">
@@ -13694,7 +14662,7 @@
       </p:pic>
       <p:pic>
         <p:nvPicPr>
-          <p:cNvPr id="524" name="Image 15" descr="/home/ahmed/Projects/ai_llm_slides/videos/deep-learning/002_transformers_part2/recreated_pptx/build/assets/s038_blkarrow.png">    </p:cNvPr>
+          <p:cNvPr id="540" name="Image 15" descr="/home/ahmed/Projects/ai_llm_slides/videos/deep-learning/002_transformers_part2/recreated_pptx/build/assets/s038_blkarrow.png">    </p:cNvPr>
           <p:cNvPicPr>
             <a:picLocks noChangeAspect="1"/>
           </p:cNvPicPr>
@@ -13708,198 +14676,6 @@
         </p:blipFill>
         <p:spPr>
           <a:xfrm>
-            <a:off x="5302885" y="3509010"/>
-            <a:ext cx="133350" cy="171450"/>
-          </a:xfrm>
-          <a:prstGeom prst="rect">
-            <a:avLst/>
-          </a:prstGeom>
-        </p:spPr>
-      </p:pic>
-      <p:pic>
-        <p:nvPicPr>
-          <p:cNvPr id="525" name="Image 16" descr="/home/ahmed/Projects/ai_llm_slides/videos/deep-learning/002_transformers_part2/recreated_pptx/build/assets/s038_blkarrow.png">    </p:cNvPr>
-          <p:cNvPicPr>
-            <a:picLocks noChangeAspect="1"/>
-          </p:cNvPicPr>
-          <p:nvPr/>
-        </p:nvPicPr>
-        <p:blipFill>
-          <a:blip r:embed="rId17"/>
-          <a:stretch>
-            <a:fillRect/>
-          </a:stretch>
-        </p:blipFill>
-        <p:spPr>
-          <a:xfrm>
-            <a:off x="6280785" y="2524760"/>
-            <a:ext cx="133350" cy="213360"/>
-          </a:xfrm>
-          <a:prstGeom prst="rect">
-            <a:avLst/>
-          </a:prstGeom>
-        </p:spPr>
-      </p:pic>
-      <p:pic>
-        <p:nvPicPr>
-          <p:cNvPr id="526" name="Image 17" descr="/home/ahmed/Projects/ai_llm_slides/videos/deep-learning/002_transformers_part2/recreated_pptx/build/assets/s038_blkarrow.png">    </p:cNvPr>
-          <p:cNvPicPr>
-            <a:picLocks noChangeAspect="1"/>
-          </p:cNvPicPr>
-          <p:nvPr/>
-        </p:nvPicPr>
-        <p:blipFill>
-          <a:blip r:embed="rId18"/>
-          <a:stretch>
-            <a:fillRect/>
-          </a:stretch>
-        </p:blipFill>
-        <p:spPr>
-          <a:xfrm>
-            <a:off x="6280785" y="3509010"/>
-            <a:ext cx="133350" cy="171450"/>
-          </a:xfrm>
-          <a:prstGeom prst="rect">
-            <a:avLst/>
-          </a:prstGeom>
-        </p:spPr>
-      </p:pic>
-      <p:pic>
-        <p:nvPicPr>
-          <p:cNvPr id="527" name="Image 18" descr="/home/ahmed/Projects/ai_llm_slides/videos/deep-learning/002_transformers_part2/recreated_pptx/build/assets/s038_blkarrow.png">    </p:cNvPr>
-          <p:cNvPicPr>
-            <a:picLocks noChangeAspect="1"/>
-          </p:cNvPicPr>
-          <p:nvPr/>
-        </p:nvPicPr>
-        <p:blipFill>
-          <a:blip r:embed="rId19"/>
-          <a:stretch>
-            <a:fillRect/>
-          </a:stretch>
-        </p:blipFill>
-        <p:spPr>
-          <a:xfrm>
-            <a:off x="7224395" y="2524760"/>
-            <a:ext cx="133350" cy="213360"/>
-          </a:xfrm>
-          <a:prstGeom prst="rect">
-            <a:avLst/>
-          </a:prstGeom>
-        </p:spPr>
-      </p:pic>
-      <p:pic>
-        <p:nvPicPr>
-          <p:cNvPr id="528" name="Image 19" descr="/home/ahmed/Projects/ai_llm_slides/videos/deep-learning/002_transformers_part2/recreated_pptx/build/assets/s038_blkarrow.png">    </p:cNvPr>
-          <p:cNvPicPr>
-            <a:picLocks noChangeAspect="1"/>
-          </p:cNvPicPr>
-          <p:nvPr/>
-        </p:nvPicPr>
-        <p:blipFill>
-          <a:blip r:embed="rId20"/>
-          <a:stretch>
-            <a:fillRect/>
-          </a:stretch>
-        </p:blipFill>
-        <p:spPr>
-          <a:xfrm>
-            <a:off x="7224395" y="3509010"/>
-            <a:ext cx="133350" cy="171450"/>
-          </a:xfrm>
-          <a:prstGeom prst="rect">
-            <a:avLst/>
-          </a:prstGeom>
-        </p:spPr>
-      </p:pic>
-      <p:pic>
-        <p:nvPicPr>
-          <p:cNvPr id="529" name="Image 20" descr="/home/ahmed/Projects/ai_llm_slides/videos/deep-learning/002_transformers_part2/recreated_pptx/build/assets/s038_blkarrow.png">    </p:cNvPr>
-          <p:cNvPicPr>
-            <a:picLocks noChangeAspect="1"/>
-          </p:cNvPicPr>
-          <p:nvPr/>
-        </p:nvPicPr>
-        <p:blipFill>
-          <a:blip r:embed="rId21"/>
-          <a:stretch>
-            <a:fillRect/>
-          </a:stretch>
-        </p:blipFill>
-        <p:spPr>
-          <a:xfrm>
-            <a:off x="9735185" y="2524760"/>
-            <a:ext cx="133350" cy="213360"/>
-          </a:xfrm>
-          <a:prstGeom prst="rect">
-            <a:avLst/>
-          </a:prstGeom>
-        </p:spPr>
-      </p:pic>
-      <p:pic>
-        <p:nvPicPr>
-          <p:cNvPr id="530" name="Image 21" descr="/home/ahmed/Projects/ai_llm_slides/videos/deep-learning/002_transformers_part2/recreated_pptx/build/assets/s038_blkarrow.png">    </p:cNvPr>
-          <p:cNvPicPr>
-            <a:picLocks noChangeAspect="1"/>
-          </p:cNvPicPr>
-          <p:nvPr/>
-        </p:nvPicPr>
-        <p:blipFill>
-          <a:blip r:embed="rId22"/>
-          <a:stretch>
-            <a:fillRect/>
-          </a:stretch>
-        </p:blipFill>
-        <p:spPr>
-          <a:xfrm>
-            <a:off x="9735185" y="3509010"/>
-            <a:ext cx="133350" cy="171450"/>
-          </a:xfrm>
-          <a:prstGeom prst="rect">
-            <a:avLst/>
-          </a:prstGeom>
-        </p:spPr>
-      </p:pic>
-      <p:pic>
-        <p:nvPicPr>
-          <p:cNvPr id="531" name="Image 22" descr="/home/ahmed/Projects/ai_llm_slides/videos/deep-learning/002_transformers_part2/recreated_pptx/build/assets/s038_blkarrow.png">    </p:cNvPr>
-          <p:cNvPicPr>
-            <a:picLocks noChangeAspect="1"/>
-          </p:cNvPicPr>
-          <p:nvPr/>
-        </p:nvPicPr>
-        <p:blipFill>
-          <a:blip r:embed="rId23"/>
-          <a:stretch>
-            <a:fillRect/>
-          </a:stretch>
-        </p:blipFill>
-        <p:spPr>
-          <a:xfrm>
-            <a:off x="10713085" y="2524760"/>
-            <a:ext cx="133350" cy="213360"/>
-          </a:xfrm>
-          <a:prstGeom prst="rect">
-            <a:avLst/>
-          </a:prstGeom>
-        </p:spPr>
-      </p:pic>
-      <p:pic>
-        <p:nvPicPr>
-          <p:cNvPr id="532" name="Image 23" descr="/home/ahmed/Projects/ai_llm_slides/videos/deep-learning/002_transformers_part2/recreated_pptx/build/assets/s038_blkarrow.png">    </p:cNvPr>
-          <p:cNvPicPr>
-            <a:picLocks noChangeAspect="1"/>
-          </p:cNvPicPr>
-          <p:nvPr/>
-        </p:nvPicPr>
-        <p:blipFill>
-          <a:blip r:embed="rId24"/>
-          <a:stretch>
-            <a:fillRect/>
-          </a:stretch>
-        </p:blipFill>
-        <p:spPr>
-          <a:xfrm>
             <a:off x="10713085" y="3509010"/>
             <a:ext cx="133350" cy="171450"/>
           </a:xfrm>
@@ -13910,7 +14686,7 @@
       </p:pic>
       <p:sp>
         <p:nvSpPr>
-          <p:cNvPr id="533" name="Shape 507"/>
+          <p:cNvPr id="541" name="Shape 523"/>
           <p:cNvSpPr/>
           <p:nvPr/>
         </p:nvSpPr>
@@ -13935,7 +14711,7 @@
       </p:sp>
       <p:sp>
         <p:nvSpPr>
-          <p:cNvPr id="534" name="Shape 508"/>
+          <p:cNvPr id="542" name="Shape 524"/>
           <p:cNvSpPr/>
           <p:nvPr/>
         </p:nvSpPr>
@@ -13960,7 +14736,7 @@
       </p:sp>
       <p:sp>
         <p:nvSpPr>
-          <p:cNvPr id="535" name="Shape 509"/>
+          <p:cNvPr id="543" name="Shape 525"/>
           <p:cNvSpPr/>
           <p:nvPr/>
         </p:nvSpPr>
@@ -13985,7 +14761,7 @@
       </p:sp>
       <p:sp>
         <p:nvSpPr>
-          <p:cNvPr id="536" name="Shape 510"/>
+          <p:cNvPr id="544" name="Shape 526"/>
           <p:cNvSpPr/>
           <p:nvPr/>
         </p:nvSpPr>
@@ -14010,7 +14786,7 @@
       </p:sp>
       <p:sp>
         <p:nvSpPr>
-          <p:cNvPr id="537" name="Text 511"/>
+          <p:cNvPr id="545" name="Text 527"/>
           <p:cNvSpPr/>
           <p:nvPr/>
         </p:nvSpPr>
@@ -14069,7 +14845,7 @@
       </p:sp>
       <p:sp>
         <p:nvSpPr>
-          <p:cNvPr id="538" name="Shape 512"/>
+          <p:cNvPr id="546" name="Shape 528"/>
           <p:cNvSpPr/>
           <p:nvPr/>
         </p:nvSpPr>
@@ -14094,7 +14870,7 @@
       </p:sp>
       <p:sp>
         <p:nvSpPr>
-          <p:cNvPr id="539" name="Shape 513"/>
+          <p:cNvPr id="547" name="Shape 529"/>
           <p:cNvSpPr/>
           <p:nvPr/>
         </p:nvSpPr>
@@ -14119,7 +14895,7 @@
       </p:sp>
       <p:sp>
         <p:nvSpPr>
-          <p:cNvPr id="540" name="Shape 514"/>
+          <p:cNvPr id="548" name="Shape 530"/>
           <p:cNvSpPr/>
           <p:nvPr/>
         </p:nvSpPr>
@@ -14144,7 +14920,7 @@
       </p:sp>
       <p:sp>
         <p:nvSpPr>
-          <p:cNvPr id="541" name="Shape 515"/>
+          <p:cNvPr id="549" name="Shape 531"/>
           <p:cNvSpPr/>
           <p:nvPr/>
         </p:nvSpPr>
@@ -14169,7 +14945,7 @@
       </p:sp>
       <p:sp>
         <p:nvSpPr>
-          <p:cNvPr id="542" name="Text 516"/>
+          <p:cNvPr id="550" name="Text 532"/>
           <p:cNvSpPr/>
           <p:nvPr/>
         </p:nvSpPr>
@@ -14228,7 +15004,7 @@
       </p:sp>
       <p:sp>
         <p:nvSpPr>
-          <p:cNvPr id="543" name="Shape 517"/>
+          <p:cNvPr id="551" name="Shape 533"/>
           <p:cNvSpPr/>
           <p:nvPr/>
         </p:nvSpPr>
@@ -14253,7 +15029,7 @@
       </p:sp>
       <p:sp>
         <p:nvSpPr>
-          <p:cNvPr id="544" name="Shape 518"/>
+          <p:cNvPr id="552" name="Shape 534"/>
           <p:cNvSpPr/>
           <p:nvPr/>
         </p:nvSpPr>
@@ -14278,7 +15054,7 @@
       </p:sp>
       <p:sp>
         <p:nvSpPr>
-          <p:cNvPr id="545" name="Shape 519"/>
+          <p:cNvPr id="553" name="Shape 535"/>
           <p:cNvSpPr/>
           <p:nvPr/>
         </p:nvSpPr>
@@ -14303,7 +15079,7 @@
       </p:sp>
       <p:sp>
         <p:nvSpPr>
-          <p:cNvPr id="546" name="Shape 520"/>
+          <p:cNvPr id="554" name="Shape 536"/>
           <p:cNvSpPr/>
           <p:nvPr/>
         </p:nvSpPr>
@@ -14328,7 +15104,7 @@
       </p:sp>
       <p:sp>
         <p:nvSpPr>
-          <p:cNvPr id="547" name="Text 521"/>
+          <p:cNvPr id="555" name="Text 537"/>
           <p:cNvSpPr/>
           <p:nvPr/>
         </p:nvSpPr>
@@ -14387,7 +15163,7 @@
       </p:sp>
       <p:sp>
         <p:nvSpPr>
-          <p:cNvPr id="548" name="Shape 522"/>
+          <p:cNvPr id="556" name="Shape 538"/>
           <p:cNvSpPr/>
           <p:nvPr/>
         </p:nvSpPr>
@@ -14412,7 +15188,7 @@
       </p:sp>
       <p:sp>
         <p:nvSpPr>
-          <p:cNvPr id="549" name="Shape 523"/>
+          <p:cNvPr id="557" name="Shape 539"/>
           <p:cNvSpPr/>
           <p:nvPr/>
         </p:nvSpPr>
@@ -14437,7 +15213,7 @@
       </p:sp>
       <p:sp>
         <p:nvSpPr>
-          <p:cNvPr id="550" name="Shape 524"/>
+          <p:cNvPr id="558" name="Shape 540"/>
           <p:cNvSpPr/>
           <p:nvPr/>
         </p:nvSpPr>
@@ -14462,7 +15238,7 @@
       </p:sp>
       <p:sp>
         <p:nvSpPr>
-          <p:cNvPr id="551" name="Shape 525"/>
+          <p:cNvPr id="559" name="Shape 541"/>
           <p:cNvSpPr/>
           <p:nvPr/>
         </p:nvSpPr>
@@ -14487,7 +15263,7 @@
       </p:sp>
       <p:sp>
         <p:nvSpPr>
-          <p:cNvPr id="552" name="Text 526"/>
+          <p:cNvPr id="560" name="Text 542"/>
           <p:cNvSpPr/>
           <p:nvPr/>
         </p:nvSpPr>
@@ -14546,7 +15322,7 @@
       </p:sp>
       <p:sp>
         <p:nvSpPr>
-          <p:cNvPr id="553" name="Shape 527"/>
+          <p:cNvPr id="561" name="Shape 543"/>
           <p:cNvSpPr/>
           <p:nvPr/>
         </p:nvSpPr>
@@ -14571,7 +15347,7 @@
       </p:sp>
       <p:sp>
         <p:nvSpPr>
-          <p:cNvPr id="554" name="Shape 528"/>
+          <p:cNvPr id="562" name="Shape 544"/>
           <p:cNvSpPr/>
           <p:nvPr/>
         </p:nvSpPr>
@@ -14596,7 +15372,7 @@
       </p:sp>
       <p:sp>
         <p:nvSpPr>
-          <p:cNvPr id="555" name="Shape 529"/>
+          <p:cNvPr id="563" name="Shape 545"/>
           <p:cNvSpPr/>
           <p:nvPr/>
         </p:nvSpPr>
@@ -14621,7 +15397,7 @@
       </p:sp>
       <p:sp>
         <p:nvSpPr>
-          <p:cNvPr id="556" name="Shape 530"/>
+          <p:cNvPr id="564" name="Shape 546"/>
           <p:cNvSpPr/>
           <p:nvPr/>
         </p:nvSpPr>
@@ -14646,7 +15422,7 @@
       </p:sp>
       <p:sp>
         <p:nvSpPr>
-          <p:cNvPr id="557" name="Text 531"/>
+          <p:cNvPr id="565" name="Text 547"/>
           <p:cNvSpPr/>
           <p:nvPr/>
         </p:nvSpPr>
@@ -14705,7 +15481,7 @@
       </p:sp>
       <p:sp>
         <p:nvSpPr>
-          <p:cNvPr id="558" name="Shape 532"/>
+          <p:cNvPr id="566" name="Shape 548"/>
           <p:cNvSpPr/>
           <p:nvPr/>
         </p:nvSpPr>
@@ -14730,7 +15506,7 @@
       </p:sp>
       <p:sp>
         <p:nvSpPr>
-          <p:cNvPr id="559" name="Shape 533"/>
+          <p:cNvPr id="567" name="Shape 549"/>
           <p:cNvSpPr/>
           <p:nvPr/>
         </p:nvSpPr>
@@ -14755,7 +15531,7 @@
       </p:sp>
       <p:sp>
         <p:nvSpPr>
-          <p:cNvPr id="560" name="Shape 534"/>
+          <p:cNvPr id="568" name="Shape 550"/>
           <p:cNvSpPr/>
           <p:nvPr/>
         </p:nvSpPr>
@@ -14780,7 +15556,7 @@
       </p:sp>
       <p:sp>
         <p:nvSpPr>
-          <p:cNvPr id="561" name="Shape 535"/>
+          <p:cNvPr id="569" name="Shape 551"/>
           <p:cNvSpPr/>
           <p:nvPr/>
         </p:nvSpPr>
@@ -14805,7 +15581,7 @@
       </p:sp>
       <p:sp>
         <p:nvSpPr>
-          <p:cNvPr id="562" name="Text 536"/>
+          <p:cNvPr id="570" name="Text 552"/>
           <p:cNvSpPr/>
           <p:nvPr/>
         </p:nvSpPr>
@@ -14864,7 +15640,7 @@
       </p:sp>
       <p:sp>
         <p:nvSpPr>
-          <p:cNvPr id="563" name="Shape 537"/>
+          <p:cNvPr id="571" name="Shape 553"/>
           <p:cNvSpPr/>
           <p:nvPr/>
         </p:nvSpPr>
@@ -14889,7 +15665,7 @@
       </p:sp>
       <p:sp>
         <p:nvSpPr>
-          <p:cNvPr id="564" name="Shape 538"/>
+          <p:cNvPr id="572" name="Shape 554"/>
           <p:cNvSpPr/>
           <p:nvPr/>
         </p:nvSpPr>
@@ -14914,7 +15690,7 @@
       </p:sp>
       <p:sp>
         <p:nvSpPr>
-          <p:cNvPr id="565" name="Shape 539"/>
+          <p:cNvPr id="573" name="Shape 555"/>
           <p:cNvSpPr/>
           <p:nvPr/>
         </p:nvSpPr>
@@ -14939,7 +15715,7 @@
       </p:sp>
       <p:sp>
         <p:nvSpPr>
-          <p:cNvPr id="566" name="Shape 540"/>
+          <p:cNvPr id="574" name="Shape 556"/>
           <p:cNvSpPr/>
           <p:nvPr/>
         </p:nvSpPr>
@@ -14964,7 +15740,7 @@
       </p:sp>
       <p:sp>
         <p:nvSpPr>
-          <p:cNvPr id="567" name="Text 541"/>
+          <p:cNvPr id="575" name="Text 557"/>
           <p:cNvSpPr/>
           <p:nvPr/>
         </p:nvSpPr>
@@ -15023,7 +15799,7 @@
       </p:sp>
       <p:sp>
         <p:nvSpPr>
-          <p:cNvPr id="568" name="Shape 542"/>
+          <p:cNvPr id="576" name="Shape 558"/>
           <p:cNvSpPr/>
           <p:nvPr/>
         </p:nvSpPr>
@@ -15048,7 +15824,7 @@
       </p:sp>
       <p:sp>
         <p:nvSpPr>
-          <p:cNvPr id="569" name="Shape 543"/>
+          <p:cNvPr id="577" name="Shape 559"/>
           <p:cNvSpPr/>
           <p:nvPr/>
         </p:nvSpPr>
@@ -15073,7 +15849,7 @@
       </p:sp>
       <p:sp>
         <p:nvSpPr>
-          <p:cNvPr id="570" name="Shape 544"/>
+          <p:cNvPr id="578" name="Shape 560"/>
           <p:cNvSpPr/>
           <p:nvPr/>
         </p:nvSpPr>
@@ -15098,7 +15874,7 @@
       </p:sp>
       <p:sp>
         <p:nvSpPr>
-          <p:cNvPr id="571" name="Shape 545"/>
+          <p:cNvPr id="579" name="Shape 561"/>
           <p:cNvSpPr/>
           <p:nvPr/>
         </p:nvSpPr>
@@ -15123,7 +15899,7 @@
       </p:sp>
       <p:sp>
         <p:nvSpPr>
-          <p:cNvPr id="572" name="Text 546"/>
+          <p:cNvPr id="580" name="Text 562"/>
           <p:cNvSpPr/>
           <p:nvPr/>
         </p:nvSpPr>
@@ -15182,7 +15958,7 @@
       </p:sp>
       <p:sp>
         <p:nvSpPr>
-          <p:cNvPr id="573" name="Shape 547"/>
+          <p:cNvPr id="581" name="Shape 563"/>
           <p:cNvSpPr/>
           <p:nvPr/>
         </p:nvSpPr>
@@ -15202,7 +15978,7 @@
       </p:sp>
       <p:sp>
         <p:nvSpPr>
-          <p:cNvPr id="574" name="Shape 548"/>
+          <p:cNvPr id="582" name="Shape 564"/>
           <p:cNvSpPr/>
           <p:nvPr/>
         </p:nvSpPr>
@@ -15222,7 +15998,7 @@
       </p:sp>
       <p:sp>
         <p:nvSpPr>
-          <p:cNvPr id="575" name="Shape 549"/>
+          <p:cNvPr id="583" name="Shape 565"/>
           <p:cNvSpPr/>
           <p:nvPr/>
         </p:nvSpPr>
@@ -15242,7 +16018,7 @@
       </p:sp>
       <p:sp>
         <p:nvSpPr>
-          <p:cNvPr id="576" name="Shape 550"/>
+          <p:cNvPr id="584" name="Shape 566"/>
           <p:cNvSpPr/>
           <p:nvPr/>
         </p:nvSpPr>
@@ -15262,7 +16038,7 @@
       </p:sp>
       <p:sp>
         <p:nvSpPr>
-          <p:cNvPr id="577" name="Shape 551"/>
+          <p:cNvPr id="585" name="Shape 567"/>
           <p:cNvSpPr/>
           <p:nvPr/>
         </p:nvSpPr>
@@ -15282,7 +16058,7 @@
       </p:sp>
       <p:sp>
         <p:nvSpPr>
-          <p:cNvPr id="578" name="Shape 552"/>
+          <p:cNvPr id="586" name="Shape 568"/>
           <p:cNvSpPr/>
           <p:nvPr/>
         </p:nvSpPr>
@@ -15309,7 +16085,7 @@
       </p:sp>
       <p:sp>
         <p:nvSpPr>
-          <p:cNvPr id="579" name="Shape 553"/>
+          <p:cNvPr id="587" name="Shape 569"/>
           <p:cNvSpPr/>
           <p:nvPr/>
         </p:nvSpPr>
@@ -15334,7 +16110,7 @@
       </p:sp>
       <p:sp>
         <p:nvSpPr>
-          <p:cNvPr id="580" name="Text 554"/>
+          <p:cNvPr id="588" name="Text 570"/>
           <p:cNvSpPr/>
           <p:nvPr/>
         </p:nvSpPr>
@@ -15391,201 +16167,977 @@
           </a:p>
         </p:txBody>
       </p:sp>
-      <p:pic>
-        <p:nvPicPr>
-          <p:cNvPr id="581" name="Image 24" descr="/home/ahmed/Projects/ai_llm_slides/videos/deep-learning/002_transformers_part2/recreated_pptx/build/assets/s038_orangearrow.png">    </p:cNvPr>
-          <p:cNvPicPr>
-            <a:picLocks noChangeAspect="1"/>
-          </p:cNvPicPr>
-          <p:nvPr/>
-        </p:nvPicPr>
-        <p:blipFill>
-          <a:blip r:embed="rId25"/>
-          <a:stretch>
-            <a:fillRect/>
-          </a:stretch>
-        </p:blipFill>
+      <p:sp>
+        <p:nvSpPr>
+          <p:cNvPr id="589" name="Shape 571"/>
+          <p:cNvSpPr/>
+          <p:nvPr/>
+        </p:nvSpPr>
         <p:spPr>
           <a:xfrm>
             <a:off x="1814830" y="4698365"/>
             <a:ext cx="685800" cy="1892300"/>
           </a:xfrm>
-          <a:prstGeom prst="rect">
-            <a:avLst/>
-          </a:prstGeom>
-        </p:spPr>
-      </p:pic>
-      <p:pic>
-        <p:nvPicPr>
-          <p:cNvPr id="582" name="Image 25" descr="/home/ahmed/Projects/ai_llm_slides/videos/deep-learning/002_transformers_part2/recreated_pptx/build/assets/s038_orangearrow.png">    </p:cNvPr>
-          <p:cNvPicPr>
-            <a:picLocks noChangeAspect="1"/>
-          </p:cNvPicPr>
-          <p:nvPr/>
-        </p:nvPicPr>
-        <p:blipFill>
-          <a:blip r:embed="rId26"/>
-          <a:stretch>
-            <a:fillRect/>
-          </a:stretch>
-        </p:blipFill>
+          <a:custGeom>
+            <a:avLst/>
+            <a:gdLst/>
+            <a:ahLst/>
+            <a:cxnLst/>
+            <a:rect l="l" t="t" r="r" b="b"/>
+            <a:pathLst>
+              <a:path w="685800" h="1892300">
+                <a:moveTo>
+                  <a:pt x="220980" y="1868170"/>
+                </a:moveTo>
+                <a:cubicBezTo>
+                  <a:pt x="201930" y="1841712"/>
+                  <a:pt x="141393" y="1787948"/>
+                  <a:pt x="106680" y="1709420"/>
+                </a:cubicBezTo>
+                <a:cubicBezTo>
+                  <a:pt x="71967" y="1630892"/>
+                  <a:pt x="28363" y="1514687"/>
+                  <a:pt x="12700" y="1397000"/>
+                </a:cubicBezTo>
+                <a:cubicBezTo>
+                  <a:pt x="-2963" y="1279313"/>
+                  <a:pt x="12700" y="1119717"/>
+                  <a:pt x="12700" y="1003300"/>
+                </a:cubicBezTo>
+                <a:cubicBezTo>
+                  <a:pt x="12700" y="886883"/>
+                  <a:pt x="-847" y="784648"/>
+                  <a:pt x="12700" y="698500"/>
+                </a:cubicBezTo>
+                <a:cubicBezTo>
+                  <a:pt x="26247" y="612352"/>
+                  <a:pt x="64982" y="557107"/>
+                  <a:pt x="93980" y="486410"/>
+                </a:cubicBezTo>
+                <a:cubicBezTo>
+                  <a:pt x="122978" y="415713"/>
+                  <a:pt x="155787" y="327448"/>
+                  <a:pt x="186690" y="274320"/>
+                </a:cubicBezTo>
+                <a:cubicBezTo>
+                  <a:pt x="217593" y="221192"/>
+                  <a:pt x="247438" y="194310"/>
+                  <a:pt x="279400" y="167640"/>
+                </a:cubicBezTo>
+                <a:cubicBezTo>
+                  <a:pt x="311362" y="140970"/>
+                  <a:pt x="349673" y="132080"/>
+                  <a:pt x="378460" y="114300"/>
+                </a:cubicBezTo>
+                <a:cubicBezTo>
+                  <a:pt x="407247" y="96520"/>
+                  <a:pt x="417830" y="75353"/>
+                  <a:pt x="452120" y="60960"/>
+                </a:cubicBezTo>
+                <a:cubicBezTo>
+                  <a:pt x="486410" y="46567"/>
+                  <a:pt x="562187" y="33443"/>
+                  <a:pt x="584200" y="27940"/>
+                </a:cubicBezTo>
+              </a:path>
+            </a:pathLst>
+          </a:custGeom>
+          <a:ln w="16891">
+            <a:solidFill>
+              <a:srgbClr val="E36C09"/>
+            </a:solidFill>
+            <a:prstDash val="solid"/>
+          </a:ln>
+        </p:spPr>
+      </p:sp>
+      <p:sp>
+        <p:nvSpPr>
+          <p:cNvPr id="590" name="Shape 572"/>
+          <p:cNvSpPr/>
+          <p:nvPr/>
+        </p:nvSpPr>
+        <p:spPr>
+          <a:xfrm>
+            <a:off x="1814830" y="4698365"/>
+            <a:ext cx="685800" cy="1892300"/>
+          </a:xfrm>
+          <a:custGeom>
+            <a:avLst/>
+            <a:gdLst/>
+            <a:ahLst/>
+            <a:cxnLst/>
+            <a:rect l="l" t="t" r="r" b="b"/>
+            <a:pathLst>
+              <a:path w="685800" h="1892300">
+                <a:moveTo>
+                  <a:pt x="594360" y="27940"/>
+                </a:moveTo>
+                <a:lnTo>
+                  <a:pt x="543241" y="69751"/>
+                </a:lnTo>
+                <a:lnTo>
+                  <a:pt x="529832" y="13888"/>
+                </a:lnTo>
+                <a:close/>
+              </a:path>
+            </a:pathLst>
+          </a:custGeom>
+          <a:solidFill>
+            <a:srgbClr val="E36C09"/>
+          </a:solidFill>
+          <a:ln/>
+        </p:spPr>
+      </p:sp>
+      <p:sp>
+        <p:nvSpPr>
+          <p:cNvPr id="591" name="Shape 573"/>
+          <p:cNvSpPr/>
+          <p:nvPr/>
+        </p:nvSpPr>
         <p:spPr>
           <a:xfrm>
             <a:off x="2772410" y="4698365"/>
             <a:ext cx="685800" cy="1892300"/>
           </a:xfrm>
-          <a:prstGeom prst="rect">
-            <a:avLst/>
-          </a:prstGeom>
-        </p:spPr>
-      </p:pic>
-      <p:pic>
-        <p:nvPicPr>
-          <p:cNvPr id="583" name="Image 26" descr="/home/ahmed/Projects/ai_llm_slides/videos/deep-learning/002_transformers_part2/recreated_pptx/build/assets/s038_orangearrow.png">    </p:cNvPr>
-          <p:cNvPicPr>
-            <a:picLocks noChangeAspect="1"/>
-          </p:cNvPicPr>
-          <p:nvPr/>
-        </p:nvPicPr>
-        <p:blipFill>
-          <a:blip r:embed="rId27"/>
-          <a:stretch>
-            <a:fillRect/>
-          </a:stretch>
-        </p:blipFill>
+          <a:custGeom>
+            <a:avLst/>
+            <a:gdLst/>
+            <a:ahLst/>
+            <a:cxnLst/>
+            <a:rect l="l" t="t" r="r" b="b"/>
+            <a:pathLst>
+              <a:path w="685800" h="1892300">
+                <a:moveTo>
+                  <a:pt x="220980" y="1868170"/>
+                </a:moveTo>
+                <a:cubicBezTo>
+                  <a:pt x="201930" y="1841712"/>
+                  <a:pt x="141393" y="1787948"/>
+                  <a:pt x="106680" y="1709420"/>
+                </a:cubicBezTo>
+                <a:cubicBezTo>
+                  <a:pt x="71967" y="1630892"/>
+                  <a:pt x="28363" y="1514687"/>
+                  <a:pt x="12700" y="1397000"/>
+                </a:cubicBezTo>
+                <a:cubicBezTo>
+                  <a:pt x="-2963" y="1279313"/>
+                  <a:pt x="12700" y="1119717"/>
+                  <a:pt x="12700" y="1003300"/>
+                </a:cubicBezTo>
+                <a:cubicBezTo>
+                  <a:pt x="12700" y="886883"/>
+                  <a:pt x="-847" y="784648"/>
+                  <a:pt x="12700" y="698500"/>
+                </a:cubicBezTo>
+                <a:cubicBezTo>
+                  <a:pt x="26247" y="612352"/>
+                  <a:pt x="64982" y="557107"/>
+                  <a:pt x="93980" y="486410"/>
+                </a:cubicBezTo>
+                <a:cubicBezTo>
+                  <a:pt x="122978" y="415713"/>
+                  <a:pt x="155787" y="327448"/>
+                  <a:pt x="186690" y="274320"/>
+                </a:cubicBezTo>
+                <a:cubicBezTo>
+                  <a:pt x="217593" y="221192"/>
+                  <a:pt x="247438" y="194310"/>
+                  <a:pt x="279400" y="167640"/>
+                </a:cubicBezTo>
+                <a:cubicBezTo>
+                  <a:pt x="311362" y="140970"/>
+                  <a:pt x="349673" y="132080"/>
+                  <a:pt x="378460" y="114300"/>
+                </a:cubicBezTo>
+                <a:cubicBezTo>
+                  <a:pt x="407247" y="96520"/>
+                  <a:pt x="417830" y="75353"/>
+                  <a:pt x="452120" y="60960"/>
+                </a:cubicBezTo>
+                <a:cubicBezTo>
+                  <a:pt x="486410" y="46567"/>
+                  <a:pt x="562187" y="33443"/>
+                  <a:pt x="584200" y="27940"/>
+                </a:cubicBezTo>
+              </a:path>
+            </a:pathLst>
+          </a:custGeom>
+          <a:ln w="16891">
+            <a:solidFill>
+              <a:srgbClr val="E36C09"/>
+            </a:solidFill>
+            <a:prstDash val="solid"/>
+          </a:ln>
+        </p:spPr>
+      </p:sp>
+      <p:sp>
+        <p:nvSpPr>
+          <p:cNvPr id="592" name="Shape 574"/>
+          <p:cNvSpPr/>
+          <p:nvPr/>
+        </p:nvSpPr>
+        <p:spPr>
+          <a:xfrm>
+            <a:off x="2772410" y="4698365"/>
+            <a:ext cx="685800" cy="1892300"/>
+          </a:xfrm>
+          <a:custGeom>
+            <a:avLst/>
+            <a:gdLst/>
+            <a:ahLst/>
+            <a:cxnLst/>
+            <a:rect l="l" t="t" r="r" b="b"/>
+            <a:pathLst>
+              <a:path w="685800" h="1892300">
+                <a:moveTo>
+                  <a:pt x="594360" y="27940"/>
+                </a:moveTo>
+                <a:lnTo>
+                  <a:pt x="543241" y="69751"/>
+                </a:lnTo>
+                <a:lnTo>
+                  <a:pt x="529832" y="13888"/>
+                </a:lnTo>
+                <a:close/>
+              </a:path>
+            </a:pathLst>
+          </a:custGeom>
+          <a:solidFill>
+            <a:srgbClr val="E36C09"/>
+          </a:solidFill>
+          <a:ln/>
+        </p:spPr>
+      </p:sp>
+      <p:sp>
+        <p:nvSpPr>
+          <p:cNvPr id="593" name="Shape 575"/>
+          <p:cNvSpPr/>
+          <p:nvPr/>
+        </p:nvSpPr>
         <p:spPr>
           <a:xfrm>
             <a:off x="3737610" y="4698365"/>
             <a:ext cx="685800" cy="1892300"/>
           </a:xfrm>
-          <a:prstGeom prst="rect">
-            <a:avLst/>
-          </a:prstGeom>
-        </p:spPr>
-      </p:pic>
-      <p:pic>
-        <p:nvPicPr>
-          <p:cNvPr id="584" name="Image 27" descr="/home/ahmed/Projects/ai_llm_slides/videos/deep-learning/002_transformers_part2/recreated_pptx/build/assets/s038_orangearrow.png">    </p:cNvPr>
-          <p:cNvPicPr>
-            <a:picLocks noChangeAspect="1"/>
-          </p:cNvPicPr>
-          <p:nvPr/>
-        </p:nvPicPr>
-        <p:blipFill>
-          <a:blip r:embed="rId28"/>
-          <a:stretch>
-            <a:fillRect/>
-          </a:stretch>
-        </p:blipFill>
+          <a:custGeom>
+            <a:avLst/>
+            <a:gdLst/>
+            <a:ahLst/>
+            <a:cxnLst/>
+            <a:rect l="l" t="t" r="r" b="b"/>
+            <a:pathLst>
+              <a:path w="685800" h="1892300">
+                <a:moveTo>
+                  <a:pt x="220980" y="1868170"/>
+                </a:moveTo>
+                <a:cubicBezTo>
+                  <a:pt x="201930" y="1841712"/>
+                  <a:pt x="141393" y="1787948"/>
+                  <a:pt x="106680" y="1709420"/>
+                </a:cubicBezTo>
+                <a:cubicBezTo>
+                  <a:pt x="71967" y="1630892"/>
+                  <a:pt x="28363" y="1514687"/>
+                  <a:pt x="12700" y="1397000"/>
+                </a:cubicBezTo>
+                <a:cubicBezTo>
+                  <a:pt x="-2963" y="1279313"/>
+                  <a:pt x="12700" y="1119717"/>
+                  <a:pt x="12700" y="1003300"/>
+                </a:cubicBezTo>
+                <a:cubicBezTo>
+                  <a:pt x="12700" y="886883"/>
+                  <a:pt x="-847" y="784648"/>
+                  <a:pt x="12700" y="698500"/>
+                </a:cubicBezTo>
+                <a:cubicBezTo>
+                  <a:pt x="26247" y="612352"/>
+                  <a:pt x="64982" y="557107"/>
+                  <a:pt x="93980" y="486410"/>
+                </a:cubicBezTo>
+                <a:cubicBezTo>
+                  <a:pt x="122978" y="415713"/>
+                  <a:pt x="155787" y="327448"/>
+                  <a:pt x="186690" y="274320"/>
+                </a:cubicBezTo>
+                <a:cubicBezTo>
+                  <a:pt x="217593" y="221192"/>
+                  <a:pt x="247438" y="194310"/>
+                  <a:pt x="279400" y="167640"/>
+                </a:cubicBezTo>
+                <a:cubicBezTo>
+                  <a:pt x="311362" y="140970"/>
+                  <a:pt x="349673" y="132080"/>
+                  <a:pt x="378460" y="114300"/>
+                </a:cubicBezTo>
+                <a:cubicBezTo>
+                  <a:pt x="407247" y="96520"/>
+                  <a:pt x="417830" y="75353"/>
+                  <a:pt x="452120" y="60960"/>
+                </a:cubicBezTo>
+                <a:cubicBezTo>
+                  <a:pt x="486410" y="46567"/>
+                  <a:pt x="562187" y="33443"/>
+                  <a:pt x="584200" y="27940"/>
+                </a:cubicBezTo>
+              </a:path>
+            </a:pathLst>
+          </a:custGeom>
+          <a:ln w="16891">
+            <a:solidFill>
+              <a:srgbClr val="E36C09"/>
+            </a:solidFill>
+            <a:prstDash val="solid"/>
+          </a:ln>
+        </p:spPr>
+      </p:sp>
+      <p:sp>
+        <p:nvSpPr>
+          <p:cNvPr id="594" name="Shape 576"/>
+          <p:cNvSpPr/>
+          <p:nvPr/>
+        </p:nvSpPr>
+        <p:spPr>
+          <a:xfrm>
+            <a:off x="3737610" y="4698365"/>
+            <a:ext cx="685800" cy="1892300"/>
+          </a:xfrm>
+          <a:custGeom>
+            <a:avLst/>
+            <a:gdLst/>
+            <a:ahLst/>
+            <a:cxnLst/>
+            <a:rect l="l" t="t" r="r" b="b"/>
+            <a:pathLst>
+              <a:path w="685800" h="1892300">
+                <a:moveTo>
+                  <a:pt x="594360" y="27940"/>
+                </a:moveTo>
+                <a:lnTo>
+                  <a:pt x="543241" y="69751"/>
+                </a:lnTo>
+                <a:lnTo>
+                  <a:pt x="529832" y="13888"/>
+                </a:lnTo>
+                <a:close/>
+              </a:path>
+            </a:pathLst>
+          </a:custGeom>
+          <a:solidFill>
+            <a:srgbClr val="E36C09"/>
+          </a:solidFill>
+          <a:ln/>
+        </p:spPr>
+      </p:sp>
+      <p:sp>
+        <p:nvSpPr>
+          <p:cNvPr id="595" name="Shape 577"/>
+          <p:cNvSpPr/>
+          <p:nvPr/>
+        </p:nvSpPr>
         <p:spPr>
           <a:xfrm>
             <a:off x="4709160" y="4698365"/>
             <a:ext cx="685800" cy="1892300"/>
           </a:xfrm>
-          <a:prstGeom prst="rect">
-            <a:avLst/>
-          </a:prstGeom>
-        </p:spPr>
-      </p:pic>
-      <p:pic>
-        <p:nvPicPr>
-          <p:cNvPr id="585" name="Image 28" descr="/home/ahmed/Projects/ai_llm_slides/videos/deep-learning/002_transformers_part2/recreated_pptx/build/assets/s038_orangearrow.png">    </p:cNvPr>
-          <p:cNvPicPr>
-            <a:picLocks noChangeAspect="1"/>
-          </p:cNvPicPr>
-          <p:nvPr/>
-        </p:nvPicPr>
-        <p:blipFill>
-          <a:blip r:embed="rId29"/>
-          <a:stretch>
-            <a:fillRect/>
-          </a:stretch>
-        </p:blipFill>
+          <a:custGeom>
+            <a:avLst/>
+            <a:gdLst/>
+            <a:ahLst/>
+            <a:cxnLst/>
+            <a:rect l="l" t="t" r="r" b="b"/>
+            <a:pathLst>
+              <a:path w="685800" h="1892300">
+                <a:moveTo>
+                  <a:pt x="220980" y="1868170"/>
+                </a:moveTo>
+                <a:cubicBezTo>
+                  <a:pt x="201930" y="1841712"/>
+                  <a:pt x="141393" y="1787948"/>
+                  <a:pt x="106680" y="1709420"/>
+                </a:cubicBezTo>
+                <a:cubicBezTo>
+                  <a:pt x="71967" y="1630892"/>
+                  <a:pt x="28363" y="1514687"/>
+                  <a:pt x="12700" y="1397000"/>
+                </a:cubicBezTo>
+                <a:cubicBezTo>
+                  <a:pt x="-2963" y="1279313"/>
+                  <a:pt x="12700" y="1119717"/>
+                  <a:pt x="12700" y="1003300"/>
+                </a:cubicBezTo>
+                <a:cubicBezTo>
+                  <a:pt x="12700" y="886883"/>
+                  <a:pt x="-847" y="784648"/>
+                  <a:pt x="12700" y="698500"/>
+                </a:cubicBezTo>
+                <a:cubicBezTo>
+                  <a:pt x="26247" y="612352"/>
+                  <a:pt x="64982" y="557107"/>
+                  <a:pt x="93980" y="486410"/>
+                </a:cubicBezTo>
+                <a:cubicBezTo>
+                  <a:pt x="122978" y="415713"/>
+                  <a:pt x="155787" y="327448"/>
+                  <a:pt x="186690" y="274320"/>
+                </a:cubicBezTo>
+                <a:cubicBezTo>
+                  <a:pt x="217593" y="221192"/>
+                  <a:pt x="247438" y="194310"/>
+                  <a:pt x="279400" y="167640"/>
+                </a:cubicBezTo>
+                <a:cubicBezTo>
+                  <a:pt x="311362" y="140970"/>
+                  <a:pt x="349673" y="132080"/>
+                  <a:pt x="378460" y="114300"/>
+                </a:cubicBezTo>
+                <a:cubicBezTo>
+                  <a:pt x="407247" y="96520"/>
+                  <a:pt x="417830" y="75353"/>
+                  <a:pt x="452120" y="60960"/>
+                </a:cubicBezTo>
+                <a:cubicBezTo>
+                  <a:pt x="486410" y="46567"/>
+                  <a:pt x="562187" y="33443"/>
+                  <a:pt x="584200" y="27940"/>
+                </a:cubicBezTo>
+              </a:path>
+            </a:pathLst>
+          </a:custGeom>
+          <a:ln w="16891">
+            <a:solidFill>
+              <a:srgbClr val="E36C09"/>
+            </a:solidFill>
+            <a:prstDash val="solid"/>
+          </a:ln>
+        </p:spPr>
+      </p:sp>
+      <p:sp>
+        <p:nvSpPr>
+          <p:cNvPr id="596" name="Shape 578"/>
+          <p:cNvSpPr/>
+          <p:nvPr/>
+        </p:nvSpPr>
+        <p:spPr>
+          <a:xfrm>
+            <a:off x="4709160" y="4698365"/>
+            <a:ext cx="685800" cy="1892300"/>
+          </a:xfrm>
+          <a:custGeom>
+            <a:avLst/>
+            <a:gdLst/>
+            <a:ahLst/>
+            <a:cxnLst/>
+            <a:rect l="l" t="t" r="r" b="b"/>
+            <a:pathLst>
+              <a:path w="685800" h="1892300">
+                <a:moveTo>
+                  <a:pt x="594360" y="27940"/>
+                </a:moveTo>
+                <a:lnTo>
+                  <a:pt x="543241" y="69751"/>
+                </a:lnTo>
+                <a:lnTo>
+                  <a:pt x="529832" y="13888"/>
+                </a:lnTo>
+                <a:close/>
+              </a:path>
+            </a:pathLst>
+          </a:custGeom>
+          <a:solidFill>
+            <a:srgbClr val="E36C09"/>
+          </a:solidFill>
+          <a:ln/>
+        </p:spPr>
+      </p:sp>
+      <p:sp>
+        <p:nvSpPr>
+          <p:cNvPr id="597" name="Shape 579"/>
+          <p:cNvSpPr/>
+          <p:nvPr/>
+        </p:nvSpPr>
         <p:spPr>
           <a:xfrm>
             <a:off x="5687060" y="4698365"/>
             <a:ext cx="685800" cy="1892300"/>
           </a:xfrm>
-          <a:prstGeom prst="rect">
-            <a:avLst/>
-          </a:prstGeom>
-        </p:spPr>
-      </p:pic>
-      <p:pic>
-        <p:nvPicPr>
-          <p:cNvPr id="586" name="Image 29" descr="/home/ahmed/Projects/ai_llm_slides/videos/deep-learning/002_transformers_part2/recreated_pptx/build/assets/s038_orangearrow.png">    </p:cNvPr>
-          <p:cNvPicPr>
-            <a:picLocks noChangeAspect="1"/>
-          </p:cNvPicPr>
-          <p:nvPr/>
-        </p:nvPicPr>
-        <p:blipFill>
-          <a:blip r:embed="rId30"/>
-          <a:stretch>
-            <a:fillRect/>
-          </a:stretch>
-        </p:blipFill>
+          <a:custGeom>
+            <a:avLst/>
+            <a:gdLst/>
+            <a:ahLst/>
+            <a:cxnLst/>
+            <a:rect l="l" t="t" r="r" b="b"/>
+            <a:pathLst>
+              <a:path w="685800" h="1892300">
+                <a:moveTo>
+                  <a:pt x="220980" y="1868170"/>
+                </a:moveTo>
+                <a:cubicBezTo>
+                  <a:pt x="201930" y="1841712"/>
+                  <a:pt x="141393" y="1787948"/>
+                  <a:pt x="106680" y="1709420"/>
+                </a:cubicBezTo>
+                <a:cubicBezTo>
+                  <a:pt x="71967" y="1630892"/>
+                  <a:pt x="28363" y="1514687"/>
+                  <a:pt x="12700" y="1397000"/>
+                </a:cubicBezTo>
+                <a:cubicBezTo>
+                  <a:pt x="-2963" y="1279313"/>
+                  <a:pt x="12700" y="1119717"/>
+                  <a:pt x="12700" y="1003300"/>
+                </a:cubicBezTo>
+                <a:cubicBezTo>
+                  <a:pt x="12700" y="886883"/>
+                  <a:pt x="-847" y="784648"/>
+                  <a:pt x="12700" y="698500"/>
+                </a:cubicBezTo>
+                <a:cubicBezTo>
+                  <a:pt x="26247" y="612352"/>
+                  <a:pt x="64982" y="557107"/>
+                  <a:pt x="93980" y="486410"/>
+                </a:cubicBezTo>
+                <a:cubicBezTo>
+                  <a:pt x="122978" y="415713"/>
+                  <a:pt x="155787" y="327448"/>
+                  <a:pt x="186690" y="274320"/>
+                </a:cubicBezTo>
+                <a:cubicBezTo>
+                  <a:pt x="217593" y="221192"/>
+                  <a:pt x="247438" y="194310"/>
+                  <a:pt x="279400" y="167640"/>
+                </a:cubicBezTo>
+                <a:cubicBezTo>
+                  <a:pt x="311362" y="140970"/>
+                  <a:pt x="349673" y="132080"/>
+                  <a:pt x="378460" y="114300"/>
+                </a:cubicBezTo>
+                <a:cubicBezTo>
+                  <a:pt x="407247" y="96520"/>
+                  <a:pt x="417830" y="75353"/>
+                  <a:pt x="452120" y="60960"/>
+                </a:cubicBezTo>
+                <a:cubicBezTo>
+                  <a:pt x="486410" y="46567"/>
+                  <a:pt x="562187" y="33443"/>
+                  <a:pt x="584200" y="27940"/>
+                </a:cubicBezTo>
+              </a:path>
+            </a:pathLst>
+          </a:custGeom>
+          <a:ln w="16891">
+            <a:solidFill>
+              <a:srgbClr val="E36C09"/>
+            </a:solidFill>
+            <a:prstDash val="solid"/>
+          </a:ln>
+        </p:spPr>
+      </p:sp>
+      <p:sp>
+        <p:nvSpPr>
+          <p:cNvPr id="598" name="Shape 580"/>
+          <p:cNvSpPr/>
+          <p:nvPr/>
+        </p:nvSpPr>
+        <p:spPr>
+          <a:xfrm>
+            <a:off x="5687060" y="4698365"/>
+            <a:ext cx="685800" cy="1892300"/>
+          </a:xfrm>
+          <a:custGeom>
+            <a:avLst/>
+            <a:gdLst/>
+            <a:ahLst/>
+            <a:cxnLst/>
+            <a:rect l="l" t="t" r="r" b="b"/>
+            <a:pathLst>
+              <a:path w="685800" h="1892300">
+                <a:moveTo>
+                  <a:pt x="594360" y="27940"/>
+                </a:moveTo>
+                <a:lnTo>
+                  <a:pt x="543241" y="69751"/>
+                </a:lnTo>
+                <a:lnTo>
+                  <a:pt x="529832" y="13888"/>
+                </a:lnTo>
+                <a:close/>
+              </a:path>
+            </a:pathLst>
+          </a:custGeom>
+          <a:solidFill>
+            <a:srgbClr val="E36C09"/>
+          </a:solidFill>
+          <a:ln/>
+        </p:spPr>
+      </p:sp>
+      <p:sp>
+        <p:nvSpPr>
+          <p:cNvPr id="599" name="Shape 581"/>
+          <p:cNvSpPr/>
+          <p:nvPr/>
+        </p:nvSpPr>
         <p:spPr>
           <a:xfrm>
             <a:off x="6630670" y="4698365"/>
             <a:ext cx="685800" cy="1892300"/>
           </a:xfrm>
-          <a:prstGeom prst="rect">
-            <a:avLst/>
-          </a:prstGeom>
-        </p:spPr>
-      </p:pic>
-      <p:pic>
-        <p:nvPicPr>
-          <p:cNvPr id="587" name="Image 30" descr="/home/ahmed/Projects/ai_llm_slides/videos/deep-learning/002_transformers_part2/recreated_pptx/build/assets/s038_orangearrow.png">    </p:cNvPr>
-          <p:cNvPicPr>
-            <a:picLocks noChangeAspect="1"/>
-          </p:cNvPicPr>
-          <p:nvPr/>
-        </p:nvPicPr>
-        <p:blipFill>
-          <a:blip r:embed="rId31"/>
-          <a:stretch>
-            <a:fillRect/>
-          </a:stretch>
-        </p:blipFill>
+          <a:custGeom>
+            <a:avLst/>
+            <a:gdLst/>
+            <a:ahLst/>
+            <a:cxnLst/>
+            <a:rect l="l" t="t" r="r" b="b"/>
+            <a:pathLst>
+              <a:path w="685800" h="1892300">
+                <a:moveTo>
+                  <a:pt x="220980" y="1868170"/>
+                </a:moveTo>
+                <a:cubicBezTo>
+                  <a:pt x="201930" y="1841712"/>
+                  <a:pt x="141393" y="1787948"/>
+                  <a:pt x="106680" y="1709420"/>
+                </a:cubicBezTo>
+                <a:cubicBezTo>
+                  <a:pt x="71967" y="1630892"/>
+                  <a:pt x="28363" y="1514687"/>
+                  <a:pt x="12700" y="1397000"/>
+                </a:cubicBezTo>
+                <a:cubicBezTo>
+                  <a:pt x="-2963" y="1279313"/>
+                  <a:pt x="12700" y="1119717"/>
+                  <a:pt x="12700" y="1003300"/>
+                </a:cubicBezTo>
+                <a:cubicBezTo>
+                  <a:pt x="12700" y="886883"/>
+                  <a:pt x="-847" y="784648"/>
+                  <a:pt x="12700" y="698500"/>
+                </a:cubicBezTo>
+                <a:cubicBezTo>
+                  <a:pt x="26247" y="612352"/>
+                  <a:pt x="64982" y="557107"/>
+                  <a:pt x="93980" y="486410"/>
+                </a:cubicBezTo>
+                <a:cubicBezTo>
+                  <a:pt x="122978" y="415713"/>
+                  <a:pt x="155787" y="327448"/>
+                  <a:pt x="186690" y="274320"/>
+                </a:cubicBezTo>
+                <a:cubicBezTo>
+                  <a:pt x="217593" y="221192"/>
+                  <a:pt x="247438" y="194310"/>
+                  <a:pt x="279400" y="167640"/>
+                </a:cubicBezTo>
+                <a:cubicBezTo>
+                  <a:pt x="311362" y="140970"/>
+                  <a:pt x="349673" y="132080"/>
+                  <a:pt x="378460" y="114300"/>
+                </a:cubicBezTo>
+                <a:cubicBezTo>
+                  <a:pt x="407247" y="96520"/>
+                  <a:pt x="417830" y="75353"/>
+                  <a:pt x="452120" y="60960"/>
+                </a:cubicBezTo>
+                <a:cubicBezTo>
+                  <a:pt x="486410" y="46567"/>
+                  <a:pt x="562187" y="33443"/>
+                  <a:pt x="584200" y="27940"/>
+                </a:cubicBezTo>
+              </a:path>
+            </a:pathLst>
+          </a:custGeom>
+          <a:ln w="16891">
+            <a:solidFill>
+              <a:srgbClr val="E36C09"/>
+            </a:solidFill>
+            <a:prstDash val="solid"/>
+          </a:ln>
+        </p:spPr>
+      </p:sp>
+      <p:sp>
+        <p:nvSpPr>
+          <p:cNvPr id="600" name="Shape 582"/>
+          <p:cNvSpPr/>
+          <p:nvPr/>
+        </p:nvSpPr>
+        <p:spPr>
+          <a:xfrm>
+            <a:off x="6630670" y="4698365"/>
+            <a:ext cx="685800" cy="1892300"/>
+          </a:xfrm>
+          <a:custGeom>
+            <a:avLst/>
+            <a:gdLst/>
+            <a:ahLst/>
+            <a:cxnLst/>
+            <a:rect l="l" t="t" r="r" b="b"/>
+            <a:pathLst>
+              <a:path w="685800" h="1892300">
+                <a:moveTo>
+                  <a:pt x="594360" y="27940"/>
+                </a:moveTo>
+                <a:lnTo>
+                  <a:pt x="543241" y="69751"/>
+                </a:lnTo>
+                <a:lnTo>
+                  <a:pt x="529832" y="13888"/>
+                </a:lnTo>
+                <a:close/>
+              </a:path>
+            </a:pathLst>
+          </a:custGeom>
+          <a:solidFill>
+            <a:srgbClr val="E36C09"/>
+          </a:solidFill>
+          <a:ln/>
+        </p:spPr>
+      </p:sp>
+      <p:sp>
+        <p:nvSpPr>
+          <p:cNvPr id="601" name="Shape 583"/>
+          <p:cNvSpPr/>
+          <p:nvPr/>
+        </p:nvSpPr>
         <p:spPr>
           <a:xfrm>
             <a:off x="9141460" y="4698365"/>
             <a:ext cx="685800" cy="1892300"/>
           </a:xfrm>
-          <a:prstGeom prst="rect">
-            <a:avLst/>
-          </a:prstGeom>
-        </p:spPr>
-      </p:pic>
-      <p:pic>
-        <p:nvPicPr>
-          <p:cNvPr id="588" name="Image 31" descr="/home/ahmed/Projects/ai_llm_slides/videos/deep-learning/002_transformers_part2/recreated_pptx/build/assets/s038_orangearrow.png">    </p:cNvPr>
-          <p:cNvPicPr>
-            <a:picLocks noChangeAspect="1"/>
-          </p:cNvPicPr>
-          <p:nvPr/>
-        </p:nvPicPr>
-        <p:blipFill>
-          <a:blip r:embed="rId32"/>
-          <a:stretch>
-            <a:fillRect/>
-          </a:stretch>
-        </p:blipFill>
+          <a:custGeom>
+            <a:avLst/>
+            <a:gdLst/>
+            <a:ahLst/>
+            <a:cxnLst/>
+            <a:rect l="l" t="t" r="r" b="b"/>
+            <a:pathLst>
+              <a:path w="685800" h="1892300">
+                <a:moveTo>
+                  <a:pt x="220980" y="1868170"/>
+                </a:moveTo>
+                <a:cubicBezTo>
+                  <a:pt x="201930" y="1841712"/>
+                  <a:pt x="141393" y="1787948"/>
+                  <a:pt x="106680" y="1709420"/>
+                </a:cubicBezTo>
+                <a:cubicBezTo>
+                  <a:pt x="71967" y="1630892"/>
+                  <a:pt x="28363" y="1514687"/>
+                  <a:pt x="12700" y="1397000"/>
+                </a:cubicBezTo>
+                <a:cubicBezTo>
+                  <a:pt x="-2963" y="1279313"/>
+                  <a:pt x="12700" y="1119717"/>
+                  <a:pt x="12700" y="1003300"/>
+                </a:cubicBezTo>
+                <a:cubicBezTo>
+                  <a:pt x="12700" y="886883"/>
+                  <a:pt x="-847" y="784648"/>
+                  <a:pt x="12700" y="698500"/>
+                </a:cubicBezTo>
+                <a:cubicBezTo>
+                  <a:pt x="26247" y="612352"/>
+                  <a:pt x="64982" y="557107"/>
+                  <a:pt x="93980" y="486410"/>
+                </a:cubicBezTo>
+                <a:cubicBezTo>
+                  <a:pt x="122978" y="415713"/>
+                  <a:pt x="155787" y="327448"/>
+                  <a:pt x="186690" y="274320"/>
+                </a:cubicBezTo>
+                <a:cubicBezTo>
+                  <a:pt x="217593" y="221192"/>
+                  <a:pt x="247438" y="194310"/>
+                  <a:pt x="279400" y="167640"/>
+                </a:cubicBezTo>
+                <a:cubicBezTo>
+                  <a:pt x="311362" y="140970"/>
+                  <a:pt x="349673" y="132080"/>
+                  <a:pt x="378460" y="114300"/>
+                </a:cubicBezTo>
+                <a:cubicBezTo>
+                  <a:pt x="407247" y="96520"/>
+                  <a:pt x="417830" y="75353"/>
+                  <a:pt x="452120" y="60960"/>
+                </a:cubicBezTo>
+                <a:cubicBezTo>
+                  <a:pt x="486410" y="46567"/>
+                  <a:pt x="562187" y="33443"/>
+                  <a:pt x="584200" y="27940"/>
+                </a:cubicBezTo>
+              </a:path>
+            </a:pathLst>
+          </a:custGeom>
+          <a:ln w="16891">
+            <a:solidFill>
+              <a:srgbClr val="E36C09"/>
+            </a:solidFill>
+            <a:prstDash val="solid"/>
+          </a:ln>
+        </p:spPr>
+      </p:sp>
+      <p:sp>
+        <p:nvSpPr>
+          <p:cNvPr id="602" name="Shape 584"/>
+          <p:cNvSpPr/>
+          <p:nvPr/>
+        </p:nvSpPr>
+        <p:spPr>
+          <a:xfrm>
+            <a:off x="9141460" y="4698365"/>
+            <a:ext cx="685800" cy="1892300"/>
+          </a:xfrm>
+          <a:custGeom>
+            <a:avLst/>
+            <a:gdLst/>
+            <a:ahLst/>
+            <a:cxnLst/>
+            <a:rect l="l" t="t" r="r" b="b"/>
+            <a:pathLst>
+              <a:path w="685800" h="1892300">
+                <a:moveTo>
+                  <a:pt x="594360" y="27940"/>
+                </a:moveTo>
+                <a:lnTo>
+                  <a:pt x="543241" y="69751"/>
+                </a:lnTo>
+                <a:lnTo>
+                  <a:pt x="529832" y="13888"/>
+                </a:lnTo>
+                <a:close/>
+              </a:path>
+            </a:pathLst>
+          </a:custGeom>
+          <a:solidFill>
+            <a:srgbClr val="E36C09"/>
+          </a:solidFill>
+          <a:ln/>
+        </p:spPr>
+      </p:sp>
+      <p:sp>
+        <p:nvSpPr>
+          <p:cNvPr id="603" name="Shape 585"/>
+          <p:cNvSpPr/>
+          <p:nvPr/>
+        </p:nvSpPr>
         <p:spPr>
           <a:xfrm>
             <a:off x="10119360" y="4698365"/>
             <a:ext cx="685800" cy="1892300"/>
           </a:xfrm>
-          <a:prstGeom prst="rect">
-            <a:avLst/>
-          </a:prstGeom>
-        </p:spPr>
-      </p:pic>
-      <p:sp>
-        <p:nvSpPr>
-          <p:cNvPr id="589" name="Shape 555"/>
+          <a:custGeom>
+            <a:avLst/>
+            <a:gdLst/>
+            <a:ahLst/>
+            <a:cxnLst/>
+            <a:rect l="l" t="t" r="r" b="b"/>
+            <a:pathLst>
+              <a:path w="685800" h="1892300">
+                <a:moveTo>
+                  <a:pt x="220980" y="1868170"/>
+                </a:moveTo>
+                <a:cubicBezTo>
+                  <a:pt x="201930" y="1841712"/>
+                  <a:pt x="141393" y="1787948"/>
+                  <a:pt x="106680" y="1709420"/>
+                </a:cubicBezTo>
+                <a:cubicBezTo>
+                  <a:pt x="71967" y="1630892"/>
+                  <a:pt x="28363" y="1514687"/>
+                  <a:pt x="12700" y="1397000"/>
+                </a:cubicBezTo>
+                <a:cubicBezTo>
+                  <a:pt x="-2963" y="1279313"/>
+                  <a:pt x="12700" y="1119717"/>
+                  <a:pt x="12700" y="1003300"/>
+                </a:cubicBezTo>
+                <a:cubicBezTo>
+                  <a:pt x="12700" y="886883"/>
+                  <a:pt x="-847" y="784648"/>
+                  <a:pt x="12700" y="698500"/>
+                </a:cubicBezTo>
+                <a:cubicBezTo>
+                  <a:pt x="26247" y="612352"/>
+                  <a:pt x="64982" y="557107"/>
+                  <a:pt x="93980" y="486410"/>
+                </a:cubicBezTo>
+                <a:cubicBezTo>
+                  <a:pt x="122978" y="415713"/>
+                  <a:pt x="155787" y="327448"/>
+                  <a:pt x="186690" y="274320"/>
+                </a:cubicBezTo>
+                <a:cubicBezTo>
+                  <a:pt x="217593" y="221192"/>
+                  <a:pt x="247438" y="194310"/>
+                  <a:pt x="279400" y="167640"/>
+                </a:cubicBezTo>
+                <a:cubicBezTo>
+                  <a:pt x="311362" y="140970"/>
+                  <a:pt x="349673" y="132080"/>
+                  <a:pt x="378460" y="114300"/>
+                </a:cubicBezTo>
+                <a:cubicBezTo>
+                  <a:pt x="407247" y="96520"/>
+                  <a:pt x="417830" y="75353"/>
+                  <a:pt x="452120" y="60960"/>
+                </a:cubicBezTo>
+                <a:cubicBezTo>
+                  <a:pt x="486410" y="46567"/>
+                  <a:pt x="562187" y="33443"/>
+                  <a:pt x="584200" y="27940"/>
+                </a:cubicBezTo>
+              </a:path>
+            </a:pathLst>
+          </a:custGeom>
+          <a:ln w="16891">
+            <a:solidFill>
+              <a:srgbClr val="E36C09"/>
+            </a:solidFill>
+            <a:prstDash val="solid"/>
+          </a:ln>
+        </p:spPr>
+      </p:sp>
+      <p:sp>
+        <p:nvSpPr>
+          <p:cNvPr id="604" name="Shape 586"/>
+          <p:cNvSpPr/>
+          <p:nvPr/>
+        </p:nvSpPr>
+        <p:spPr>
+          <a:xfrm>
+            <a:off x="10119360" y="4698365"/>
+            <a:ext cx="685800" cy="1892300"/>
+          </a:xfrm>
+          <a:custGeom>
+            <a:avLst/>
+            <a:gdLst/>
+            <a:ahLst/>
+            <a:cxnLst/>
+            <a:rect l="l" t="t" r="r" b="b"/>
+            <a:pathLst>
+              <a:path w="685800" h="1892300">
+                <a:moveTo>
+                  <a:pt x="594360" y="27940"/>
+                </a:moveTo>
+                <a:lnTo>
+                  <a:pt x="543241" y="69751"/>
+                </a:lnTo>
+                <a:lnTo>
+                  <a:pt x="529832" y="13888"/>
+                </a:lnTo>
+                <a:close/>
+              </a:path>
+            </a:pathLst>
+          </a:custGeom>
+          <a:solidFill>
+            <a:srgbClr val="E36C09"/>
+          </a:solidFill>
+          <a:ln/>
+        </p:spPr>
+      </p:sp>
+      <p:sp>
+        <p:nvSpPr>
+          <p:cNvPr id="605" name="Shape 587"/>
           <p:cNvSpPr/>
           <p:nvPr/>
         </p:nvSpPr>
@@ -15610,7 +17162,7 @@
       </p:sp>
       <p:sp>
         <p:nvSpPr>
-          <p:cNvPr id="590" name="Shape 556"/>
+          <p:cNvPr id="606" name="Shape 588"/>
           <p:cNvSpPr/>
           <p:nvPr/>
         </p:nvSpPr>
@@ -15635,7 +17187,7 @@
       </p:sp>
       <p:sp>
         <p:nvSpPr>
-          <p:cNvPr id="591" name="Shape 557"/>
+          <p:cNvPr id="607" name="Shape 589"/>
           <p:cNvSpPr/>
           <p:nvPr/>
         </p:nvSpPr>
@@ -15660,7 +17212,7 @@
       </p:sp>
       <p:sp>
         <p:nvSpPr>
-          <p:cNvPr id="592" name="Shape 558"/>
+          <p:cNvPr id="608" name="Shape 590"/>
           <p:cNvSpPr/>
           <p:nvPr/>
         </p:nvSpPr>
@@ -15685,7 +17237,7 @@
       </p:sp>
       <p:sp>
         <p:nvSpPr>
-          <p:cNvPr id="593" name="Text 559"/>
+          <p:cNvPr id="609" name="Text 591"/>
           <p:cNvSpPr/>
           <p:nvPr/>
         </p:nvSpPr>
@@ -15744,7 +17296,7 @@
       </p:sp>
       <p:sp>
         <p:nvSpPr>
-          <p:cNvPr id="594" name="Shape 560"/>
+          <p:cNvPr id="610" name="Shape 592"/>
           <p:cNvSpPr/>
           <p:nvPr/>
         </p:nvSpPr>
@@ -15769,7 +17321,7 @@
       </p:sp>
       <p:sp>
         <p:nvSpPr>
-          <p:cNvPr id="595" name="Shape 561"/>
+          <p:cNvPr id="611" name="Shape 593"/>
           <p:cNvSpPr/>
           <p:nvPr/>
         </p:nvSpPr>
@@ -15794,7 +17346,7 @@
       </p:sp>
       <p:sp>
         <p:nvSpPr>
-          <p:cNvPr id="596" name="Shape 562"/>
+          <p:cNvPr id="612" name="Shape 594"/>
           <p:cNvSpPr/>
           <p:nvPr/>
         </p:nvSpPr>
@@ -15819,7 +17371,7 @@
       </p:sp>
       <p:sp>
         <p:nvSpPr>
-          <p:cNvPr id="597" name="Shape 563"/>
+          <p:cNvPr id="613" name="Shape 595"/>
           <p:cNvSpPr/>
           <p:nvPr/>
         </p:nvSpPr>
@@ -15844,7 +17396,7 @@
       </p:sp>
       <p:sp>
         <p:nvSpPr>
-          <p:cNvPr id="598" name="Text 564"/>
+          <p:cNvPr id="614" name="Text 596"/>
           <p:cNvSpPr/>
           <p:nvPr/>
         </p:nvSpPr>
@@ -15903,7 +17455,7 @@
       </p:sp>
       <p:sp>
         <p:nvSpPr>
-          <p:cNvPr id="599" name="Shape 565"/>
+          <p:cNvPr id="615" name="Shape 597"/>
           <p:cNvSpPr/>
           <p:nvPr/>
         </p:nvSpPr>
@@ -15928,7 +17480,7 @@
       </p:sp>
       <p:sp>
         <p:nvSpPr>
-          <p:cNvPr id="600" name="Shape 566"/>
+          <p:cNvPr id="616" name="Shape 598"/>
           <p:cNvSpPr/>
           <p:nvPr/>
         </p:nvSpPr>
@@ -15953,7 +17505,7 @@
       </p:sp>
       <p:sp>
         <p:nvSpPr>
-          <p:cNvPr id="601" name="Shape 567"/>
+          <p:cNvPr id="617" name="Shape 599"/>
           <p:cNvSpPr/>
           <p:nvPr/>
         </p:nvSpPr>
@@ -15978,7 +17530,7 @@
       </p:sp>
       <p:sp>
         <p:nvSpPr>
-          <p:cNvPr id="602" name="Shape 568"/>
+          <p:cNvPr id="618" name="Shape 600"/>
           <p:cNvSpPr/>
           <p:nvPr/>
         </p:nvSpPr>
@@ -16003,7 +17555,7 @@
       </p:sp>
       <p:sp>
         <p:nvSpPr>
-          <p:cNvPr id="603" name="Text 569"/>
+          <p:cNvPr id="619" name="Text 601"/>
           <p:cNvSpPr/>
           <p:nvPr/>
         </p:nvSpPr>
@@ -16062,7 +17614,7 @@
       </p:sp>
       <p:sp>
         <p:nvSpPr>
-          <p:cNvPr id="604" name="Shape 570"/>
+          <p:cNvPr id="620" name="Shape 602"/>
           <p:cNvSpPr/>
           <p:nvPr/>
         </p:nvSpPr>
@@ -16087,7 +17639,7 @@
       </p:sp>
       <p:sp>
         <p:nvSpPr>
-          <p:cNvPr id="605" name="Shape 571"/>
+          <p:cNvPr id="621" name="Shape 603"/>
           <p:cNvSpPr/>
           <p:nvPr/>
         </p:nvSpPr>
@@ -16112,7 +17664,7 @@
       </p:sp>
       <p:sp>
         <p:nvSpPr>
-          <p:cNvPr id="606" name="Shape 572"/>
+          <p:cNvPr id="622" name="Shape 604"/>
           <p:cNvSpPr/>
           <p:nvPr/>
         </p:nvSpPr>
@@ -16137,7 +17689,7 @@
       </p:sp>
       <p:sp>
         <p:nvSpPr>
-          <p:cNvPr id="607" name="Shape 573"/>
+          <p:cNvPr id="623" name="Shape 605"/>
           <p:cNvSpPr/>
           <p:nvPr/>
         </p:nvSpPr>
@@ -16162,7 +17714,7 @@
       </p:sp>
       <p:sp>
         <p:nvSpPr>
-          <p:cNvPr id="608" name="Text 574"/>
+          <p:cNvPr id="624" name="Text 606"/>
           <p:cNvSpPr/>
           <p:nvPr/>
         </p:nvSpPr>
@@ -16221,7 +17773,7 @@
       </p:sp>
       <p:sp>
         <p:nvSpPr>
-          <p:cNvPr id="609" name="Shape 575"/>
+          <p:cNvPr id="625" name="Shape 607"/>
           <p:cNvSpPr/>
           <p:nvPr/>
         </p:nvSpPr>
@@ -16246,7 +17798,7 @@
       </p:sp>
       <p:sp>
         <p:nvSpPr>
-          <p:cNvPr id="610" name="Shape 576"/>
+          <p:cNvPr id="626" name="Shape 608"/>
           <p:cNvSpPr/>
           <p:nvPr/>
         </p:nvSpPr>
@@ -16271,7 +17823,7 @@
       </p:sp>
       <p:sp>
         <p:nvSpPr>
-          <p:cNvPr id="611" name="Shape 577"/>
+          <p:cNvPr id="627" name="Shape 609"/>
           <p:cNvSpPr/>
           <p:nvPr/>
         </p:nvSpPr>
@@ -16296,7 +17848,7 @@
       </p:sp>
       <p:sp>
         <p:nvSpPr>
-          <p:cNvPr id="612" name="Shape 578"/>
+          <p:cNvPr id="628" name="Shape 610"/>
           <p:cNvSpPr/>
           <p:nvPr/>
         </p:nvSpPr>
@@ -16321,7 +17873,7 @@
       </p:sp>
       <p:sp>
         <p:nvSpPr>
-          <p:cNvPr id="613" name="Text 579"/>
+          <p:cNvPr id="629" name="Text 611"/>
           <p:cNvSpPr/>
           <p:nvPr/>
         </p:nvSpPr>
@@ -16380,7 +17932,7 @@
       </p:sp>
       <p:sp>
         <p:nvSpPr>
-          <p:cNvPr id="614" name="Shape 580"/>
+          <p:cNvPr id="630" name="Shape 612"/>
           <p:cNvSpPr/>
           <p:nvPr/>
         </p:nvSpPr>
@@ -16405,7 +17957,7 @@
       </p:sp>
       <p:sp>
         <p:nvSpPr>
-          <p:cNvPr id="615" name="Shape 581"/>
+          <p:cNvPr id="631" name="Shape 613"/>
           <p:cNvSpPr/>
           <p:nvPr/>
         </p:nvSpPr>
@@ -16430,7 +17982,7 @@
       </p:sp>
       <p:sp>
         <p:nvSpPr>
-          <p:cNvPr id="616" name="Shape 582"/>
+          <p:cNvPr id="632" name="Shape 614"/>
           <p:cNvSpPr/>
           <p:nvPr/>
         </p:nvSpPr>
@@ -16455,7 +18007,7 @@
       </p:sp>
       <p:sp>
         <p:nvSpPr>
-          <p:cNvPr id="617" name="Shape 583"/>
+          <p:cNvPr id="633" name="Shape 615"/>
           <p:cNvSpPr/>
           <p:nvPr/>
         </p:nvSpPr>
@@ -16480,7 +18032,7 @@
       </p:sp>
       <p:sp>
         <p:nvSpPr>
-          <p:cNvPr id="618" name="Text 584"/>
+          <p:cNvPr id="634" name="Text 616"/>
           <p:cNvSpPr/>
           <p:nvPr/>
         </p:nvSpPr>
@@ -16539,7 +18091,7 @@
       </p:sp>
       <p:sp>
         <p:nvSpPr>
-          <p:cNvPr id="619" name="Shape 585"/>
+          <p:cNvPr id="635" name="Shape 617"/>
           <p:cNvSpPr/>
           <p:nvPr/>
         </p:nvSpPr>
@@ -16564,7 +18116,7 @@
       </p:sp>
       <p:sp>
         <p:nvSpPr>
-          <p:cNvPr id="620" name="Shape 586"/>
+          <p:cNvPr id="636" name="Shape 618"/>
           <p:cNvSpPr/>
           <p:nvPr/>
         </p:nvSpPr>
@@ -16589,7 +18141,7 @@
       </p:sp>
       <p:sp>
         <p:nvSpPr>
-          <p:cNvPr id="621" name="Shape 587"/>
+          <p:cNvPr id="637" name="Shape 619"/>
           <p:cNvSpPr/>
           <p:nvPr/>
         </p:nvSpPr>
@@ -16614,7 +18166,7 @@
       </p:sp>
       <p:sp>
         <p:nvSpPr>
-          <p:cNvPr id="622" name="Shape 588"/>
+          <p:cNvPr id="638" name="Shape 620"/>
           <p:cNvSpPr/>
           <p:nvPr/>
         </p:nvSpPr>
@@ -16639,7 +18191,7 @@
       </p:sp>
       <p:sp>
         <p:nvSpPr>
-          <p:cNvPr id="623" name="Text 589"/>
+          <p:cNvPr id="639" name="Text 621"/>
           <p:cNvSpPr/>
           <p:nvPr/>
         </p:nvSpPr>
@@ -16698,7 +18250,7 @@
       </p:sp>
       <p:sp>
         <p:nvSpPr>
-          <p:cNvPr id="624" name="Shape 590"/>
+          <p:cNvPr id="640" name="Shape 622"/>
           <p:cNvSpPr/>
           <p:nvPr/>
         </p:nvSpPr>
@@ -16723,7 +18275,7 @@
       </p:sp>
       <p:sp>
         <p:nvSpPr>
-          <p:cNvPr id="625" name="Shape 591"/>
+          <p:cNvPr id="641" name="Shape 623"/>
           <p:cNvSpPr/>
           <p:nvPr/>
         </p:nvSpPr>
@@ -16748,7 +18300,7 @@
       </p:sp>
       <p:sp>
         <p:nvSpPr>
-          <p:cNvPr id="626" name="Shape 592"/>
+          <p:cNvPr id="642" name="Shape 624"/>
           <p:cNvSpPr/>
           <p:nvPr/>
         </p:nvSpPr>
@@ -16773,7 +18325,7 @@
       </p:sp>
       <p:sp>
         <p:nvSpPr>
-          <p:cNvPr id="627" name="Shape 593"/>
+          <p:cNvPr id="643" name="Shape 625"/>
           <p:cNvSpPr/>
           <p:nvPr/>
         </p:nvSpPr>
@@ -16798,7 +18350,7 @@
       </p:sp>
       <p:sp>
         <p:nvSpPr>
-          <p:cNvPr id="628" name="Text 594"/>
+          <p:cNvPr id="644" name="Text 626"/>
           <p:cNvSpPr/>
           <p:nvPr/>
         </p:nvSpPr>
@@ -16857,7 +18409,7 @@
       </p:sp>
       <p:sp>
         <p:nvSpPr>
-          <p:cNvPr id="629" name="Shape 595"/>
+          <p:cNvPr id="645" name="Shape 627"/>
           <p:cNvSpPr/>
           <p:nvPr/>
         </p:nvSpPr>
@@ -16877,7 +18429,7 @@
       </p:sp>
       <p:sp>
         <p:nvSpPr>
-          <p:cNvPr id="630" name="Shape 596"/>
+          <p:cNvPr id="646" name="Shape 628"/>
           <p:cNvSpPr/>
           <p:nvPr/>
         </p:nvSpPr>
@@ -16897,7 +18449,7 @@
       </p:sp>
       <p:sp>
         <p:nvSpPr>
-          <p:cNvPr id="631" name="Shape 597"/>
+          <p:cNvPr id="647" name="Shape 629"/>
           <p:cNvSpPr/>
           <p:nvPr/>
         </p:nvSpPr>
@@ -16917,7 +18469,7 @@
       </p:sp>
       <p:sp>
         <p:nvSpPr>
-          <p:cNvPr id="632" name="Shape 598"/>
+          <p:cNvPr id="648" name="Shape 630"/>
           <p:cNvSpPr/>
           <p:nvPr/>
         </p:nvSpPr>
@@ -16937,7 +18489,7 @@
       </p:sp>
       <p:sp>
         <p:nvSpPr>
-          <p:cNvPr id="633" name="Shape 599"/>
+          <p:cNvPr id="649" name="Shape 631"/>
           <p:cNvSpPr/>
           <p:nvPr/>
         </p:nvSpPr>
@@ -16957,7 +18509,7 @@
       </p:sp>
       <p:sp>
         <p:nvSpPr>
-          <p:cNvPr id="634" name="Shape 600"/>
+          <p:cNvPr id="650" name="Shape 632"/>
           <p:cNvSpPr/>
           <p:nvPr/>
         </p:nvSpPr>
@@ -16982,7 +18534,7 @@
       </p:sp>
       <p:sp>
         <p:nvSpPr>
-          <p:cNvPr id="635" name="Text 601"/>
+          <p:cNvPr id="651" name="Text 633"/>
           <p:cNvSpPr/>
           <p:nvPr/>
         </p:nvSpPr>
@@ -17021,7 +18573,7 @@
       </p:sp>
       <p:sp>
         <p:nvSpPr>
-          <p:cNvPr id="636" name="Shape 602"/>
+          <p:cNvPr id="652" name="Shape 634"/>
           <p:cNvSpPr/>
           <p:nvPr/>
         </p:nvSpPr>
@@ -17046,7 +18598,7 @@
       </p:sp>
       <p:sp>
         <p:nvSpPr>
-          <p:cNvPr id="637" name="Text 603"/>
+          <p:cNvPr id="653" name="Text 635"/>
           <p:cNvSpPr/>
           <p:nvPr/>
         </p:nvSpPr>
@@ -17085,7 +18637,7 @@
       </p:sp>
       <p:sp>
         <p:nvSpPr>
-          <p:cNvPr id="638" name="Shape 604"/>
+          <p:cNvPr id="654" name="Shape 636"/>
           <p:cNvSpPr/>
           <p:nvPr/>
         </p:nvSpPr>
@@ -17110,7 +18662,7 @@
       </p:sp>
       <p:sp>
         <p:nvSpPr>
-          <p:cNvPr id="639" name="Text 605"/>
+          <p:cNvPr id="655" name="Text 637"/>
           <p:cNvSpPr/>
           <p:nvPr/>
         </p:nvSpPr>
@@ -17149,7 +18701,7 @@
       </p:sp>
       <p:sp>
         <p:nvSpPr>
-          <p:cNvPr id="640" name="Shape 606"/>
+          <p:cNvPr id="656" name="Shape 638"/>
           <p:cNvSpPr/>
           <p:nvPr/>
         </p:nvSpPr>
@@ -17174,7 +18726,7 @@
       </p:sp>
       <p:sp>
         <p:nvSpPr>
-          <p:cNvPr id="641" name="Text 607"/>
+          <p:cNvPr id="657" name="Text 639"/>
           <p:cNvSpPr/>
           <p:nvPr/>
         </p:nvSpPr>
@@ -17213,7 +18765,7 @@
       </p:sp>
       <p:sp>
         <p:nvSpPr>
-          <p:cNvPr id="642" name="Shape 608"/>
+          <p:cNvPr id="658" name="Shape 640"/>
           <p:cNvSpPr/>
           <p:nvPr/>
         </p:nvSpPr>
@@ -17238,7 +18790,7 @@
       </p:sp>
       <p:sp>
         <p:nvSpPr>
-          <p:cNvPr id="643" name="Text 609"/>
+          <p:cNvPr id="659" name="Text 641"/>
           <p:cNvSpPr/>
           <p:nvPr/>
         </p:nvSpPr>
@@ -17277,7 +18829,7 @@
       </p:sp>
       <p:sp>
         <p:nvSpPr>
-          <p:cNvPr id="644" name="Shape 610"/>
+          <p:cNvPr id="660" name="Shape 642"/>
           <p:cNvSpPr/>
           <p:nvPr/>
         </p:nvSpPr>
@@ -17302,7 +18854,7 @@
       </p:sp>
       <p:sp>
         <p:nvSpPr>
-          <p:cNvPr id="645" name="Text 611"/>
+          <p:cNvPr id="661" name="Text 643"/>
           <p:cNvSpPr/>
           <p:nvPr/>
         </p:nvSpPr>
@@ -17341,7 +18893,7 @@
       </p:sp>
       <p:sp>
         <p:nvSpPr>
-          <p:cNvPr id="646" name="Shape 612"/>
+          <p:cNvPr id="662" name="Shape 644"/>
           <p:cNvSpPr/>
           <p:nvPr/>
         </p:nvSpPr>
@@ -17366,7 +18918,7 @@
       </p:sp>
       <p:sp>
         <p:nvSpPr>
-          <p:cNvPr id="647" name="Text 613"/>
+          <p:cNvPr id="663" name="Text 645"/>
           <p:cNvSpPr/>
           <p:nvPr/>
         </p:nvSpPr>
@@ -17405,7 +18957,7 @@
       </p:sp>
       <p:sp>
         <p:nvSpPr>
-          <p:cNvPr id="648" name="Shape 614"/>
+          <p:cNvPr id="664" name="Shape 646"/>
           <p:cNvSpPr/>
           <p:nvPr/>
         </p:nvSpPr>
@@ -17430,7 +18982,7 @@
       </p:sp>
       <p:sp>
         <p:nvSpPr>
-          <p:cNvPr id="649" name="Text 615"/>
+          <p:cNvPr id="665" name="Text 647"/>
           <p:cNvSpPr/>
           <p:nvPr/>
         </p:nvSpPr>
@@ -17469,7 +19021,7 @@
       </p:sp>
       <p:sp>
         <p:nvSpPr>
-          <p:cNvPr id="650" name="Shape 616"/>
+          <p:cNvPr id="666" name="Shape 648"/>
           <p:cNvSpPr/>
           <p:nvPr/>
         </p:nvSpPr>
@@ -17493,7 +19045,7 @@
       </p:sp>
       <p:sp>
         <p:nvSpPr>
-          <p:cNvPr id="651" name="Shape 617"/>
+          <p:cNvPr id="667" name="Shape 649"/>
           <p:cNvSpPr/>
           <p:nvPr/>
         </p:nvSpPr>
@@ -17517,7 +19069,7 @@
       </p:sp>
       <p:sp>
         <p:nvSpPr>
-          <p:cNvPr id="652" name="Shape 618"/>
+          <p:cNvPr id="668" name="Shape 650"/>
           <p:cNvSpPr/>
           <p:nvPr/>
         </p:nvSpPr>
@@ -17541,7 +19093,7 @@
       </p:sp>
       <p:sp>
         <p:nvSpPr>
-          <p:cNvPr id="653" name="Shape 619"/>
+          <p:cNvPr id="669" name="Shape 651"/>
           <p:cNvSpPr/>
           <p:nvPr/>
         </p:nvSpPr>
@@ -17565,7 +19117,7 @@
       </p:sp>
       <p:sp>
         <p:nvSpPr>
-          <p:cNvPr id="654" name="Shape 620"/>
+          <p:cNvPr id="670" name="Shape 652"/>
           <p:cNvSpPr/>
           <p:nvPr/>
         </p:nvSpPr>
@@ -17589,7 +19141,7 @@
       </p:sp>
       <p:sp>
         <p:nvSpPr>
-          <p:cNvPr id="655" name="Shape 621"/>
+          <p:cNvPr id="671" name="Shape 653"/>
           <p:cNvSpPr/>
           <p:nvPr/>
         </p:nvSpPr>
@@ -17613,7 +19165,7 @@
       </p:sp>
       <p:sp>
         <p:nvSpPr>
-          <p:cNvPr id="656" name="Shape 622"/>
+          <p:cNvPr id="672" name="Shape 654"/>
           <p:cNvSpPr/>
           <p:nvPr/>
         </p:nvSpPr>
@@ -17637,7 +19189,7 @@
       </p:sp>
       <p:sp>
         <p:nvSpPr>
-          <p:cNvPr id="657" name="Shape 623"/>
+          <p:cNvPr id="673" name="Shape 655"/>
           <p:cNvSpPr/>
           <p:nvPr/>
         </p:nvSpPr>
@@ -17661,7 +19213,7 @@
       </p:sp>
       <p:sp>
         <p:nvSpPr>
-          <p:cNvPr id="658" name="Shape 624"/>
+          <p:cNvPr id="674" name="Shape 656"/>
           <p:cNvSpPr/>
           <p:nvPr/>
         </p:nvSpPr>
@@ -17685,7 +19237,7 @@
       </p:sp>
       <p:sp>
         <p:nvSpPr>
-          <p:cNvPr id="659" name="Shape 625"/>
+          <p:cNvPr id="675" name="Shape 657"/>
           <p:cNvSpPr/>
           <p:nvPr/>
         </p:nvSpPr>
@@ -17709,7 +19261,7 @@
       </p:sp>
       <p:sp>
         <p:nvSpPr>
-          <p:cNvPr id="660" name="Shape 626"/>
+          <p:cNvPr id="676" name="Shape 658"/>
           <p:cNvSpPr/>
           <p:nvPr/>
         </p:nvSpPr>
@@ -17733,7 +19285,7 @@
       </p:sp>
       <p:sp>
         <p:nvSpPr>
-          <p:cNvPr id="661" name="Shape 627"/>
+          <p:cNvPr id="677" name="Shape 659"/>
           <p:cNvSpPr/>
           <p:nvPr/>
         </p:nvSpPr>
@@ -17757,7 +19309,7 @@
       </p:sp>
       <p:sp>
         <p:nvSpPr>
-          <p:cNvPr id="662" name="Shape 628"/>
+          <p:cNvPr id="678" name="Shape 660"/>
           <p:cNvSpPr/>
           <p:nvPr/>
         </p:nvSpPr>
@@ -17781,7 +19333,7 @@
       </p:sp>
       <p:sp>
         <p:nvSpPr>
-          <p:cNvPr id="663" name="Shape 629"/>
+          <p:cNvPr id="679" name="Shape 661"/>
           <p:cNvSpPr/>
           <p:nvPr/>
         </p:nvSpPr>
@@ -17805,7 +19357,7 @@
       </p:sp>
       <p:sp>
         <p:nvSpPr>
-          <p:cNvPr id="664" name="Shape 630"/>
+          <p:cNvPr id="680" name="Shape 662"/>
           <p:cNvSpPr/>
           <p:nvPr/>
         </p:nvSpPr>
@@ -17829,7 +19381,7 @@
       </p:sp>
       <p:sp>
         <p:nvSpPr>
-          <p:cNvPr id="665" name="Shape 631"/>
+          <p:cNvPr id="681" name="Shape 663"/>
           <p:cNvSpPr/>
           <p:nvPr/>
         </p:nvSpPr>
@@ -17853,7 +19405,7 @@
       </p:sp>
       <p:sp>
         <p:nvSpPr>
-          <p:cNvPr id="666" name="Shape 632"/>
+          <p:cNvPr id="682" name="Shape 664"/>
           <p:cNvSpPr/>
           <p:nvPr/>
         </p:nvSpPr>
@@ -17877,7 +19429,7 @@
       </p:sp>
       <p:sp>
         <p:nvSpPr>
-          <p:cNvPr id="667" name="Shape 633"/>
+          <p:cNvPr id="683" name="Shape 665"/>
           <p:cNvSpPr/>
           <p:nvPr/>
         </p:nvSpPr>
@@ -17901,7 +19453,7 @@
       </p:sp>
       <p:sp>
         <p:nvSpPr>
-          <p:cNvPr id="668" name="Shape 634"/>
+          <p:cNvPr id="684" name="Shape 666"/>
           <p:cNvSpPr/>
           <p:nvPr/>
         </p:nvSpPr>
@@ -17925,7 +19477,7 @@
       </p:sp>
       <p:sp>
         <p:nvSpPr>
-          <p:cNvPr id="669" name="Shape 635"/>
+          <p:cNvPr id="685" name="Shape 667"/>
           <p:cNvSpPr/>
           <p:nvPr/>
         </p:nvSpPr>
@@ -17949,7 +19501,7 @@
       </p:sp>
       <p:sp>
         <p:nvSpPr>
-          <p:cNvPr id="670" name="Shape 636"/>
+          <p:cNvPr id="686" name="Shape 668"/>
           <p:cNvSpPr/>
           <p:nvPr/>
         </p:nvSpPr>
@@ -17973,7 +19525,7 @@
       </p:sp>
       <p:sp>
         <p:nvSpPr>
-          <p:cNvPr id="671" name="Shape 637"/>
+          <p:cNvPr id="687" name="Shape 669"/>
           <p:cNvSpPr/>
           <p:nvPr/>
         </p:nvSpPr>
@@ -17997,7 +19549,7 @@
       </p:sp>
       <p:sp>
         <p:nvSpPr>
-          <p:cNvPr id="672" name="Shape 638"/>
+          <p:cNvPr id="688" name="Shape 670"/>
           <p:cNvSpPr/>
           <p:nvPr/>
         </p:nvSpPr>
@@ -18021,7 +19573,7 @@
       </p:sp>
       <p:sp>
         <p:nvSpPr>
-          <p:cNvPr id="673" name="Shape 639"/>
+          <p:cNvPr id="689" name="Shape 671"/>
           <p:cNvSpPr/>
           <p:nvPr/>
         </p:nvSpPr>
@@ -18045,7 +19597,7 @@
       </p:sp>
       <p:sp>
         <p:nvSpPr>
-          <p:cNvPr id="674" name="Shape 640"/>
+          <p:cNvPr id="690" name="Shape 672"/>
           <p:cNvSpPr/>
           <p:nvPr/>
         </p:nvSpPr>
@@ -18065,7 +19617,7 @@
       </p:sp>
       <p:sp>
         <p:nvSpPr>
-          <p:cNvPr id="675" name="Text 641"/>
+          <p:cNvPr id="691" name="Text 673"/>
           <p:cNvSpPr/>
           <p:nvPr/>
         </p:nvSpPr>
@@ -18107,14 +19659,14 @@
       </p:sp>
       <p:pic>
         <p:nvPicPr>
-          <p:cNvPr id="676" name="Image 32" descr="/home/ahmed/Projects/ai_llm_slides/videos/deep-learning/002_transformers_part2/recreated_pptx/build/assets/s038_blkarrow.png">    </p:cNvPr>
+          <p:cNvPr id="692" name="Image 16" descr="/home/ahmed/Projects/ai_llm_slides/videos/deep-learning/002_transformers_part2/recreated_pptx/build/assets/s038_blkarrow.png">    </p:cNvPr>
           <p:cNvPicPr>
             <a:picLocks noChangeAspect="1"/>
           </p:cNvPicPr>
           <p:nvPr/>
         </p:nvPicPr>
         <p:blipFill>
-          <a:blip r:embed="rId33"/>
+          <a:blip r:embed="rId17"/>
           <a:stretch>
             <a:fillRect/>
           </a:stretch>
@@ -18131,14 +19683,14 @@
       </p:pic>
       <p:pic>
         <p:nvPicPr>
-          <p:cNvPr id="677" name="Image 33" descr="/home/ahmed/Projects/ai_llm_slides/videos/deep-learning/002_transformers_part2/recreated_pptx/build/assets/s038_blkarrow.png">    </p:cNvPr>
+          <p:cNvPr id="693" name="Image 17" descr="/home/ahmed/Projects/ai_llm_slides/videos/deep-learning/002_transformers_part2/recreated_pptx/build/assets/s038_blkarrow.png">    </p:cNvPr>
           <p:cNvPicPr>
             <a:picLocks noChangeAspect="1"/>
           </p:cNvPicPr>
           <p:nvPr/>
         </p:nvPicPr>
         <p:blipFill>
-          <a:blip r:embed="rId34"/>
+          <a:blip r:embed="rId18"/>
           <a:stretch>
             <a:fillRect/>
           </a:stretch>
@@ -18155,14 +19707,14 @@
       </p:pic>
       <p:pic>
         <p:nvPicPr>
-          <p:cNvPr id="678" name="Image 34" descr="/home/ahmed/Projects/ai_llm_slides/videos/deep-learning/002_transformers_part2/recreated_pptx/build/assets/s038_blkarrow.png">    </p:cNvPr>
+          <p:cNvPr id="694" name="Image 18" descr="/home/ahmed/Projects/ai_llm_slides/videos/deep-learning/002_transformers_part2/recreated_pptx/build/assets/s038_blkarrow.png">    </p:cNvPr>
           <p:cNvPicPr>
             <a:picLocks noChangeAspect="1"/>
           </p:cNvPicPr>
           <p:nvPr/>
         </p:nvPicPr>
         <p:blipFill>
-          <a:blip r:embed="rId35"/>
+          <a:blip r:embed="rId19"/>
           <a:stretch>
             <a:fillRect/>
           </a:stretch>
@@ -18179,14 +19731,14 @@
       </p:pic>
       <p:pic>
         <p:nvPicPr>
-          <p:cNvPr id="679" name="Image 35" descr="/home/ahmed/Projects/ai_llm_slides/videos/deep-learning/002_transformers_part2/recreated_pptx/build/assets/s038_blkarrow.png">    </p:cNvPr>
+          <p:cNvPr id="695" name="Image 19" descr="/home/ahmed/Projects/ai_llm_slides/videos/deep-learning/002_transformers_part2/recreated_pptx/build/assets/s038_blkarrow.png">    </p:cNvPr>
           <p:cNvPicPr>
             <a:picLocks noChangeAspect="1"/>
           </p:cNvPicPr>
           <p:nvPr/>
         </p:nvPicPr>
         <p:blipFill>
-          <a:blip r:embed="rId36"/>
+          <a:blip r:embed="rId20"/>
           <a:stretch>
             <a:fillRect/>
           </a:stretch>
@@ -18203,14 +19755,14 @@
       </p:pic>
       <p:pic>
         <p:nvPicPr>
-          <p:cNvPr id="680" name="Image 36" descr="/home/ahmed/Projects/ai_llm_slides/videos/deep-learning/002_transformers_part2/recreated_pptx/build/assets/s038_blkarrow.png">    </p:cNvPr>
+          <p:cNvPr id="696" name="Image 20" descr="/home/ahmed/Projects/ai_llm_slides/videos/deep-learning/002_transformers_part2/recreated_pptx/build/assets/s038_blkarrow.png">    </p:cNvPr>
           <p:cNvPicPr>
             <a:picLocks noChangeAspect="1"/>
           </p:cNvPicPr>
           <p:nvPr/>
         </p:nvPicPr>
         <p:blipFill>
-          <a:blip r:embed="rId37"/>
+          <a:blip r:embed="rId21"/>
           <a:stretch>
             <a:fillRect/>
           </a:stretch>
@@ -18227,14 +19779,14 @@
       </p:pic>
       <p:pic>
         <p:nvPicPr>
-          <p:cNvPr id="681" name="Image 37" descr="/home/ahmed/Projects/ai_llm_slides/videos/deep-learning/002_transformers_part2/recreated_pptx/build/assets/s038_blkarrow.png">    </p:cNvPr>
+          <p:cNvPr id="697" name="Image 21" descr="/home/ahmed/Projects/ai_llm_slides/videos/deep-learning/002_transformers_part2/recreated_pptx/build/assets/s038_blkarrow.png">    </p:cNvPr>
           <p:cNvPicPr>
             <a:picLocks noChangeAspect="1"/>
           </p:cNvPicPr>
           <p:nvPr/>
         </p:nvPicPr>
         <p:blipFill>
-          <a:blip r:embed="rId38"/>
+          <a:blip r:embed="rId22"/>
           <a:stretch>
             <a:fillRect/>
           </a:stretch>
@@ -18251,14 +19803,14 @@
       </p:pic>
       <p:pic>
         <p:nvPicPr>
-          <p:cNvPr id="682" name="Image 38" descr="/home/ahmed/Projects/ai_llm_slides/videos/deep-learning/002_transformers_part2/recreated_pptx/build/assets/s038_blkarrow.png">    </p:cNvPr>
+          <p:cNvPr id="698" name="Image 22" descr="/home/ahmed/Projects/ai_llm_slides/videos/deep-learning/002_transformers_part2/recreated_pptx/build/assets/s038_blkarrow.png">    </p:cNvPr>
           <p:cNvPicPr>
             <a:picLocks noChangeAspect="1"/>
           </p:cNvPicPr>
           <p:nvPr/>
         </p:nvPicPr>
         <p:blipFill>
-          <a:blip r:embed="rId39"/>
+          <a:blip r:embed="rId23"/>
           <a:stretch>
             <a:fillRect/>
           </a:stretch>
@@ -18275,14 +19827,14 @@
       </p:pic>
       <p:pic>
         <p:nvPicPr>
-          <p:cNvPr id="683" name="Image 39" descr="/home/ahmed/Projects/ai_llm_slides/videos/deep-learning/002_transformers_part2/recreated_pptx/build/assets/s038_blkarrow.png">    </p:cNvPr>
+          <p:cNvPr id="699" name="Image 23" descr="/home/ahmed/Projects/ai_llm_slides/videos/deep-learning/002_transformers_part2/recreated_pptx/build/assets/s038_blkarrow.png">    </p:cNvPr>
           <p:cNvPicPr>
             <a:picLocks noChangeAspect="1"/>
           </p:cNvPicPr>
           <p:nvPr/>
         </p:nvPicPr>
         <p:blipFill>
-          <a:blip r:embed="rId40"/>
+          <a:blip r:embed="rId24"/>
           <a:stretch>
             <a:fillRect/>
           </a:stretch>
@@ -18299,14 +19851,14 @@
       </p:pic>
       <p:pic>
         <p:nvPicPr>
-          <p:cNvPr id="684" name="Image 40" descr="/home/ahmed/Projects/ai_llm_slides/videos/deep-learning/002_transformers_part2/recreated_pptx/build/assets/s038_blkarrow.png">    </p:cNvPr>
+          <p:cNvPr id="700" name="Image 24" descr="/home/ahmed/Projects/ai_llm_slides/videos/deep-learning/002_transformers_part2/recreated_pptx/build/assets/s038_blkarrow.png">    </p:cNvPr>
           <p:cNvPicPr>
             <a:picLocks noChangeAspect="1"/>
           </p:cNvPicPr>
           <p:nvPr/>
         </p:nvPicPr>
         <p:blipFill>
-          <a:blip r:embed="rId41"/>
+          <a:blip r:embed="rId25"/>
           <a:stretch>
             <a:fillRect/>
           </a:stretch>
@@ -18323,14 +19875,14 @@
       </p:pic>
       <p:pic>
         <p:nvPicPr>
-          <p:cNvPr id="685" name="Image 41" descr="/home/ahmed/Projects/ai_llm_slides/videos/deep-learning/002_transformers_part2/recreated_pptx/build/assets/s038_blkarrow.png">    </p:cNvPr>
+          <p:cNvPr id="701" name="Image 25" descr="/home/ahmed/Projects/ai_llm_slides/videos/deep-learning/002_transformers_part2/recreated_pptx/build/assets/s038_blkarrow.png">    </p:cNvPr>
           <p:cNvPicPr>
             <a:picLocks noChangeAspect="1"/>
           </p:cNvPicPr>
           <p:nvPr/>
         </p:nvPicPr>
         <p:blipFill>
-          <a:blip r:embed="rId42"/>
+          <a:blip r:embed="rId26"/>
           <a:stretch>
             <a:fillRect/>
           </a:stretch>
@@ -18347,14 +19899,14 @@
       </p:pic>
       <p:pic>
         <p:nvPicPr>
-          <p:cNvPr id="686" name="Image 42" descr="/home/ahmed/Projects/ai_llm_slides/videos/deep-learning/002_transformers_part2/recreated_pptx/build/assets/s038_blkarrow.png">    </p:cNvPr>
+          <p:cNvPr id="702" name="Image 26" descr="/home/ahmed/Projects/ai_llm_slides/videos/deep-learning/002_transformers_part2/recreated_pptx/build/assets/s038_blkarrow.png">    </p:cNvPr>
           <p:cNvPicPr>
             <a:picLocks noChangeAspect="1"/>
           </p:cNvPicPr>
           <p:nvPr/>
         </p:nvPicPr>
         <p:blipFill>
-          <a:blip r:embed="rId43"/>
+          <a:blip r:embed="rId27"/>
           <a:stretch>
             <a:fillRect/>
           </a:stretch>
@@ -18371,14 +19923,14 @@
       </p:pic>
       <p:pic>
         <p:nvPicPr>
-          <p:cNvPr id="687" name="Image 43" descr="/home/ahmed/Projects/ai_llm_slides/videos/deep-learning/002_transformers_part2/recreated_pptx/build/assets/s038_blkarrow.png">    </p:cNvPr>
+          <p:cNvPr id="703" name="Image 27" descr="/home/ahmed/Projects/ai_llm_slides/videos/deep-learning/002_transformers_part2/recreated_pptx/build/assets/s038_blkarrow.png">    </p:cNvPr>
           <p:cNvPicPr>
             <a:picLocks noChangeAspect="1"/>
           </p:cNvPicPr>
           <p:nvPr/>
         </p:nvPicPr>
         <p:blipFill>
-          <a:blip r:embed="rId44"/>
+          <a:blip r:embed="rId28"/>
           <a:stretch>
             <a:fillRect/>
           </a:stretch>
@@ -18395,14 +19947,14 @@
       </p:pic>
       <p:pic>
         <p:nvPicPr>
-          <p:cNvPr id="688" name="Image 44" descr="/home/ahmed/Projects/ai_llm_slides/videos/deep-learning/002_transformers_part2/recreated_pptx/build/assets/s038_blkarrow.png">    </p:cNvPr>
+          <p:cNvPr id="704" name="Image 28" descr="/home/ahmed/Projects/ai_llm_slides/videos/deep-learning/002_transformers_part2/recreated_pptx/build/assets/s038_blkarrow.png">    </p:cNvPr>
           <p:cNvPicPr>
             <a:picLocks noChangeAspect="1"/>
           </p:cNvPicPr>
           <p:nvPr/>
         </p:nvPicPr>
         <p:blipFill>
-          <a:blip r:embed="rId45"/>
+          <a:blip r:embed="rId29"/>
           <a:stretch>
             <a:fillRect/>
           </a:stretch>
@@ -18419,14 +19971,14 @@
       </p:pic>
       <p:pic>
         <p:nvPicPr>
-          <p:cNvPr id="689" name="Image 45" descr="/home/ahmed/Projects/ai_llm_slides/videos/deep-learning/002_transformers_part2/recreated_pptx/build/assets/s038_blkarrow.png">    </p:cNvPr>
+          <p:cNvPr id="705" name="Image 29" descr="/home/ahmed/Projects/ai_llm_slides/videos/deep-learning/002_transformers_part2/recreated_pptx/build/assets/s038_blkarrow.png">    </p:cNvPr>
           <p:cNvPicPr>
             <a:picLocks noChangeAspect="1"/>
           </p:cNvPicPr>
           <p:nvPr/>
         </p:nvPicPr>
         <p:blipFill>
-          <a:blip r:embed="rId46"/>
+          <a:blip r:embed="rId30"/>
           <a:stretch>
             <a:fillRect/>
           </a:stretch>
@@ -18443,14 +19995,14 @@
       </p:pic>
       <p:pic>
         <p:nvPicPr>
-          <p:cNvPr id="690" name="Image 46" descr="/home/ahmed/Projects/ai_llm_slides/videos/deep-learning/002_transformers_part2/recreated_pptx/build/assets/s038_blkarrow.png">    </p:cNvPr>
+          <p:cNvPr id="706" name="Image 30" descr="/home/ahmed/Projects/ai_llm_slides/videos/deep-learning/002_transformers_part2/recreated_pptx/build/assets/s038_blkarrow.png">    </p:cNvPr>
           <p:cNvPicPr>
             <a:picLocks noChangeAspect="1"/>
           </p:cNvPicPr>
           <p:nvPr/>
         </p:nvPicPr>
         <p:blipFill>
-          <a:blip r:embed="rId47"/>
+          <a:blip r:embed="rId31"/>
           <a:stretch>
             <a:fillRect/>
           </a:stretch>
@@ -18467,14 +20019,14 @@
       </p:pic>
       <p:pic>
         <p:nvPicPr>
-          <p:cNvPr id="691" name="Image 47" descr="/home/ahmed/Projects/ai_llm_slides/videos/deep-learning/002_transformers_part2/recreated_pptx/build/assets/s038_blkarrow.png">    </p:cNvPr>
+          <p:cNvPr id="707" name="Image 31" descr="/home/ahmed/Projects/ai_llm_slides/videos/deep-learning/002_transformers_part2/recreated_pptx/build/assets/s038_blkarrow.png">    </p:cNvPr>
           <p:cNvPicPr>
             <a:picLocks noChangeAspect="1"/>
           </p:cNvPicPr>
           <p:nvPr/>
         </p:nvPicPr>
         <p:blipFill>
-          <a:blip r:embed="rId48"/>
+          <a:blip r:embed="rId32"/>
           <a:stretch>
             <a:fillRect/>
           </a:stretch>
@@ -18491,7 +20043,7 @@
       </p:pic>
       <p:sp>
         <p:nvSpPr>
-          <p:cNvPr id="692" name="Shape 642"/>
+          <p:cNvPr id="708" name="Shape 674"/>
           <p:cNvSpPr/>
           <p:nvPr/>
         </p:nvSpPr>
@@ -18516,7 +20068,7 @@
       </p:sp>
       <p:sp>
         <p:nvSpPr>
-          <p:cNvPr id="693" name="Shape 643"/>
+          <p:cNvPr id="709" name="Shape 675"/>
           <p:cNvSpPr/>
           <p:nvPr/>
         </p:nvSpPr>
@@ -18541,7 +20093,7 @@
       </p:sp>
       <p:sp>
         <p:nvSpPr>
-          <p:cNvPr id="694" name="Shape 644"/>
+          <p:cNvPr id="710" name="Shape 676"/>
           <p:cNvSpPr/>
           <p:nvPr/>
         </p:nvSpPr>
@@ -18566,7 +20118,7 @@
       </p:sp>
       <p:sp>
         <p:nvSpPr>
-          <p:cNvPr id="695" name="Shape 645"/>
+          <p:cNvPr id="711" name="Shape 677"/>
           <p:cNvSpPr/>
           <p:nvPr/>
         </p:nvSpPr>
@@ -18591,7 +20143,7 @@
       </p:sp>
       <p:sp>
         <p:nvSpPr>
-          <p:cNvPr id="696" name="Text 646"/>
+          <p:cNvPr id="712" name="Text 678"/>
           <p:cNvSpPr/>
           <p:nvPr/>
         </p:nvSpPr>
@@ -18650,7 +20202,7 @@
       </p:sp>
       <p:sp>
         <p:nvSpPr>
-          <p:cNvPr id="697" name="Shape 647"/>
+          <p:cNvPr id="713" name="Shape 679"/>
           <p:cNvSpPr/>
           <p:nvPr/>
         </p:nvSpPr>
@@ -18675,7 +20227,7 @@
       </p:sp>
       <p:sp>
         <p:nvSpPr>
-          <p:cNvPr id="698" name="Shape 648"/>
+          <p:cNvPr id="714" name="Shape 680"/>
           <p:cNvSpPr/>
           <p:nvPr/>
         </p:nvSpPr>
@@ -18700,7 +20252,7 @@
       </p:sp>
       <p:sp>
         <p:nvSpPr>
-          <p:cNvPr id="699" name="Shape 649"/>
+          <p:cNvPr id="715" name="Shape 681"/>
           <p:cNvSpPr/>
           <p:nvPr/>
         </p:nvSpPr>
@@ -18725,7 +20277,7 @@
       </p:sp>
       <p:sp>
         <p:nvSpPr>
-          <p:cNvPr id="700" name="Shape 650"/>
+          <p:cNvPr id="716" name="Shape 682"/>
           <p:cNvSpPr/>
           <p:nvPr/>
         </p:nvSpPr>
@@ -18750,7 +20302,7 @@
       </p:sp>
       <p:sp>
         <p:nvSpPr>
-          <p:cNvPr id="701" name="Text 651"/>
+          <p:cNvPr id="717" name="Text 683"/>
           <p:cNvSpPr/>
           <p:nvPr/>
         </p:nvSpPr>
@@ -18809,7 +20361,7 @@
       </p:sp>
       <p:sp>
         <p:nvSpPr>
-          <p:cNvPr id="702" name="Shape 652"/>
+          <p:cNvPr id="718" name="Shape 684"/>
           <p:cNvSpPr/>
           <p:nvPr/>
         </p:nvSpPr>
@@ -18834,7 +20386,7 @@
       </p:sp>
       <p:sp>
         <p:nvSpPr>
-          <p:cNvPr id="703" name="Shape 653"/>
+          <p:cNvPr id="719" name="Shape 685"/>
           <p:cNvSpPr/>
           <p:nvPr/>
         </p:nvSpPr>
@@ -18859,7 +20411,7 @@
       </p:sp>
       <p:sp>
         <p:nvSpPr>
-          <p:cNvPr id="704" name="Shape 654"/>
+          <p:cNvPr id="720" name="Shape 686"/>
           <p:cNvSpPr/>
           <p:nvPr/>
         </p:nvSpPr>
@@ -18884,7 +20436,7 @@
       </p:sp>
       <p:sp>
         <p:nvSpPr>
-          <p:cNvPr id="705" name="Shape 655"/>
+          <p:cNvPr id="721" name="Shape 687"/>
           <p:cNvSpPr/>
           <p:nvPr/>
         </p:nvSpPr>
@@ -18909,7 +20461,7 @@
       </p:sp>
       <p:sp>
         <p:nvSpPr>
-          <p:cNvPr id="706" name="Text 656"/>
+          <p:cNvPr id="722" name="Text 688"/>
           <p:cNvSpPr/>
           <p:nvPr/>
         </p:nvSpPr>
@@ -18968,7 +20520,7 @@
       </p:sp>
       <p:sp>
         <p:nvSpPr>
-          <p:cNvPr id="707" name="Shape 657"/>
+          <p:cNvPr id="723" name="Shape 689"/>
           <p:cNvSpPr/>
           <p:nvPr/>
         </p:nvSpPr>
@@ -18993,7 +20545,7 @@
       </p:sp>
       <p:sp>
         <p:nvSpPr>
-          <p:cNvPr id="708" name="Shape 658"/>
+          <p:cNvPr id="724" name="Shape 690"/>
           <p:cNvSpPr/>
           <p:nvPr/>
         </p:nvSpPr>
@@ -19018,7 +20570,7 @@
       </p:sp>
       <p:sp>
         <p:nvSpPr>
-          <p:cNvPr id="709" name="Shape 659"/>
+          <p:cNvPr id="725" name="Shape 691"/>
           <p:cNvSpPr/>
           <p:nvPr/>
         </p:nvSpPr>
@@ -19043,7 +20595,7 @@
       </p:sp>
       <p:sp>
         <p:nvSpPr>
-          <p:cNvPr id="710" name="Shape 660"/>
+          <p:cNvPr id="726" name="Shape 692"/>
           <p:cNvSpPr/>
           <p:nvPr/>
         </p:nvSpPr>
@@ -19068,7 +20620,7 @@
       </p:sp>
       <p:sp>
         <p:nvSpPr>
-          <p:cNvPr id="711" name="Text 661"/>
+          <p:cNvPr id="727" name="Text 693"/>
           <p:cNvSpPr/>
           <p:nvPr/>
         </p:nvSpPr>
@@ -19127,7 +20679,7 @@
       </p:sp>
       <p:sp>
         <p:nvSpPr>
-          <p:cNvPr id="712" name="Shape 662"/>
+          <p:cNvPr id="728" name="Shape 694"/>
           <p:cNvSpPr/>
           <p:nvPr/>
         </p:nvSpPr>
@@ -19152,7 +20704,7 @@
       </p:sp>
       <p:sp>
         <p:nvSpPr>
-          <p:cNvPr id="713" name="Shape 663"/>
+          <p:cNvPr id="729" name="Shape 695"/>
           <p:cNvSpPr/>
           <p:nvPr/>
         </p:nvSpPr>
@@ -19177,7 +20729,7 @@
       </p:sp>
       <p:sp>
         <p:nvSpPr>
-          <p:cNvPr id="714" name="Shape 664"/>
+          <p:cNvPr id="730" name="Shape 696"/>
           <p:cNvSpPr/>
           <p:nvPr/>
         </p:nvSpPr>
@@ -19202,7 +20754,7 @@
       </p:sp>
       <p:sp>
         <p:nvSpPr>
-          <p:cNvPr id="715" name="Shape 665"/>
+          <p:cNvPr id="731" name="Shape 697"/>
           <p:cNvSpPr/>
           <p:nvPr/>
         </p:nvSpPr>
@@ -19227,7 +20779,7 @@
       </p:sp>
       <p:sp>
         <p:nvSpPr>
-          <p:cNvPr id="716" name="Text 666"/>
+          <p:cNvPr id="732" name="Text 698"/>
           <p:cNvSpPr/>
           <p:nvPr/>
         </p:nvSpPr>
@@ -19286,7 +20838,7 @@
       </p:sp>
       <p:sp>
         <p:nvSpPr>
-          <p:cNvPr id="717" name="Shape 667"/>
+          <p:cNvPr id="733" name="Shape 699"/>
           <p:cNvSpPr/>
           <p:nvPr/>
         </p:nvSpPr>
@@ -19311,7 +20863,7 @@
       </p:sp>
       <p:sp>
         <p:nvSpPr>
-          <p:cNvPr id="718" name="Shape 668"/>
+          <p:cNvPr id="734" name="Shape 700"/>
           <p:cNvSpPr/>
           <p:nvPr/>
         </p:nvSpPr>
@@ -19336,7 +20888,7 @@
       </p:sp>
       <p:sp>
         <p:nvSpPr>
-          <p:cNvPr id="719" name="Shape 669"/>
+          <p:cNvPr id="735" name="Shape 701"/>
           <p:cNvSpPr/>
           <p:nvPr/>
         </p:nvSpPr>
@@ -19361,7 +20913,7 @@
       </p:sp>
       <p:sp>
         <p:nvSpPr>
-          <p:cNvPr id="720" name="Shape 670"/>
+          <p:cNvPr id="736" name="Shape 702"/>
           <p:cNvSpPr/>
           <p:nvPr/>
         </p:nvSpPr>
@@ -19386,7 +20938,7 @@
       </p:sp>
       <p:sp>
         <p:nvSpPr>
-          <p:cNvPr id="721" name="Text 671"/>
+          <p:cNvPr id="737" name="Text 703"/>
           <p:cNvSpPr/>
           <p:nvPr/>
         </p:nvSpPr>
@@ -19445,7 +20997,7 @@
       </p:sp>
       <p:sp>
         <p:nvSpPr>
-          <p:cNvPr id="722" name="Shape 672"/>
+          <p:cNvPr id="738" name="Shape 704"/>
           <p:cNvSpPr/>
           <p:nvPr/>
         </p:nvSpPr>
@@ -19470,7 +21022,7 @@
       </p:sp>
       <p:sp>
         <p:nvSpPr>
-          <p:cNvPr id="723" name="Shape 673"/>
+          <p:cNvPr id="739" name="Shape 705"/>
           <p:cNvSpPr/>
           <p:nvPr/>
         </p:nvSpPr>
@@ -19495,7 +21047,7 @@
       </p:sp>
       <p:sp>
         <p:nvSpPr>
-          <p:cNvPr id="724" name="Shape 674"/>
+          <p:cNvPr id="740" name="Shape 706"/>
           <p:cNvSpPr/>
           <p:nvPr/>
         </p:nvSpPr>
@@ -19520,7 +21072,7 @@
       </p:sp>
       <p:sp>
         <p:nvSpPr>
-          <p:cNvPr id="725" name="Shape 675"/>
+          <p:cNvPr id="741" name="Shape 707"/>
           <p:cNvSpPr/>
           <p:nvPr/>
         </p:nvSpPr>
@@ -19545,7 +21097,7 @@
       </p:sp>
       <p:sp>
         <p:nvSpPr>
-          <p:cNvPr id="726" name="Text 676"/>
+          <p:cNvPr id="742" name="Text 708"/>
           <p:cNvSpPr/>
           <p:nvPr/>
         </p:nvSpPr>
@@ -19604,7 +21156,7 @@
       </p:sp>
       <p:sp>
         <p:nvSpPr>
-          <p:cNvPr id="727" name="Shape 677"/>
+          <p:cNvPr id="743" name="Shape 709"/>
           <p:cNvSpPr/>
           <p:nvPr/>
         </p:nvSpPr>
@@ -19629,7 +21181,7 @@
       </p:sp>
       <p:sp>
         <p:nvSpPr>
-          <p:cNvPr id="728" name="Shape 678"/>
+          <p:cNvPr id="744" name="Shape 710"/>
           <p:cNvSpPr/>
           <p:nvPr/>
         </p:nvSpPr>
@@ -19654,7 +21206,7 @@
       </p:sp>
       <p:sp>
         <p:nvSpPr>
-          <p:cNvPr id="729" name="Shape 679"/>
+          <p:cNvPr id="745" name="Shape 711"/>
           <p:cNvSpPr/>
           <p:nvPr/>
         </p:nvSpPr>
@@ -19679,7 +21231,7 @@
       </p:sp>
       <p:sp>
         <p:nvSpPr>
-          <p:cNvPr id="730" name="Shape 680"/>
+          <p:cNvPr id="746" name="Shape 712"/>
           <p:cNvSpPr/>
           <p:nvPr/>
         </p:nvSpPr>
@@ -19704,7 +21256,7 @@
       </p:sp>
       <p:sp>
         <p:nvSpPr>
-          <p:cNvPr id="731" name="Text 681"/>
+          <p:cNvPr id="747" name="Text 713"/>
           <p:cNvSpPr/>
           <p:nvPr/>
         </p:nvSpPr>
@@ -19763,7 +21315,7 @@
       </p:sp>
       <p:sp>
         <p:nvSpPr>
-          <p:cNvPr id="732" name="Shape 682"/>
+          <p:cNvPr id="748" name="Shape 714"/>
           <p:cNvSpPr/>
           <p:nvPr/>
         </p:nvSpPr>
@@ -19783,7 +21335,7 @@
       </p:sp>
       <p:sp>
         <p:nvSpPr>
-          <p:cNvPr id="733" name="Shape 683"/>
+          <p:cNvPr id="749" name="Shape 715"/>
           <p:cNvSpPr/>
           <p:nvPr/>
         </p:nvSpPr>
@@ -19803,7 +21355,7 @@
       </p:sp>
       <p:sp>
         <p:nvSpPr>
-          <p:cNvPr id="734" name="Shape 684"/>
+          <p:cNvPr id="750" name="Shape 716"/>
           <p:cNvSpPr/>
           <p:nvPr/>
         </p:nvSpPr>
@@ -19823,7 +21375,7 @@
       </p:sp>
       <p:sp>
         <p:nvSpPr>
-          <p:cNvPr id="735" name="Shape 685"/>
+          <p:cNvPr id="751" name="Shape 717"/>
           <p:cNvSpPr/>
           <p:nvPr/>
         </p:nvSpPr>
@@ -19843,7 +21395,7 @@
       </p:sp>
       <p:sp>
         <p:nvSpPr>
-          <p:cNvPr id="736" name="Shape 686"/>
+          <p:cNvPr id="752" name="Shape 718"/>
           <p:cNvSpPr/>
           <p:nvPr/>
         </p:nvSpPr>
@@ -19863,7 +21415,7 @@
       </p:sp>
       <p:sp>
         <p:nvSpPr>
-          <p:cNvPr id="737" name="Text 687"/>
+          <p:cNvPr id="753" name="Text 719"/>
           <p:cNvSpPr/>
           <p:nvPr/>
         </p:nvSpPr>
@@ -19902,7 +21454,7 @@
       </p:sp>
       <p:sp>
         <p:nvSpPr>
-          <p:cNvPr id="738" name="Text 688"/>
+          <p:cNvPr id="754" name="Text 720"/>
           <p:cNvSpPr/>
           <p:nvPr/>
         </p:nvSpPr>
@@ -19941,7 +21493,7 @@
       </p:sp>
       <p:sp>
         <p:nvSpPr>
-          <p:cNvPr id="739" name="Text 689"/>
+          <p:cNvPr id="755" name="Text 721"/>
           <p:cNvSpPr/>
           <p:nvPr/>
         </p:nvSpPr>
@@ -19980,7 +21532,7 @@
       </p:sp>
       <p:sp>
         <p:nvSpPr>
-          <p:cNvPr id="740" name="Text 690"/>
+          <p:cNvPr id="756" name="Text 722"/>
           <p:cNvSpPr/>
           <p:nvPr/>
         </p:nvSpPr>
@@ -20019,7 +21571,7 @@
       </p:sp>
       <p:sp>
         <p:nvSpPr>
-          <p:cNvPr id="741" name="Text 691"/>
+          <p:cNvPr id="757" name="Text 723"/>
           <p:cNvSpPr/>
           <p:nvPr/>
         </p:nvSpPr>
@@ -20058,7 +21610,7 @@
       </p:sp>
       <p:sp>
         <p:nvSpPr>
-          <p:cNvPr id="742" name="Text 692"/>
+          <p:cNvPr id="758" name="Text 724"/>
           <p:cNvSpPr/>
           <p:nvPr/>
         </p:nvSpPr>
@@ -20097,7 +21649,7 @@
       </p:sp>
       <p:sp>
         <p:nvSpPr>
-          <p:cNvPr id="743" name="Text 693"/>
+          <p:cNvPr id="759" name="Text 725"/>
           <p:cNvSpPr/>
           <p:nvPr/>
         </p:nvSpPr>
@@ -20136,7 +21688,7 @@
       </p:sp>
       <p:sp>
         <p:nvSpPr>
-          <p:cNvPr id="744" name="Text 694"/>
+          <p:cNvPr id="760" name="Text 726"/>
           <p:cNvSpPr/>
           <p:nvPr/>
         </p:nvSpPr>
@@ -20175,7 +21727,7 @@
       </p:sp>
       <p:sp>
         <p:nvSpPr>
-          <p:cNvPr id="745" name="Shape 695"/>
+          <p:cNvPr id="761" name="Shape 727"/>
           <p:cNvSpPr/>
           <p:nvPr/>
         </p:nvSpPr>
@@ -20200,7 +21752,7 @@
       </p:sp>
       <p:sp>
         <p:nvSpPr>
-          <p:cNvPr id="746" name="Text 696"/>
+          <p:cNvPr id="762" name="Text 728"/>
           <p:cNvSpPr/>
           <p:nvPr/>
         </p:nvSpPr>
@@ -20262,7 +21814,7 @@
       </p:sp>
       <p:sp>
         <p:nvSpPr>
-          <p:cNvPr id="747" name="Shape 697"/>
+          <p:cNvPr id="763" name="Shape 729"/>
           <p:cNvSpPr/>
           <p:nvPr/>
         </p:nvSpPr>
@@ -20282,7 +21834,7 @@
       </p:sp>
       <p:sp>
         <p:nvSpPr>
-          <p:cNvPr id="748" name="Text 698"/>
+          <p:cNvPr id="764" name="Text 730"/>
           <p:cNvSpPr/>
           <p:nvPr/>
         </p:nvSpPr>
@@ -20321,7 +21873,7 @@
       </p:sp>
       <p:sp>
         <p:nvSpPr>
-          <p:cNvPr id="749" name="Shape 699"/>
+          <p:cNvPr id="765" name="Shape 731"/>
           <p:cNvSpPr/>
           <p:nvPr/>
         </p:nvSpPr>
@@ -20346,7 +21898,7 @@
       </p:sp>
       <p:sp>
         <p:nvSpPr>
-          <p:cNvPr id="750" name="Text 700"/>
+          <p:cNvPr id="766" name="Text 732"/>
           <p:cNvSpPr/>
           <p:nvPr/>
         </p:nvSpPr>
